--- a/Content-Marketing/M01-Positioning-Kompetitor/K3-M01-Positioning-Kompetitor.pptx
+++ b/Content-Marketing/M01-Positioning-Kompetitor/K3-M01-Positioning-Kompetitor.pptx
@@ -9,12 +9,13 @@
     <p:sldId id="257" r:id="rId3"/>
     <p:sldId id="258" r:id="rId4"/>
     <p:sldId id="259" r:id="rId5"/>
+    <p:sldId id="260" r:id="rId6"/>
   </p:sldIdLst>
   <p:notesMasterIdLst>
-    <p:notesMasterId r:id="rId6"/>
+    <p:notesMasterId r:id="rId7"/>
   </p:notesMasterIdLst>
-  <p:sldSz cx="12192000" cy="6858000"/>
-  <p:notesSz cx="6858000" cy="12192000"/>
+  <p:sldSz cx="12191695" cy="6858000"/>
+  <p:notesSz cx="6858000" cy="12191695"/>
   <p:defaultTextStyle>
     <a:lvl1pPr marL="0" algn="l" defTabSz="914400" rtl="0" eaLnBrk="1" latinLnBrk="0" hangingPunct="1">
       <a:defRPr sz="1800" kern="1200">
@@ -811,6 +812,94 @@
 </p:notes>
 </file>
 
+<file path=ppt/notesSlides/notesSlide5.xml><?xml version="1.0" encoding="utf-8"?>
+<p:notes xmlns:a="http://schemas.openxmlformats.org/drawingml/2006/main" xmlns:r="http://schemas.openxmlformats.org/officeDocument/2006/relationships" xmlns:p="http://schemas.openxmlformats.org/presentationml/2006/main">
+  <p:cSld>
+    <p:spTree>
+      <p:nvGrpSpPr>
+        <p:cNvPr id="1" name=""/>
+        <p:cNvGrpSpPr/>
+        <p:nvPr/>
+      </p:nvGrpSpPr>
+      <p:grpSpPr>
+        <a:xfrm>
+          <a:off x="0" y="0"/>
+          <a:ext cx="0" cy="0"/>
+          <a:chOff x="0" y="0"/>
+          <a:chExt cx="0" cy="0"/>
+        </a:xfrm>
+      </p:grpSpPr>
+      <p:sp>
+        <p:nvSpPr>
+          <p:cNvPr id="2" name="Slide Image Placeholder 1"/>
+          <p:cNvSpPr>
+            <a:spLocks noGrp="1" noRot="1" noChangeAspect="1"/>
+          </p:cNvSpPr>
+          <p:nvPr>
+            <p:ph type="sldImg"/>
+          </p:nvPr>
+        </p:nvSpPr>
+        <p:spPr/>
+      </p:sp>
+      <p:sp>
+        <p:nvSpPr>
+          <p:cNvPr id="3" name="Notes Placeholder 2"/>
+          <p:cNvSpPr>
+            <a:spLocks noGrp="1"/>
+          </p:cNvSpPr>
+          <p:nvPr>
+            <p:ph type="body" idx="1"/>
+          </p:nvPr>
+        </p:nvSpPr>
+        <p:spPr/>
+        <p:txBody>
+          <a:bodyPr/>
+          <a:lstStyle/>
+          <a:p>
+            <a:r>
+              <a:rPr lang="en-US" dirty="0"/>
+              <a:t/>
+            </a:r>
+            <a:endParaRPr lang="en-US" dirty="0"/>
+          </a:p>
+        </p:txBody>
+      </p:sp>
+      <p:sp>
+        <p:nvSpPr>
+          <p:cNvPr id="4" name="Slide Number Placeholder 3"/>
+          <p:cNvSpPr>
+            <a:spLocks noGrp="1"/>
+          </p:cNvSpPr>
+          <p:nvPr>
+            <p:ph type="sldNum" sz="quarter" idx="10"/>
+          </p:nvPr>
+        </p:nvSpPr>
+        <p:spPr/>
+        <p:txBody>
+          <a:bodyPr/>
+          <a:lstStyle/>
+          <a:p>
+            <a:fld id="{F7021451-1387-4CA6-816F-3879F97B5CBC}" type="slidenum">
+              <a:rPr lang="en-US"/>
+              <a:t>5</a:t>
+            </a:fld>
+            <a:endParaRPr lang="en-US"/>
+          </a:p>
+        </p:txBody>
+      </p:sp>
+    </p:spTree>
+    <p:extLst>
+      <p:ext uri="{BB962C8B-B14F-4D97-AF65-F5344CB8AC3E}">
+        <p14:creationId xmlns:p14="http://schemas.microsoft.com/office/powerpoint/2010/main" val="1024086991"/>
+      </p:ext>
+    </p:extLst>
+  </p:cSld>
+  <p:clrMapOvr>
+    <a:masterClrMapping/>
+  </p:clrMapOvr>
+</p:notes>
+</file>
+
 <file path=ppt/slideLayouts/slideLayout1.xml><?xml version="1.0" encoding="utf-8"?>
 <p:sldLayout xmlns:a="http://schemas.openxmlformats.org/drawingml/2006/main" xmlns:r="http://schemas.openxmlformats.org/officeDocument/2006/relationships" xmlns:p="http://schemas.openxmlformats.org/presentationml/2006/main" preserve="1">
   <p:cSld name="DEFAULT">
@@ -1124,7 +1213,7 @@
     <p:bg>
       <p:bgPr>
         <a:solidFill>
-          <a:srgbClr val="A8452F"/>
+          <a:srgbClr val="FFFFFF"/>
         </a:solidFill>
       </p:bgPr>
     </p:bg>
@@ -1150,52 +1239,70 @@
         </p:nvSpPr>
         <p:spPr>
           <a:xfrm>
-            <a:off x="9692640" y="4206240"/>
-            <a:ext cx="3840480" cy="3840480"/>
-          </a:xfrm>
-          <a:prstGeom prst="ellipse">
-            <a:avLst/>
-          </a:prstGeom>
-          <a:solidFill>
-            <a:srgbClr val="B85A3E">
-              <a:alpha val="60000"/>
-            </a:srgbClr>
-          </a:solidFill>
-          <a:ln/>
-        </p:spPr>
-      </p:sp>
-      <p:sp>
-        <p:nvSpPr>
-          <p:cNvPr id="3" name="Text 1"/>
-          <p:cNvSpPr/>
-          <p:nvPr/>
-        </p:nvSpPr>
-        <p:spPr>
-          <a:xfrm>
-            <a:off x="640080" y="502920"/>
-            <a:ext cx="3657600" cy="365760"/>
-          </a:xfrm>
-          <a:prstGeom prst="rect">
-            <a:avLst/>
-          </a:prstGeom>
-          <a:noFill/>
-          <a:ln/>
-        </p:spPr>
-        <p:txBody>
-          <a:bodyPr wrap="square" rtlCol="0" anchor="ctr"/>
+            <a:off x="7562088" y="0"/>
+            <a:ext cx="4626864" cy="6858000"/>
+          </a:xfrm>
+          <a:prstGeom prst="rect">
+            <a:avLst/>
+          </a:prstGeom>
+          <a:solidFill>
+            <a:srgbClr val="141D33"/>
+          </a:solidFill>
+          <a:ln/>
+        </p:spPr>
+      </p:sp>
+      <p:sp>
+        <p:nvSpPr>
+          <p:cNvPr id="3" name="Shape 1"/>
+          <p:cNvSpPr/>
+          <p:nvPr/>
+        </p:nvSpPr>
+        <p:spPr>
+          <a:xfrm>
+            <a:off x="0" y="0"/>
+            <a:ext cx="7562088" cy="6858000"/>
+          </a:xfrm>
+          <a:prstGeom prst="rect">
+            <a:avLst/>
+          </a:prstGeom>
+          <a:solidFill>
+            <a:srgbClr val="0D1321"/>
+          </a:solidFill>
+          <a:ln/>
+        </p:spPr>
+      </p:sp>
+      <p:sp>
+        <p:nvSpPr>
+          <p:cNvPr id="4" name="Text 2"/>
+          <p:cNvSpPr/>
+          <p:nvPr/>
+        </p:nvSpPr>
+        <p:spPr>
+          <a:xfrm>
+            <a:off x="548640" y="457200"/>
+            <a:ext cx="3657600" cy="457200"/>
+          </a:xfrm>
+          <a:prstGeom prst="rect">
+            <a:avLst/>
+          </a:prstGeom>
+          <a:noFill/>
+          <a:ln/>
+        </p:spPr>
+        <p:txBody>
+          <a:bodyPr wrap="square" lIns="0" tIns="0" rIns="0" bIns="0" rtlCol="0" anchor="ctr"/>
           <a:lstStyle/>
           <a:p>
             <a:pPr indent="0" marL="0">
               <a:buNone/>
             </a:pPr>
             <a:r>
-              <a:rPr lang="en-US" sz="1500" b="1" dirty="0">
+              <a:rPr lang="en-US" sz="2000" b="1" dirty="0">
                 <a:solidFill>
                   <a:srgbClr val="FFFFFF"/>
                 </a:solidFill>
-                <a:latin typeface="Calibri" pitchFamily="34" charset="0"/>
-                <a:ea typeface="Calibri" pitchFamily="34" charset="-122"/>
-                <a:cs typeface="Calibri" pitchFamily="34" charset="-120"/>
+                <a:latin typeface="Arial" pitchFamily="34" charset="0"/>
+                <a:ea typeface="Arial" pitchFamily="34" charset="-122"/>
+                <a:cs typeface="Arial" pitchFamily="34" charset="-120"/>
               </a:rPr>
               <a:t>belajar</a:t>
             </a:r>
@@ -1203,54 +1310,115 @@
               <a:buNone/>
             </a:pPr>
             <a:r>
-              <a:rPr lang="en-US" sz="1500" b="1" dirty="0">
-                <a:solidFill>
-                  <a:srgbClr val="D9A441"/>
-                </a:solidFill>
-                <a:latin typeface="Calibri" pitchFamily="34" charset="0"/>
-                <a:ea typeface="Calibri" pitchFamily="34" charset="-122"/>
-                <a:cs typeface="Calibri" pitchFamily="34" charset="-120"/>
+              <a:rPr lang="en-US" sz="2000" b="1" dirty="0">
+                <a:solidFill>
+                  <a:srgbClr val="8B7CF6"/>
+                </a:solidFill>
+                <a:latin typeface="Arial" pitchFamily="34" charset="0"/>
+                <a:ea typeface="Arial" pitchFamily="34" charset="-122"/>
+                <a:cs typeface="Arial" pitchFamily="34" charset="-120"/>
               </a:rPr>
               <a:t>claude</a:t>
             </a:r>
-            <a:endParaRPr lang="en-US" sz="1500" dirty="0"/>
-          </a:p>
-        </p:txBody>
-      </p:sp>
-      <p:sp>
-        <p:nvSpPr>
-          <p:cNvPr id="4" name="Text 2"/>
-          <p:cNvSpPr/>
-          <p:nvPr/>
-        </p:nvSpPr>
-        <p:spPr>
-          <a:xfrm>
-            <a:off x="640080" y="2331720"/>
-            <a:ext cx="7315200" cy="365760"/>
-          </a:xfrm>
-          <a:prstGeom prst="rect">
-            <a:avLst/>
-          </a:prstGeom>
-          <a:noFill/>
-          <a:ln/>
-        </p:spPr>
-        <p:txBody>
-          <a:bodyPr wrap="square" rtlCol="0" anchor="ctr"/>
+            <a:endParaRPr lang="en-US" sz="2000" dirty="0"/>
+          </a:p>
+        </p:txBody>
+      </p:sp>
+      <p:sp>
+        <p:nvSpPr>
+          <p:cNvPr id="5" name="Shape 3"/>
+          <p:cNvSpPr/>
+          <p:nvPr/>
+        </p:nvSpPr>
+        <p:spPr>
+          <a:xfrm>
+            <a:off x="10616184" y="384048"/>
+            <a:ext cx="1024128" cy="384048"/>
+          </a:xfrm>
+          <a:prstGeom prst="roundRect">
+            <a:avLst>
+              <a:gd name="adj" fmla="val 23810"/>
+            </a:avLst>
+          </a:prstGeom>
+          <a:solidFill>
+            <a:srgbClr val="6849F6"/>
+          </a:solidFill>
+          <a:ln/>
+        </p:spPr>
+      </p:sp>
+      <p:sp>
+        <p:nvSpPr>
+          <p:cNvPr id="6" name="Text 4"/>
+          <p:cNvSpPr/>
+          <p:nvPr/>
+        </p:nvSpPr>
+        <p:spPr>
+          <a:xfrm>
+            <a:off x="10616184" y="384048"/>
+            <a:ext cx="1024128" cy="384048"/>
+          </a:xfrm>
+          <a:prstGeom prst="rect">
+            <a:avLst/>
+          </a:prstGeom>
+          <a:noFill/>
+          <a:ln/>
+        </p:spPr>
+        <p:txBody>
+          <a:bodyPr wrap="square" lIns="0" tIns="0" rIns="0" bIns="0" rtlCol="0" anchor="ctr"/>
+          <a:lstStyle/>
+          <a:p>
+            <a:pPr algn="ctr" indent="0" marL="0">
+              <a:buNone/>
+            </a:pPr>
+            <a:r>
+              <a:rPr lang="en-US" sz="1250" b="1" dirty="0">
+                <a:solidFill>
+                  <a:srgbClr val="FFFFFF"/>
+                </a:solidFill>
+                <a:latin typeface="Arial" pitchFamily="34" charset="0"/>
+                <a:ea typeface="Arial" pitchFamily="34" charset="-122"/>
+                <a:cs typeface="Arial" pitchFamily="34" charset="-120"/>
+              </a:rPr>
+              <a:t>MODUL 1</a:t>
+            </a:r>
+            <a:endParaRPr lang="en-US" sz="1250" dirty="0"/>
+          </a:p>
+        </p:txBody>
+      </p:sp>
+      <p:sp>
+        <p:nvSpPr>
+          <p:cNvPr id="7" name="Text 5"/>
+          <p:cNvSpPr/>
+          <p:nvPr/>
+        </p:nvSpPr>
+        <p:spPr>
+          <a:xfrm>
+            <a:off x="548640" y="2331720"/>
+            <a:ext cx="7772400" cy="320040"/>
+          </a:xfrm>
+          <a:prstGeom prst="rect">
+            <a:avLst/>
+          </a:prstGeom>
+          <a:noFill/>
+          <a:ln/>
+        </p:spPr>
+        <p:txBody>
+          <a:bodyPr wrap="square" lIns="0" tIns="0" rIns="0" bIns="0" rtlCol="0" anchor="ctr"/>
           <a:lstStyle/>
           <a:p>
             <a:pPr indent="0" marL="0">
               <a:buNone/>
             </a:pPr>
             <a:r>
-              <a:rPr lang="en-US" sz="1300" b="1" spc="200" kern="0" dirty="0">
-                <a:solidFill>
-                  <a:srgbClr val="D9A441"/>
-                </a:solidFill>
-                <a:latin typeface="Calibri" pitchFamily="34" charset="0"/>
-                <a:ea typeface="Calibri" pitchFamily="34" charset="-122"/>
-                <a:cs typeface="Calibri" pitchFamily="34" charset="-120"/>
-              </a:rPr>
-              <a:t>MODUL 1</a:t>
+              <a:rPr lang="en-US" sz="1300" b="1" spc="100" kern="0" dirty="0">
+                <a:solidFill>
+                  <a:srgbClr val="8B7CF6"/>
+                </a:solidFill>
+                <a:latin typeface="Arial" pitchFamily="34" charset="0"/>
+                <a:ea typeface="Arial" pitchFamily="34" charset="-122"/>
+                <a:cs typeface="Arial" pitchFamily="34" charset="-120"/>
+              </a:rPr>
+              <a:t>KREASI KONTEN PEMASARAN</a:t>
             </a:r>
             <a:endParaRPr lang="en-US" sz="1300" dirty="0"/>
           </a:p>
@@ -1258,53 +1426,53 @@
       </p:sp>
       <p:sp>
         <p:nvSpPr>
-          <p:cNvPr id="5" name="Text 3"/>
-          <p:cNvSpPr/>
-          <p:nvPr/>
-        </p:nvSpPr>
-        <p:spPr>
-          <a:xfrm>
-            <a:off x="640080" y="2697480"/>
-            <a:ext cx="7315200" cy="365760"/>
-          </a:xfrm>
-          <a:prstGeom prst="rect">
-            <a:avLst/>
-          </a:prstGeom>
-          <a:noFill/>
-          <a:ln/>
-        </p:spPr>
-        <p:txBody>
-          <a:bodyPr wrap="square" rtlCol="0" anchor="ctr"/>
+          <p:cNvPr id="8" name="Text 6"/>
+          <p:cNvSpPr/>
+          <p:nvPr/>
+        </p:nvSpPr>
+        <p:spPr>
+          <a:xfrm>
+            <a:off x="548640" y="2697480"/>
+            <a:ext cx="7589520" cy="914400"/>
+          </a:xfrm>
+          <a:prstGeom prst="rect">
+            <a:avLst/>
+          </a:prstGeom>
+          <a:noFill/>
+          <a:ln/>
+        </p:spPr>
+        <p:txBody>
+          <a:bodyPr wrap="square" lIns="0" tIns="0" rIns="0" bIns="0" rtlCol="0" anchor="ctr"/>
           <a:lstStyle/>
           <a:p>
             <a:pPr indent="0" marL="0">
               <a:buNone/>
             </a:pPr>
             <a:r>
-              <a:rPr lang="en-US" sz="1300" spc="200" kern="0" dirty="0">
+              <a:rPr lang="en-US" sz="4400" b="1" dirty="0">
                 <a:solidFill>
                   <a:srgbClr val="FFFFFF"/>
                 </a:solidFill>
-                <a:latin typeface="Calibri" pitchFamily="34" charset="0"/>
-                <a:ea typeface="Calibri" pitchFamily="34" charset="-122"/>
-                <a:cs typeface="Calibri" pitchFamily="34" charset="-120"/>
-              </a:rPr>
-              <a:t>CONTENT &amp; MARKETING</a:t>
-            </a:r>
-            <a:endParaRPr lang="en-US" sz="1300" dirty="0"/>
-          </a:p>
-        </p:txBody>
-      </p:sp>
-      <p:sp>
-        <p:nvSpPr>
-          <p:cNvPr id="6" name="Text 4"/>
-          <p:cNvSpPr/>
-          <p:nvPr/>
-        </p:nvSpPr>
-        <p:spPr>
-          <a:xfrm>
-            <a:off x="594360" y="3063240"/>
-            <a:ext cx="9601200" cy="1280160"/>
+                <a:latin typeface="Arial" pitchFamily="34" charset="0"/>
+                <a:ea typeface="Arial" pitchFamily="34" charset="-122"/>
+                <a:cs typeface="Arial" pitchFamily="34" charset="-120"/>
+              </a:rPr>
+              <a:t>Positioning &amp; Analisis Kompetitor</a:t>
+            </a:r>
+            <a:endParaRPr lang="en-US" sz="4400" dirty="0"/>
+          </a:p>
+        </p:txBody>
+      </p:sp>
+      <p:sp>
+        <p:nvSpPr>
+          <p:cNvPr id="9" name="Text 7"/>
+          <p:cNvSpPr/>
+          <p:nvPr/>
+        </p:nvSpPr>
+        <p:spPr>
+          <a:xfrm>
+            <a:off x="548640" y="3703320"/>
+            <a:ext cx="7315200" cy="548640"/>
           </a:xfrm>
           <a:prstGeom prst="rect">
             <a:avLst/>
@@ -1320,56 +1488,17 @@
               <a:buNone/>
             </a:pPr>
             <a:r>
-              <a:rPr lang="en-US" sz="4000" b="1" dirty="0">
-                <a:solidFill>
-                  <a:srgbClr val="FFFFFF"/>
-                </a:solidFill>
-                <a:latin typeface="Cambria" pitchFamily="34" charset="0"/>
-                <a:ea typeface="Cambria" pitchFamily="34" charset="-122"/>
-                <a:cs typeface="Cambria" pitchFamily="34" charset="-120"/>
-              </a:rPr>
-              <a:t>Positioning &amp; Analisis Kompetitor</a:t>
-            </a:r>
-            <a:endParaRPr lang="en-US" sz="4000" dirty="0"/>
-          </a:p>
-        </p:txBody>
-      </p:sp>
-      <p:sp>
-        <p:nvSpPr>
-          <p:cNvPr id="7" name="Text 5"/>
-          <p:cNvSpPr/>
-          <p:nvPr/>
-        </p:nvSpPr>
-        <p:spPr>
-          <a:xfrm>
-            <a:off x="640080" y="4343400"/>
-            <a:ext cx="8686800" cy="457200"/>
-          </a:xfrm>
-          <a:prstGeom prst="rect">
-            <a:avLst/>
-          </a:prstGeom>
-          <a:noFill/>
-          <a:ln/>
-        </p:spPr>
-        <p:txBody>
-          <a:bodyPr wrap="square" lIns="0" tIns="0" rIns="0" bIns="0" rtlCol="0" anchor="ctr"/>
-          <a:lstStyle/>
-          <a:p>
-            <a:pPr indent="0" marL="0">
-              <a:buNone/>
-            </a:pPr>
-            <a:r>
-              <a:rPr lang="en-US" sz="1600" i="1" dirty="0">
-                <a:solidFill>
-                  <a:srgbClr val="F3DFC9"/>
-                </a:solidFill>
-                <a:latin typeface="Calibri" pitchFamily="34" charset="0"/>
-                <a:ea typeface="Calibri" pitchFamily="34" charset="-122"/>
-                <a:cs typeface="Calibri" pitchFamily="34" charset="-120"/>
+              <a:rPr lang="en-US" sz="1550" dirty="0">
+                <a:solidFill>
+                  <a:srgbClr val="B7C0D8"/>
+                </a:solidFill>
+                <a:latin typeface="Arial" pitchFamily="34" charset="0"/>
+                <a:ea typeface="Arial" pitchFamily="34" charset="-122"/>
+                <a:cs typeface="Arial" pitchFamily="34" charset="-120"/>
               </a:rPr>
               <a:t>Untuk siapa produk ini, dan kenapa harus pilih kamu — 10 menit</a:t>
             </a:r>
-            <a:endParaRPr lang="en-US" sz="1600" dirty="0"/>
+            <a:endParaRPr lang="en-US" sz="1550" dirty="0"/>
           </a:p>
         </p:txBody>
       </p:sp>
@@ -1407,53 +1536,107 @@
       </p:grpSpPr>
       <p:sp>
         <p:nvSpPr>
-          <p:cNvPr id="2" name="Text 0"/>
-          <p:cNvSpPr/>
-          <p:nvPr/>
-        </p:nvSpPr>
-        <p:spPr>
-          <a:xfrm>
-            <a:off x="457200" y="320040"/>
-            <a:ext cx="11247120" cy="320040"/>
-          </a:xfrm>
-          <a:prstGeom prst="rect">
-            <a:avLst/>
-          </a:prstGeom>
-          <a:noFill/>
-          <a:ln/>
-        </p:spPr>
-        <p:txBody>
-          <a:bodyPr wrap="square" rtlCol="0" anchor="ctr"/>
+          <p:cNvPr id="2" name="Shape 0"/>
+          <p:cNvSpPr/>
+          <p:nvPr/>
+        </p:nvSpPr>
+        <p:spPr>
+          <a:xfrm>
+            <a:off x="0" y="0"/>
+            <a:ext cx="12191695" cy="960120"/>
+          </a:xfrm>
+          <a:prstGeom prst="rect">
+            <a:avLst/>
+          </a:prstGeom>
+          <a:solidFill>
+            <a:srgbClr val="0D1321"/>
+          </a:solidFill>
+          <a:ln/>
+        </p:spPr>
+      </p:sp>
+      <p:sp>
+        <p:nvSpPr>
+          <p:cNvPr id="3" name="Shape 1"/>
+          <p:cNvSpPr/>
+          <p:nvPr/>
+        </p:nvSpPr>
+        <p:spPr>
+          <a:xfrm>
+            <a:off x="0" y="960120"/>
+            <a:ext cx="12191695" cy="41148"/>
+          </a:xfrm>
+          <a:prstGeom prst="rect">
+            <a:avLst/>
+          </a:prstGeom>
+          <a:solidFill>
+            <a:srgbClr val="6849F6"/>
+          </a:solidFill>
+          <a:ln/>
+        </p:spPr>
+      </p:sp>
+      <p:sp>
+        <p:nvSpPr>
+          <p:cNvPr id="4" name="Text 2"/>
+          <p:cNvSpPr/>
+          <p:nvPr/>
+        </p:nvSpPr>
+        <p:spPr>
+          <a:xfrm>
+            <a:off x="548640" y="256032"/>
+            <a:ext cx="3657600" cy="457200"/>
+          </a:xfrm>
+          <a:prstGeom prst="rect">
+            <a:avLst/>
+          </a:prstGeom>
+          <a:noFill/>
+          <a:ln/>
+        </p:spPr>
+        <p:txBody>
+          <a:bodyPr wrap="square" lIns="0" tIns="0" rIns="0" bIns="0" rtlCol="0" anchor="ctr"/>
           <a:lstStyle/>
           <a:p>
             <a:pPr indent="0" marL="0">
               <a:buNone/>
             </a:pPr>
             <a:r>
-              <a:rPr lang="en-US" sz="1200" b="1" spc="100" kern="0" dirty="0">
-                <a:solidFill>
-                  <a:srgbClr val="A8452F"/>
-                </a:solidFill>
-                <a:latin typeface="Calibri" pitchFamily="34" charset="0"/>
-                <a:ea typeface="Calibri" pitchFamily="34" charset="-122"/>
-                <a:cs typeface="Calibri" pitchFamily="34" charset="-120"/>
-              </a:rPr>
-              <a:t>MODUL 01 — POSITIONING &amp; ANALISIS KOMPETITOR</a:t>
-            </a:r>
-            <a:endParaRPr lang="en-US" sz="1200" dirty="0"/>
-          </a:p>
-        </p:txBody>
-      </p:sp>
-      <p:sp>
-        <p:nvSpPr>
-          <p:cNvPr id="3" name="Text 1"/>
-          <p:cNvSpPr/>
-          <p:nvPr/>
-        </p:nvSpPr>
-        <p:spPr>
-          <a:xfrm>
-            <a:off x="457200" y="685800"/>
-            <a:ext cx="10058400" cy="640080"/>
+              <a:rPr lang="en-US" sz="2000" b="1" dirty="0">
+                <a:solidFill>
+                  <a:srgbClr val="FFFFFF"/>
+                </a:solidFill>
+                <a:latin typeface="Arial" pitchFamily="34" charset="0"/>
+                <a:ea typeface="Arial" pitchFamily="34" charset="-122"/>
+                <a:cs typeface="Arial" pitchFamily="34" charset="-120"/>
+              </a:rPr>
+              <a:t>belajar</a:t>
+            </a:r>
+            <a:pPr indent="0" marL="0">
+              <a:buNone/>
+            </a:pPr>
+            <a:r>
+              <a:rPr lang="en-US" sz="2000" b="1" dirty="0">
+                <a:solidFill>
+                  <a:srgbClr val="8B7CF6"/>
+                </a:solidFill>
+                <a:latin typeface="Arial" pitchFamily="34" charset="0"/>
+                <a:ea typeface="Arial" pitchFamily="34" charset="-122"/>
+                <a:cs typeface="Arial" pitchFamily="34" charset="-120"/>
+              </a:rPr>
+              <a:t>claude</a:t>
+            </a:r>
+            <a:endParaRPr lang="en-US" sz="2000" dirty="0"/>
+          </a:p>
+        </p:txBody>
+      </p:sp>
+      <p:sp>
+        <p:nvSpPr>
+          <p:cNvPr id="5" name="Text 3"/>
+          <p:cNvSpPr/>
+          <p:nvPr/>
+        </p:nvSpPr>
+        <p:spPr>
+          <a:xfrm>
+            <a:off x="5943600" y="274320"/>
+            <a:ext cx="5696712" cy="411480"/>
           </a:xfrm>
           <a:prstGeom prst="rect">
             <a:avLst/>
@@ -1465,76 +1648,139 @@
           <a:bodyPr wrap="square" lIns="0" tIns="0" rIns="0" bIns="0" rtlCol="0" anchor="ctr"/>
           <a:lstStyle/>
           <a:p>
+            <a:pPr algn="r" indent="0" marL="0">
+              <a:buNone/>
+            </a:pPr>
+            <a:r>
+              <a:rPr lang="en-US" sz="1250" dirty="0">
+                <a:solidFill>
+                  <a:srgbClr val="9AA2B4"/>
+                </a:solidFill>
+                <a:latin typeface="Arial" pitchFamily="34" charset="0"/>
+                <a:ea typeface="Arial" pitchFamily="34" charset="-122"/>
+                <a:cs typeface="Arial" pitchFamily="34" charset="-120"/>
+              </a:rPr>
+              <a:t>Modul 01 — Positioning &amp; Analisis Kompetitor</a:t>
+            </a:r>
+            <a:endParaRPr lang="en-US" sz="1250" dirty="0"/>
+          </a:p>
+        </p:txBody>
+      </p:sp>
+      <p:sp>
+        <p:nvSpPr>
+          <p:cNvPr id="6" name="Text 4"/>
+          <p:cNvSpPr/>
+          <p:nvPr/>
+        </p:nvSpPr>
+        <p:spPr>
+          <a:xfrm>
+            <a:off x="548640" y="1170432"/>
+            <a:ext cx="11091672" cy="274320"/>
+          </a:xfrm>
+          <a:prstGeom prst="rect">
+            <a:avLst/>
+          </a:prstGeom>
+          <a:noFill/>
+          <a:ln/>
+        </p:spPr>
+        <p:txBody>
+          <a:bodyPr wrap="square" lIns="0" tIns="0" rIns="0" bIns="0" rtlCol="0" anchor="ctr"/>
+          <a:lstStyle/>
+          <a:p>
             <a:pPr indent="0" marL="0">
               <a:buNone/>
             </a:pPr>
             <a:r>
-              <a:rPr lang="en-US" sz="3000" b="1" dirty="0">
-                <a:solidFill>
-                  <a:srgbClr val="231A14"/>
-                </a:solidFill>
-                <a:latin typeface="Cambria" pitchFamily="34" charset="0"/>
-                <a:ea typeface="Cambria" pitchFamily="34" charset="-122"/>
-                <a:cs typeface="Cambria" pitchFamily="34" charset="-120"/>
+              <a:rPr lang="en-US" sz="1250" b="1" spc="100" kern="0" dirty="0">
+                <a:solidFill>
+                  <a:srgbClr val="4B36C7"/>
+                </a:solidFill>
+                <a:latin typeface="Arial" pitchFamily="34" charset="0"/>
+                <a:ea typeface="Arial" pitchFamily="34" charset="-122"/>
+                <a:cs typeface="Arial" pitchFamily="34" charset="-120"/>
+              </a:rPr>
+              <a:t>APA ITU POSITIONING &amp; KENAPA PENTING</a:t>
+            </a:r>
+            <a:endParaRPr lang="en-US" sz="1250" dirty="0"/>
+          </a:p>
+        </p:txBody>
+      </p:sp>
+      <p:sp>
+        <p:nvSpPr>
+          <p:cNvPr id="7" name="Text 5"/>
+          <p:cNvSpPr/>
+          <p:nvPr/>
+        </p:nvSpPr>
+        <p:spPr>
+          <a:xfrm>
+            <a:off x="548640" y="1444752"/>
+            <a:ext cx="11091672" cy="548640"/>
+          </a:xfrm>
+          <a:prstGeom prst="rect">
+            <a:avLst/>
+          </a:prstGeom>
+          <a:noFill/>
+          <a:ln/>
+        </p:spPr>
+        <p:txBody>
+          <a:bodyPr wrap="square" lIns="0" tIns="0" rIns="0" bIns="0" rtlCol="0" anchor="ctr"/>
+          <a:lstStyle/>
+          <a:p>
+            <a:pPr indent="0" marL="0">
+              <a:buNone/>
+            </a:pPr>
+            <a:r>
+              <a:rPr lang="en-US" sz="2600" b="1" dirty="0">
+                <a:solidFill>
+                  <a:srgbClr val="0D1321"/>
+                </a:solidFill>
+                <a:latin typeface="Arial" pitchFamily="34" charset="0"/>
+                <a:ea typeface="Arial" pitchFamily="34" charset="-122"/>
+                <a:cs typeface="Arial" pitchFamily="34" charset="-120"/>
               </a:rPr>
               <a:t>Kenapa Positioning Penting</a:t>
             </a:r>
-            <a:endParaRPr lang="en-US" sz="3000" dirty="0"/>
-          </a:p>
-        </p:txBody>
-      </p:sp>
-      <p:sp>
-        <p:nvSpPr>
-          <p:cNvPr id="4" name="Shape 2"/>
-          <p:cNvSpPr/>
-          <p:nvPr/>
-        </p:nvSpPr>
-        <p:spPr>
-          <a:xfrm>
-            <a:off x="457200" y="1600200"/>
-            <a:ext cx="5394960" cy="1874520"/>
+            <a:endParaRPr lang="en-US" sz="2600" dirty="0"/>
+          </a:p>
+        </p:txBody>
+      </p:sp>
+      <p:sp>
+        <p:nvSpPr>
+          <p:cNvPr id="8" name="Shape 6"/>
+          <p:cNvSpPr/>
+          <p:nvPr/>
+        </p:nvSpPr>
+        <p:spPr>
+          <a:xfrm>
+            <a:off x="548640" y="2148840"/>
+            <a:ext cx="5413248" cy="1783080"/>
           </a:xfrm>
           <a:prstGeom prst="roundRect">
             <a:avLst>
-              <a:gd name="adj" fmla="val 5854"/>
+              <a:gd name="adj" fmla="val 4103"/>
             </a:avLst>
           </a:prstGeom>
           <a:solidFill>
-            <a:srgbClr val="F2EEE9"/>
-          </a:solidFill>
-          <a:ln/>
-        </p:spPr>
-      </p:sp>
-      <p:sp>
-        <p:nvSpPr>
-          <p:cNvPr id="5" name="Shape 3"/>
-          <p:cNvSpPr/>
-          <p:nvPr/>
-        </p:nvSpPr>
-        <p:spPr>
-          <a:xfrm>
-            <a:off x="713232" y="1856232"/>
-            <a:ext cx="502920" cy="502920"/>
-          </a:xfrm>
-          <a:prstGeom prst="ellipse">
-            <a:avLst/>
-          </a:prstGeom>
-          <a:solidFill>
-            <a:srgbClr val="A8452F"/>
-          </a:solidFill>
-          <a:ln/>
-        </p:spPr>
-      </p:sp>
-      <p:sp>
-        <p:nvSpPr>
-          <p:cNvPr id="6" name="Text 4"/>
-          <p:cNvSpPr/>
-          <p:nvPr/>
-        </p:nvSpPr>
-        <p:spPr>
-          <a:xfrm>
-            <a:off x="713232" y="1856232"/>
-            <a:ext cx="502920" cy="502920"/>
+            <a:srgbClr val="F4F6FB"/>
+          </a:solidFill>
+          <a:ln w="12700">
+            <a:solidFill>
+              <a:srgbClr val="D9DEEC"/>
+            </a:solidFill>
+            <a:prstDash val="solid"/>
+          </a:ln>
+        </p:spPr>
+      </p:sp>
+      <p:sp>
+        <p:nvSpPr>
+          <p:cNvPr id="9" name="Text 7"/>
+          <p:cNvSpPr/>
+          <p:nvPr/>
+        </p:nvSpPr>
+        <p:spPr>
+          <a:xfrm>
+            <a:off x="749808" y="2350008"/>
+            <a:ext cx="5010912" cy="256032"/>
           </a:xfrm>
           <a:prstGeom prst="rect">
             <a:avLst/>
@@ -1546,73 +1792,34 @@
           <a:bodyPr wrap="square" lIns="0" tIns="0" rIns="0" bIns="0" rtlCol="0" anchor="ctr"/>
           <a:lstStyle/>
           <a:p>
-            <a:pPr algn="ctr" indent="0" marL="0">
-              <a:buNone/>
-            </a:pPr>
-            <a:r>
-              <a:rPr lang="en-US" sz="1800" b="1" dirty="0">
-                <a:solidFill>
-                  <a:srgbClr val="FFFFFF"/>
-                </a:solidFill>
-                <a:latin typeface="Calibri" pitchFamily="34" charset="0"/>
-                <a:ea typeface="Calibri" pitchFamily="34" charset="-122"/>
-                <a:cs typeface="Calibri" pitchFamily="34" charset="-120"/>
-              </a:rPr>
-              <a:t>1</a:t>
-            </a:r>
-            <a:endParaRPr lang="en-US" sz="1800" dirty="0"/>
-          </a:p>
-        </p:txBody>
-      </p:sp>
-      <p:sp>
-        <p:nvSpPr>
-          <p:cNvPr id="7" name="Text 5"/>
-          <p:cNvSpPr/>
-          <p:nvPr/>
-        </p:nvSpPr>
-        <p:spPr>
-          <a:xfrm>
-            <a:off x="1371600" y="1801368"/>
-            <a:ext cx="4206240" cy="457200"/>
-          </a:xfrm>
-          <a:prstGeom prst="rect">
-            <a:avLst/>
-          </a:prstGeom>
-          <a:noFill/>
-          <a:ln/>
-        </p:spPr>
-        <p:txBody>
-          <a:bodyPr wrap="square" lIns="0" tIns="0" rIns="0" bIns="0" rtlCol="0" anchor="ctr"/>
-          <a:lstStyle/>
-          <a:p>
             <a:pPr indent="0" marL="0">
               <a:buNone/>
             </a:pPr>
             <a:r>
-              <a:rPr lang="en-US" sz="1500" b="1" dirty="0">
-                <a:solidFill>
-                  <a:srgbClr val="231A14"/>
-                </a:solidFill>
-                <a:latin typeface="Calibri" pitchFamily="34" charset="0"/>
-                <a:ea typeface="Calibri" pitchFamily="34" charset="-122"/>
-                <a:cs typeface="Calibri" pitchFamily="34" charset="-120"/>
-              </a:rPr>
-              <a:t>Menjawab Satu Pertanyaan</a:t>
-            </a:r>
-            <a:endParaRPr lang="en-US" sz="1500" dirty="0"/>
-          </a:p>
-        </p:txBody>
-      </p:sp>
-      <p:sp>
-        <p:nvSpPr>
-          <p:cNvPr id="8" name="Text 6"/>
-          <p:cNvSpPr/>
-          <p:nvPr/>
-        </p:nvSpPr>
-        <p:spPr>
-          <a:xfrm>
-            <a:off x="713232" y="2468880"/>
-            <a:ext cx="4892040" cy="868680"/>
+              <a:rPr lang="en-US" sz="1200" b="1" spc="50" kern="0" dirty="0">
+                <a:solidFill>
+                  <a:srgbClr val="6B7280"/>
+                </a:solidFill>
+                <a:latin typeface="Arial" pitchFamily="34" charset="0"/>
+                <a:ea typeface="Arial" pitchFamily="34" charset="-122"/>
+                <a:cs typeface="Arial" pitchFamily="34" charset="-120"/>
+              </a:rPr>
+              <a:t>TANPA POSITIONING</a:t>
+            </a:r>
+            <a:endParaRPr lang="en-US" sz="1200" dirty="0"/>
+          </a:p>
+        </p:txBody>
+      </p:sp>
+      <p:sp>
+        <p:nvSpPr>
+          <p:cNvPr id="10" name="Text 8"/>
+          <p:cNvSpPr/>
+          <p:nvPr/>
+        </p:nvSpPr>
+        <p:spPr>
+          <a:xfrm>
+            <a:off x="749808" y="2715768"/>
+            <a:ext cx="5010912" cy="1051560"/>
           </a:xfrm>
           <a:prstGeom prst="rect">
             <a:avLst/>
@@ -1624,76 +1831,116 @@
           <a:bodyPr wrap="square" lIns="0" tIns="0" rIns="0" bIns="0" rtlCol="0" anchor="t"/>
           <a:lstStyle/>
           <a:p>
-            <a:pPr indent="0" marL="0">
-              <a:buNone/>
+            <a:pPr marL="177800" indent="-177800">
+              <a:lnSpc>
+                <a:spcPct val="115000"/>
+              </a:lnSpc>
+              <a:spcAft>
+                <a:spcPts val="600"/>
+              </a:spcAft>
+              <a:buSzPct val="100000"/>
+              <a:buChar char="•"/>
             </a:pPr>
             <a:r>
               <a:rPr lang="en-US" sz="1250" dirty="0">
                 <a:solidFill>
-                  <a:srgbClr val="6B6B6B"/>
-                </a:solidFill>
-                <a:latin typeface="Calibri" pitchFamily="34" charset="0"/>
-                <a:ea typeface="Calibri" pitchFamily="34" charset="-122"/>
-                <a:cs typeface="Calibri" pitchFamily="34" charset="-120"/>
-              </a:rPr>
-              <a:t>“Untuk siapa produk ini, dan kenapa harus pilih kamu?”</a:t>
+                  <a:srgbClr val="23283A"/>
+                </a:solidFill>
+                <a:latin typeface="Arial" pitchFamily="34" charset="0"/>
+                <a:ea typeface="Arial" pitchFamily="34" charset="-122"/>
+                <a:cs typeface="Arial" pitchFamily="34" charset="-120"/>
+              </a:rPr>
+              <a:t>Bisnis terdengar sama dengan ratusan kompetitor lainnya</a:t>
             </a:r>
             <a:endParaRPr lang="en-US" sz="1250" dirty="0"/>
           </a:p>
-        </p:txBody>
-      </p:sp>
-      <p:sp>
-        <p:nvSpPr>
-          <p:cNvPr id="9" name="Shape 7"/>
-          <p:cNvSpPr/>
-          <p:nvPr/>
-        </p:nvSpPr>
-        <p:spPr>
-          <a:xfrm>
-            <a:off x="5989320" y="1600200"/>
-            <a:ext cx="5394960" cy="1874520"/>
+          <a:p>
+            <a:pPr marL="177800" indent="-177800">
+              <a:lnSpc>
+                <a:spcPct val="115000"/>
+              </a:lnSpc>
+              <a:spcAft>
+                <a:spcPts val="600"/>
+              </a:spcAft>
+              <a:buSzPct val="100000"/>
+              <a:buChar char="•"/>
+            </a:pPr>
+            <a:r>
+              <a:rPr lang="en-US" sz="1250" dirty="0">
+                <a:solidFill>
+                  <a:srgbClr val="23283A"/>
+                </a:solidFill>
+                <a:latin typeface="Arial" pitchFamily="34" charset="0"/>
+                <a:ea typeface="Arial" pitchFamily="34" charset="-122"/>
+                <a:cs typeface="Arial" pitchFamily="34" charset="-120"/>
+              </a:rPr>
+              <a:t>Selalu bersaing di harga, bukan di nilai</a:t>
+            </a:r>
+            <a:endParaRPr lang="en-US" sz="1250" dirty="0"/>
+          </a:p>
+          <a:p>
+            <a:pPr marL="177800" indent="-177800">
+              <a:lnSpc>
+                <a:spcPct val="115000"/>
+              </a:lnSpc>
+              <a:spcAft>
+                <a:spcPts val="600"/>
+              </a:spcAft>
+              <a:buSzPct val="100000"/>
+              <a:buChar char="•"/>
+            </a:pPr>
+            <a:r>
+              <a:rPr lang="en-US" sz="1250" dirty="0">
+                <a:solidFill>
+                  <a:srgbClr val="23283A"/>
+                </a:solidFill>
+                <a:latin typeface="Arial" pitchFamily="34" charset="0"/>
+                <a:ea typeface="Arial" pitchFamily="34" charset="-122"/>
+                <a:cs typeface="Arial" pitchFamily="34" charset="-120"/>
+              </a:rPr>
+              <a:t>Konten, iklan, dan komunikasi bisnis jadi tidak konsisten</a:t>
+            </a:r>
+            <a:endParaRPr lang="en-US" sz="1250" dirty="0"/>
+          </a:p>
+        </p:txBody>
+      </p:sp>
+      <p:sp>
+        <p:nvSpPr>
+          <p:cNvPr id="11" name="Shape 9"/>
+          <p:cNvSpPr/>
+          <p:nvPr/>
+        </p:nvSpPr>
+        <p:spPr>
+          <a:xfrm>
+            <a:off x="6227064" y="2148840"/>
+            <a:ext cx="5413248" cy="1783080"/>
           </a:xfrm>
           <a:prstGeom prst="roundRect">
             <a:avLst>
-              <a:gd name="adj" fmla="val 5854"/>
+              <a:gd name="adj" fmla="val 4103"/>
             </a:avLst>
           </a:prstGeom>
           <a:solidFill>
-            <a:srgbClr val="F2EEE9"/>
-          </a:solidFill>
-          <a:ln/>
-        </p:spPr>
-      </p:sp>
-      <p:sp>
-        <p:nvSpPr>
-          <p:cNvPr id="10" name="Shape 8"/>
-          <p:cNvSpPr/>
-          <p:nvPr/>
-        </p:nvSpPr>
-        <p:spPr>
-          <a:xfrm>
-            <a:off x="6245352" y="1856232"/>
-            <a:ext cx="502920" cy="502920"/>
-          </a:xfrm>
-          <a:prstGeom prst="ellipse">
-            <a:avLst/>
-          </a:prstGeom>
-          <a:solidFill>
-            <a:srgbClr val="A8452F"/>
-          </a:solidFill>
-          <a:ln/>
-        </p:spPr>
-      </p:sp>
-      <p:sp>
-        <p:nvSpPr>
-          <p:cNvPr id="11" name="Text 9"/>
-          <p:cNvSpPr/>
-          <p:nvPr/>
-        </p:nvSpPr>
-        <p:spPr>
-          <a:xfrm>
-            <a:off x="6245352" y="1856232"/>
-            <a:ext cx="502920" cy="502920"/>
+            <a:srgbClr val="F3F0FF"/>
+          </a:solidFill>
+          <a:ln w="12700">
+            <a:solidFill>
+              <a:srgbClr val="D9CFFB"/>
+            </a:solidFill>
+            <a:prstDash val="solid"/>
+          </a:ln>
+        </p:spPr>
+      </p:sp>
+      <p:sp>
+        <p:nvSpPr>
+          <p:cNvPr id="12" name="Text 10"/>
+          <p:cNvSpPr/>
+          <p:nvPr/>
+        </p:nvSpPr>
+        <p:spPr>
+          <a:xfrm>
+            <a:off x="6428232" y="2350008"/>
+            <a:ext cx="5010912" cy="256032"/>
           </a:xfrm>
           <a:prstGeom prst="rect">
             <a:avLst/>
@@ -1705,34 +1952,128 @@
           <a:bodyPr wrap="square" lIns="0" tIns="0" rIns="0" bIns="0" rtlCol="0" anchor="ctr"/>
           <a:lstStyle/>
           <a:p>
-            <a:pPr algn="ctr" indent="0" marL="0">
-              <a:buNone/>
-            </a:pPr>
-            <a:r>
-              <a:rPr lang="en-US" sz="1800" b="1" dirty="0">
-                <a:solidFill>
-                  <a:srgbClr val="FFFFFF"/>
-                </a:solidFill>
-                <a:latin typeface="Calibri" pitchFamily="34" charset="0"/>
-                <a:ea typeface="Calibri" pitchFamily="34" charset="-122"/>
-                <a:cs typeface="Calibri" pitchFamily="34" charset="-120"/>
-              </a:rPr>
-              <a:t>2</a:t>
-            </a:r>
-            <a:endParaRPr lang="en-US" sz="1800" dirty="0"/>
-          </a:p>
-        </p:txBody>
-      </p:sp>
-      <p:sp>
-        <p:nvSpPr>
-          <p:cNvPr id="12" name="Text 10"/>
-          <p:cNvSpPr/>
-          <p:nvPr/>
-        </p:nvSpPr>
-        <p:spPr>
-          <a:xfrm>
-            <a:off x="6903720" y="1801368"/>
-            <a:ext cx="4206240" cy="457200"/>
+            <a:pPr indent="0" marL="0">
+              <a:buNone/>
+            </a:pPr>
+            <a:r>
+              <a:rPr lang="en-US" sz="1200" b="1" spc="50" kern="0" dirty="0">
+                <a:solidFill>
+                  <a:srgbClr val="4B36C7"/>
+                </a:solidFill>
+                <a:latin typeface="Arial" pitchFamily="34" charset="0"/>
+                <a:ea typeface="Arial" pitchFamily="34" charset="-122"/>
+                <a:cs typeface="Arial" pitchFamily="34" charset="-120"/>
+              </a:rPr>
+              <a:t>DENGAN POSITIONING JELAS</a:t>
+            </a:r>
+            <a:endParaRPr lang="en-US" sz="1200" dirty="0"/>
+          </a:p>
+        </p:txBody>
+      </p:sp>
+      <p:sp>
+        <p:nvSpPr>
+          <p:cNvPr id="13" name="Text 11"/>
+          <p:cNvSpPr/>
+          <p:nvPr/>
+        </p:nvSpPr>
+        <p:spPr>
+          <a:xfrm>
+            <a:off x="6428232" y="2715768"/>
+            <a:ext cx="5010912" cy="1051560"/>
+          </a:xfrm>
+          <a:prstGeom prst="rect">
+            <a:avLst/>
+          </a:prstGeom>
+          <a:noFill/>
+          <a:ln/>
+        </p:spPr>
+        <p:txBody>
+          <a:bodyPr wrap="square" lIns="0" tIns="0" rIns="0" bIns="0" rtlCol="0" anchor="t"/>
+          <a:lstStyle/>
+          <a:p>
+            <a:pPr marL="177800" indent="-177800">
+              <a:lnSpc>
+                <a:spcPct val="115000"/>
+              </a:lnSpc>
+              <a:spcAft>
+                <a:spcPts val="600"/>
+              </a:spcAft>
+              <a:buSzPct val="100000"/>
+              <a:buChar char="•"/>
+            </a:pPr>
+            <a:r>
+              <a:rPr lang="en-US" sz="1250" dirty="0">
+                <a:solidFill>
+                  <a:srgbClr val="23283A"/>
+                </a:solidFill>
+                <a:latin typeface="Arial" pitchFamily="34" charset="0"/>
+                <a:ea typeface="Arial" pitchFamily="34" charset="-122"/>
+                <a:cs typeface="Arial" pitchFamily="34" charset="-120"/>
+              </a:rPr>
+              <a:t>Menjawab "untuk siapa produk ini, dan kenapa harus pilih kamu?"</a:t>
+            </a:r>
+            <a:endParaRPr lang="en-US" sz="1250" dirty="0"/>
+          </a:p>
+          <a:p>
+            <a:pPr marL="177800" indent="-177800">
+              <a:lnSpc>
+                <a:spcPct val="115000"/>
+              </a:lnSpc>
+              <a:spcAft>
+                <a:spcPts val="600"/>
+              </a:spcAft>
+              <a:buSzPct val="100000"/>
+              <a:buChar char="•"/>
+            </a:pPr>
+            <a:r>
+              <a:rPr lang="en-US" sz="1250" dirty="0">
+                <a:solidFill>
+                  <a:srgbClr val="23283A"/>
+                </a:solidFill>
+                <a:latin typeface="Arial" pitchFamily="34" charset="0"/>
+                <a:ea typeface="Arial" pitchFamily="34" charset="-122"/>
+                <a:cs typeface="Arial" pitchFamily="34" charset="-120"/>
+              </a:rPr>
+              <a:t>Jadi acuan semua konten, iklan, dan komunikasi bisnis</a:t>
+            </a:r>
+            <a:endParaRPr lang="en-US" sz="1250" dirty="0"/>
+          </a:p>
+          <a:p>
+            <a:pPr marL="177800" indent="-177800">
+              <a:lnSpc>
+                <a:spcPct val="115000"/>
+              </a:lnSpc>
+              <a:spcAft>
+                <a:spcPts val="600"/>
+              </a:spcAft>
+              <a:buSzPct val="100000"/>
+              <a:buChar char="•"/>
+            </a:pPr>
+            <a:r>
+              <a:rPr lang="en-US" sz="1250" dirty="0">
+                <a:solidFill>
+                  <a:srgbClr val="23283A"/>
+                </a:solidFill>
+                <a:latin typeface="Arial" pitchFamily="34" charset="0"/>
+                <a:ea typeface="Arial" pitchFamily="34" charset="-122"/>
+                <a:cs typeface="Arial" pitchFamily="34" charset="-120"/>
+              </a:rPr>
+              <a:t>Claude bisa bantu susun dari data yang kamu kumpulkan</a:t>
+            </a:r>
+            <a:endParaRPr lang="en-US" sz="1250" dirty="0"/>
+          </a:p>
+        </p:txBody>
+      </p:sp>
+      <p:sp>
+        <p:nvSpPr>
+          <p:cNvPr id="14" name="Text 12"/>
+          <p:cNvSpPr/>
+          <p:nvPr/>
+        </p:nvSpPr>
+        <p:spPr>
+          <a:xfrm>
+            <a:off x="548640" y="4160520"/>
+            <a:ext cx="11091672" cy="274320"/>
           </a:xfrm>
           <a:prstGeom prst="rect">
             <a:avLst/>
@@ -1748,54 +2089,15 @@
               <a:buNone/>
             </a:pPr>
             <a:r>
-              <a:rPr lang="en-US" sz="1500" b="1" dirty="0">
-                <a:solidFill>
-                  <a:srgbClr val="231A14"/>
-                </a:solidFill>
-                <a:latin typeface="Calibri" pitchFamily="34" charset="0"/>
-                <a:ea typeface="Calibri" pitchFamily="34" charset="-122"/>
-                <a:cs typeface="Calibri" pitchFamily="34" charset="-120"/>
-              </a:rPr>
-              <a:t>Tanpa Positioning</a:t>
-            </a:r>
-            <a:endParaRPr lang="en-US" sz="1500" dirty="0"/>
-          </a:p>
-        </p:txBody>
-      </p:sp>
-      <p:sp>
-        <p:nvSpPr>
-          <p:cNvPr id="13" name="Text 11"/>
-          <p:cNvSpPr/>
-          <p:nvPr/>
-        </p:nvSpPr>
-        <p:spPr>
-          <a:xfrm>
-            <a:off x="6245352" y="2468880"/>
-            <a:ext cx="4892040" cy="868680"/>
-          </a:xfrm>
-          <a:prstGeom prst="rect">
-            <a:avLst/>
-          </a:prstGeom>
-          <a:noFill/>
-          <a:ln/>
-        </p:spPr>
-        <p:txBody>
-          <a:bodyPr wrap="square" lIns="0" tIns="0" rIns="0" bIns="0" rtlCol="0" anchor="t"/>
-          <a:lstStyle/>
-          <a:p>
-            <a:pPr indent="0" marL="0">
-              <a:buNone/>
-            </a:pPr>
-            <a:r>
-              <a:rPr lang="en-US" sz="1250" dirty="0">
-                <a:solidFill>
-                  <a:srgbClr val="6B6B6B"/>
-                </a:solidFill>
-                <a:latin typeface="Calibri" pitchFamily="34" charset="0"/>
-                <a:ea typeface="Calibri" pitchFamily="34" charset="-122"/>
-                <a:cs typeface="Calibri" pitchFamily="34" charset="-120"/>
-              </a:rPr>
-              <a:t>Bisnis terdengar sama dengan ratusan kompetitor lainnya.</a:t>
+              <a:rPr lang="en-US" sz="1250" b="1" spc="50" kern="0" dirty="0">
+                <a:solidFill>
+                  <a:srgbClr val="4B36C7"/>
+                </a:solidFill>
+                <a:latin typeface="Arial" pitchFamily="34" charset="0"/>
+                <a:ea typeface="Arial" pitchFamily="34" charset="-122"/>
+                <a:cs typeface="Arial" pitchFamily="34" charset="-120"/>
+              </a:rPr>
+              <a:t>KESALAHAN UMUM DALAM RISET KOMPETITOR</a:t>
             </a:r>
             <a:endParaRPr lang="en-US" sz="1250" dirty="0"/>
           </a:p>
@@ -1803,44 +2105,29 @@
       </p:sp>
       <p:sp>
         <p:nvSpPr>
-          <p:cNvPr id="14" name="Shape 12"/>
-          <p:cNvSpPr/>
-          <p:nvPr/>
-        </p:nvSpPr>
-        <p:spPr>
-          <a:xfrm>
-            <a:off x="457200" y="3657600"/>
-            <a:ext cx="5394960" cy="1874520"/>
+          <p:cNvPr id="15" name="Shape 13"/>
+          <p:cNvSpPr/>
+          <p:nvPr/>
+        </p:nvSpPr>
+        <p:spPr>
+          <a:xfrm>
+            <a:off x="548640" y="4526280"/>
+            <a:ext cx="2651760" cy="566928"/>
           </a:xfrm>
           <a:prstGeom prst="roundRect">
             <a:avLst>
-              <a:gd name="adj" fmla="val 5854"/>
+              <a:gd name="adj" fmla="val 50000"/>
             </a:avLst>
           </a:prstGeom>
           <a:solidFill>
-            <a:srgbClr val="F2EEE9"/>
-          </a:solidFill>
-          <a:ln/>
-        </p:spPr>
-      </p:sp>
-      <p:sp>
-        <p:nvSpPr>
-          <p:cNvPr id="15" name="Shape 13"/>
-          <p:cNvSpPr/>
-          <p:nvPr/>
-        </p:nvSpPr>
-        <p:spPr>
-          <a:xfrm>
-            <a:off x="713232" y="3913632"/>
-            <a:ext cx="502920" cy="502920"/>
-          </a:xfrm>
-          <a:prstGeom prst="ellipse">
-            <a:avLst/>
-          </a:prstGeom>
-          <a:solidFill>
-            <a:srgbClr val="A8452F"/>
-          </a:solidFill>
-          <a:ln/>
+            <a:srgbClr val="F3F0FF"/>
+          </a:solidFill>
+          <a:ln w="12700">
+            <a:solidFill>
+              <a:srgbClr val="D9CFFB"/>
+            </a:solidFill>
+            <a:prstDash val="solid"/>
+          </a:ln>
         </p:spPr>
       </p:sp>
       <p:sp>
@@ -1851,8 +2138,8 @@
         </p:nvSpPr>
         <p:spPr>
           <a:xfrm>
-            <a:off x="713232" y="3913632"/>
-            <a:ext cx="502920" cy="502920"/>
+            <a:off x="621792" y="4526280"/>
+            <a:ext cx="2505456" cy="566928"/>
           </a:xfrm>
           <a:prstGeom prst="rect">
             <a:avLst/>
@@ -1865,153 +2152,83 @@
           <a:lstStyle/>
           <a:p>
             <a:pPr algn="ctr" indent="0" marL="0">
-              <a:buNone/>
-            </a:pPr>
-            <a:r>
-              <a:rPr lang="en-US" sz="1800" b="1" dirty="0">
-                <a:solidFill>
-                  <a:srgbClr val="FFFFFF"/>
-                </a:solidFill>
-                <a:latin typeface="Calibri" pitchFamily="34" charset="0"/>
-                <a:ea typeface="Calibri" pitchFamily="34" charset="-122"/>
-                <a:cs typeface="Calibri" pitchFamily="34" charset="-120"/>
-              </a:rPr>
-              <a:t>3</a:t>
-            </a:r>
-            <a:endParaRPr lang="en-US" sz="1800" dirty="0"/>
-          </a:p>
-        </p:txBody>
-      </p:sp>
-      <p:sp>
-        <p:nvSpPr>
-          <p:cNvPr id="17" name="Text 15"/>
-          <p:cNvSpPr/>
-          <p:nvPr/>
-        </p:nvSpPr>
-        <p:spPr>
-          <a:xfrm>
-            <a:off x="1371600" y="3858768"/>
-            <a:ext cx="4206240" cy="457200"/>
-          </a:xfrm>
-          <a:prstGeom prst="rect">
-            <a:avLst/>
-          </a:prstGeom>
-          <a:noFill/>
-          <a:ln/>
-        </p:spPr>
-        <p:txBody>
-          <a:bodyPr wrap="square" lIns="0" tIns="0" rIns="0" bIns="0" rtlCol="0" anchor="ctr"/>
-          <a:lstStyle/>
-          <a:p>
-            <a:pPr indent="0" marL="0">
-              <a:buNone/>
-            </a:pPr>
-            <a:r>
-              <a:rPr lang="en-US" sz="1500" b="1" dirty="0">
-                <a:solidFill>
-                  <a:srgbClr val="231A14"/>
-                </a:solidFill>
-                <a:latin typeface="Calibri" pitchFamily="34" charset="0"/>
-                <a:ea typeface="Calibri" pitchFamily="34" charset="-122"/>
-                <a:cs typeface="Calibri" pitchFamily="34" charset="-120"/>
-              </a:rPr>
-              <a:t>Jadi Acuan Semua Konten</a:t>
-            </a:r>
-            <a:endParaRPr lang="en-US" sz="1500" dirty="0"/>
-          </a:p>
-        </p:txBody>
-      </p:sp>
-      <p:sp>
-        <p:nvSpPr>
-          <p:cNvPr id="18" name="Text 16"/>
-          <p:cNvSpPr/>
-          <p:nvPr/>
-        </p:nvSpPr>
-        <p:spPr>
-          <a:xfrm>
-            <a:off x="713232" y="4526280"/>
-            <a:ext cx="4892040" cy="868680"/>
-          </a:xfrm>
-          <a:prstGeom prst="rect">
-            <a:avLst/>
-          </a:prstGeom>
-          <a:noFill/>
-          <a:ln/>
-        </p:spPr>
-        <p:txBody>
-          <a:bodyPr wrap="square" lIns="0" tIns="0" rIns="0" bIns="0" rtlCol="0" anchor="t"/>
-          <a:lstStyle/>
-          <a:p>
-            <a:pPr indent="0" marL="0">
-              <a:buNone/>
-            </a:pPr>
-            <a:r>
-              <a:rPr lang="en-US" sz="1250" dirty="0">
-                <a:solidFill>
-                  <a:srgbClr val="6B6B6B"/>
-                </a:solidFill>
-                <a:latin typeface="Calibri" pitchFamily="34" charset="0"/>
-                <a:ea typeface="Calibri" pitchFamily="34" charset="-122"/>
-                <a:cs typeface="Calibri" pitchFamily="34" charset="-120"/>
-              </a:rPr>
-              <a:t>Konten, iklan, dan komunikasi bisnis jadi konsisten.</a:t>
-            </a:r>
-            <a:endParaRPr lang="en-US" sz="1250" dirty="0"/>
-          </a:p>
-        </p:txBody>
-      </p:sp>
-      <p:sp>
-        <p:nvSpPr>
-          <p:cNvPr id="19" name="Shape 17"/>
-          <p:cNvSpPr/>
-          <p:nvPr/>
-        </p:nvSpPr>
-        <p:spPr>
-          <a:xfrm>
-            <a:off x="5989320" y="3657600"/>
-            <a:ext cx="5394960" cy="1874520"/>
+              <a:lnSpc>
+                <a:spcPct val="105000"/>
+              </a:lnSpc>
+              <a:buNone/>
+            </a:pPr>
+            <a:r>
+              <a:rPr lang="en-US" sz="1050" b="1" dirty="0">
+                <a:solidFill>
+                  <a:srgbClr val="4B36C7"/>
+                </a:solidFill>
+                <a:latin typeface="Arial" pitchFamily="34" charset="0"/>
+                <a:ea typeface="Arial" pitchFamily="34" charset="-122"/>
+                <a:cs typeface="Arial" pitchFamily="34" charset="-120"/>
+              </a:rPr>
+              <a:t>Hanya lihat produk,</a:t>
+            </a:r>
+            <a:endParaRPr lang="en-US" sz="1050" dirty="0"/>
+          </a:p>
+          <a:p>
+            <a:pPr algn="ctr" indent="0" marL="0">
+              <a:lnSpc>
+                <a:spcPct val="105000"/>
+              </a:lnSpc>
+              <a:buNone/>
+            </a:pPr>
+            <a:r>
+              <a:rPr lang="en-US" sz="1050" b="1" dirty="0">
+                <a:solidFill>
+                  <a:srgbClr val="4B36C7"/>
+                </a:solidFill>
+                <a:latin typeface="Arial" pitchFamily="34" charset="0"/>
+                <a:ea typeface="Arial" pitchFamily="34" charset="-122"/>
+                <a:cs typeface="Arial" pitchFamily="34" charset="-120"/>
+              </a:rPr>
+              <a:t>bukan ulasan negatif</a:t>
+            </a:r>
+            <a:endParaRPr lang="en-US" sz="1050" dirty="0"/>
+          </a:p>
+        </p:txBody>
+      </p:sp>
+      <p:sp>
+        <p:nvSpPr>
+          <p:cNvPr id="17" name="Shape 15"/>
+          <p:cNvSpPr/>
+          <p:nvPr/>
+        </p:nvSpPr>
+        <p:spPr>
+          <a:xfrm>
+            <a:off x="3364992" y="4526280"/>
+            <a:ext cx="2651760" cy="566928"/>
           </a:xfrm>
           <a:prstGeom prst="roundRect">
             <a:avLst>
-              <a:gd name="adj" fmla="val 5854"/>
+              <a:gd name="adj" fmla="val 50000"/>
             </a:avLst>
           </a:prstGeom>
           <a:solidFill>
-            <a:srgbClr val="F2EEE9"/>
-          </a:solidFill>
-          <a:ln/>
-        </p:spPr>
-      </p:sp>
-      <p:sp>
-        <p:nvSpPr>
-          <p:cNvPr id="20" name="Shape 18"/>
-          <p:cNvSpPr/>
-          <p:nvPr/>
-        </p:nvSpPr>
-        <p:spPr>
-          <a:xfrm>
-            <a:off x="6245352" y="3913632"/>
-            <a:ext cx="502920" cy="502920"/>
-          </a:xfrm>
-          <a:prstGeom prst="ellipse">
-            <a:avLst/>
-          </a:prstGeom>
-          <a:solidFill>
-            <a:srgbClr val="A8452F"/>
-          </a:solidFill>
-          <a:ln/>
-        </p:spPr>
-      </p:sp>
-      <p:sp>
-        <p:nvSpPr>
-          <p:cNvPr id="21" name="Text 19"/>
-          <p:cNvSpPr/>
-          <p:nvPr/>
-        </p:nvSpPr>
-        <p:spPr>
-          <a:xfrm>
-            <a:off x="6245352" y="3913632"/>
-            <a:ext cx="502920" cy="502920"/>
+            <a:srgbClr val="F3F0FF"/>
+          </a:solidFill>
+          <a:ln w="12700">
+            <a:solidFill>
+              <a:srgbClr val="D9CFFB"/>
+            </a:solidFill>
+            <a:prstDash val="solid"/>
+          </a:ln>
+        </p:spPr>
+      </p:sp>
+      <p:sp>
+        <p:nvSpPr>
+          <p:cNvPr id="18" name="Text 16"/>
+          <p:cNvSpPr/>
+          <p:nvPr/>
+        </p:nvSpPr>
+        <p:spPr>
+          <a:xfrm>
+            <a:off x="3438144" y="4526280"/>
+            <a:ext cx="2505456" cy="566928"/>
           </a:xfrm>
           <a:prstGeom prst="rect">
             <a:avLst/>
@@ -2024,22 +2241,161 @@
           <a:lstStyle/>
           <a:p>
             <a:pPr algn="ctr" indent="0" marL="0">
-              <a:buNone/>
-            </a:pPr>
-            <a:r>
-              <a:rPr lang="en-US" sz="1800" b="1" dirty="0">
-                <a:solidFill>
-                  <a:srgbClr val="FFFFFF"/>
-                </a:solidFill>
-                <a:latin typeface="Calibri" pitchFamily="34" charset="0"/>
-                <a:ea typeface="Calibri" pitchFamily="34" charset="-122"/>
-                <a:cs typeface="Calibri" pitchFamily="34" charset="-120"/>
-              </a:rPr>
-              <a:t>4</a:t>
-            </a:r>
-            <a:endParaRPr lang="en-US" sz="1800" dirty="0"/>
-          </a:p>
-        </p:txBody>
+              <a:lnSpc>
+                <a:spcPct val="105000"/>
+              </a:lnSpc>
+              <a:buNone/>
+            </a:pPr>
+            <a:r>
+              <a:rPr lang="en-US" sz="1050" b="1" dirty="0">
+                <a:solidFill>
+                  <a:srgbClr val="4B36C7"/>
+                </a:solidFill>
+                <a:latin typeface="Arial" pitchFamily="34" charset="0"/>
+                <a:ea typeface="Arial" pitchFamily="34" charset="-122"/>
+                <a:cs typeface="Arial" pitchFamily="34" charset="-120"/>
+              </a:rPr>
+              <a:t>Langsung tiru,</a:t>
+            </a:r>
+            <a:endParaRPr lang="en-US" sz="1050" dirty="0"/>
+          </a:p>
+          <a:p>
+            <a:pPr algn="ctr" indent="0" marL="0">
+              <a:lnSpc>
+                <a:spcPct val="105000"/>
+              </a:lnSpc>
+              <a:buNone/>
+            </a:pPr>
+            <a:r>
+              <a:rPr lang="en-US" sz="1050" b="1" dirty="0">
+                <a:solidFill>
+                  <a:srgbClr val="4B36C7"/>
+                </a:solidFill>
+                <a:latin typeface="Arial" pitchFamily="34" charset="0"/>
+                <a:ea typeface="Arial" pitchFamily="34" charset="-122"/>
+                <a:cs typeface="Arial" pitchFamily="34" charset="-120"/>
+              </a:rPr>
+              <a:t>bukan cari gap</a:t>
+            </a:r>
+            <a:endParaRPr lang="en-US" sz="1050" dirty="0"/>
+          </a:p>
+        </p:txBody>
+      </p:sp>
+      <p:sp>
+        <p:nvSpPr>
+          <p:cNvPr id="19" name="Shape 17"/>
+          <p:cNvSpPr/>
+          <p:nvPr/>
+        </p:nvSpPr>
+        <p:spPr>
+          <a:xfrm>
+            <a:off x="6181344" y="4526280"/>
+            <a:ext cx="2651760" cy="566928"/>
+          </a:xfrm>
+          <a:prstGeom prst="roundRect">
+            <a:avLst>
+              <a:gd name="adj" fmla="val 50000"/>
+            </a:avLst>
+          </a:prstGeom>
+          <a:solidFill>
+            <a:srgbClr val="F3F0FF"/>
+          </a:solidFill>
+          <a:ln w="12700">
+            <a:solidFill>
+              <a:srgbClr val="D9CFFB"/>
+            </a:solidFill>
+            <a:prstDash val="solid"/>
+          </a:ln>
+        </p:spPr>
+      </p:sp>
+      <p:sp>
+        <p:nvSpPr>
+          <p:cNvPr id="20" name="Text 18"/>
+          <p:cNvSpPr/>
+          <p:nvPr/>
+        </p:nvSpPr>
+        <p:spPr>
+          <a:xfrm>
+            <a:off x="6254496" y="4526280"/>
+            <a:ext cx="2505456" cy="566928"/>
+          </a:xfrm>
+          <a:prstGeom prst="rect">
+            <a:avLst/>
+          </a:prstGeom>
+          <a:noFill/>
+          <a:ln/>
+        </p:spPr>
+        <p:txBody>
+          <a:bodyPr wrap="square" lIns="0" tIns="0" rIns="0" bIns="0" rtlCol="0" anchor="ctr"/>
+          <a:lstStyle/>
+          <a:p>
+            <a:pPr algn="ctr" indent="0" marL="0">
+              <a:lnSpc>
+                <a:spcPct val="105000"/>
+              </a:lnSpc>
+              <a:buNone/>
+            </a:pPr>
+            <a:r>
+              <a:rPr lang="en-US" sz="1050" b="1" dirty="0">
+                <a:solidFill>
+                  <a:srgbClr val="4B36C7"/>
+                </a:solidFill>
+                <a:latin typeface="Arial" pitchFamily="34" charset="0"/>
+                <a:ea typeface="Arial" pitchFamily="34" charset="-122"/>
+                <a:cs typeface="Arial" pitchFamily="34" charset="-120"/>
+              </a:rPr>
+              <a:t>Positioning</a:t>
+            </a:r>
+            <a:endParaRPr lang="en-US" sz="1050" dirty="0"/>
+          </a:p>
+          <a:p>
+            <a:pPr algn="ctr" indent="0" marL="0">
+              <a:lnSpc>
+                <a:spcPct val="105000"/>
+              </a:lnSpc>
+              <a:buNone/>
+            </a:pPr>
+            <a:r>
+              <a:rPr lang="en-US" sz="1050" b="1" dirty="0">
+                <a:solidFill>
+                  <a:srgbClr val="4B36C7"/>
+                </a:solidFill>
+                <a:latin typeface="Arial" pitchFamily="34" charset="0"/>
+                <a:ea typeface="Arial" pitchFamily="34" charset="-122"/>
+                <a:cs typeface="Arial" pitchFamily="34" charset="-120"/>
+              </a:rPr>
+              <a:t>terlalu umum</a:t>
+            </a:r>
+            <a:endParaRPr lang="en-US" sz="1050" dirty="0"/>
+          </a:p>
+        </p:txBody>
+      </p:sp>
+      <p:sp>
+        <p:nvSpPr>
+          <p:cNvPr id="21" name="Shape 19"/>
+          <p:cNvSpPr/>
+          <p:nvPr/>
+        </p:nvSpPr>
+        <p:spPr>
+          <a:xfrm>
+            <a:off x="8997696" y="4526280"/>
+            <a:ext cx="2651760" cy="566928"/>
+          </a:xfrm>
+          <a:prstGeom prst="roundRect">
+            <a:avLst>
+              <a:gd name="adj" fmla="val 50000"/>
+            </a:avLst>
+          </a:prstGeom>
+          <a:solidFill>
+            <a:srgbClr val="F3F0FF"/>
+          </a:solidFill>
+          <a:ln w="12700">
+            <a:solidFill>
+              <a:srgbClr val="D9CFFB"/>
+            </a:solidFill>
+            <a:prstDash val="solid"/>
+          </a:ln>
+        </p:spPr>
       </p:sp>
       <p:sp>
         <p:nvSpPr>
@@ -2049,8 +2405,8 @@
         </p:nvSpPr>
         <p:spPr>
           <a:xfrm>
-            <a:off x="6903720" y="3858768"/>
-            <a:ext cx="4206240" cy="457200"/>
+            <a:off x="9070848" y="4526280"/>
+            <a:ext cx="2505456" cy="566928"/>
           </a:xfrm>
           <a:prstGeom prst="rect">
             <a:avLst/>
@@ -2062,60 +2418,44 @@
           <a:bodyPr wrap="square" lIns="0" tIns="0" rIns="0" bIns="0" rtlCol="0" anchor="ctr"/>
           <a:lstStyle/>
           <a:p>
-            <a:pPr indent="0" marL="0">
-              <a:buNone/>
-            </a:pPr>
-            <a:r>
-              <a:rPr lang="en-US" sz="1500" b="1" dirty="0">
-                <a:solidFill>
-                  <a:srgbClr val="231A14"/>
-                </a:solidFill>
-                <a:latin typeface="Calibri" pitchFamily="34" charset="0"/>
-                <a:ea typeface="Calibri" pitchFamily="34" charset="-122"/>
-                <a:cs typeface="Calibri" pitchFamily="34" charset="-120"/>
-              </a:rPr>
-              <a:t>Claude Bisa Bantu</a:t>
-            </a:r>
-            <a:endParaRPr lang="en-US" sz="1500" dirty="0"/>
-          </a:p>
-        </p:txBody>
-      </p:sp>
-      <p:sp>
-        <p:nvSpPr>
-          <p:cNvPr id="23" name="Text 21"/>
-          <p:cNvSpPr/>
-          <p:nvPr/>
-        </p:nvSpPr>
-        <p:spPr>
-          <a:xfrm>
-            <a:off x="6245352" y="4526280"/>
-            <a:ext cx="4892040" cy="868680"/>
-          </a:xfrm>
-          <a:prstGeom prst="rect">
-            <a:avLst/>
-          </a:prstGeom>
-          <a:noFill/>
-          <a:ln/>
-        </p:spPr>
-        <p:txBody>
-          <a:bodyPr wrap="square" lIns="0" tIns="0" rIns="0" bIns="0" rtlCol="0" anchor="t"/>
-          <a:lstStyle/>
-          <a:p>
-            <a:pPr indent="0" marL="0">
-              <a:buNone/>
-            </a:pPr>
-            <a:r>
-              <a:rPr lang="en-US" sz="1250" dirty="0">
-                <a:solidFill>
-                  <a:srgbClr val="6B6B6B"/>
-                </a:solidFill>
-                <a:latin typeface="Calibri" pitchFamily="34" charset="0"/>
-                <a:ea typeface="Calibri" pitchFamily="34" charset="-122"/>
-                <a:cs typeface="Calibri" pitchFamily="34" charset="-120"/>
-              </a:rPr>
-              <a:t>Analisis kompetitor &amp; susun positioning dari data yang kamu kumpulkan.</a:t>
-            </a:r>
-            <a:endParaRPr lang="en-US" sz="1250" dirty="0"/>
+            <a:pPr algn="ctr" indent="0" marL="0">
+              <a:lnSpc>
+                <a:spcPct val="105000"/>
+              </a:lnSpc>
+              <a:buNone/>
+            </a:pPr>
+            <a:r>
+              <a:rPr lang="en-US" sz="1050" b="1" dirty="0">
+                <a:solidFill>
+                  <a:srgbClr val="4B36C7"/>
+                </a:solidFill>
+                <a:latin typeface="Arial" pitchFamily="34" charset="0"/>
+                <a:ea typeface="Arial" pitchFamily="34" charset="-122"/>
+                <a:cs typeface="Arial" pitchFamily="34" charset="-120"/>
+              </a:rPr>
+              <a:t>Tidak pernah</a:t>
+            </a:r>
+            <a:endParaRPr lang="en-US" sz="1050" dirty="0"/>
+          </a:p>
+          <a:p>
+            <a:pPr algn="ctr" indent="0" marL="0">
+              <a:lnSpc>
+                <a:spcPct val="105000"/>
+              </a:lnSpc>
+              <a:buNone/>
+            </a:pPr>
+            <a:r>
+              <a:rPr lang="en-US" sz="1050" b="1" dirty="0">
+                <a:solidFill>
+                  <a:srgbClr val="4B36C7"/>
+                </a:solidFill>
+                <a:latin typeface="Arial" pitchFamily="34" charset="0"/>
+                <a:ea typeface="Arial" pitchFamily="34" charset="-122"/>
+                <a:cs typeface="Arial" pitchFamily="34" charset="-120"/>
+              </a:rPr>
+              <a:t>di-update</a:t>
+            </a:r>
+            <a:endParaRPr lang="en-US" sz="1050" dirty="0"/>
           </a:p>
         </p:txBody>
       </p:sp>
@@ -2153,53 +2493,107 @@
       </p:grpSpPr>
       <p:sp>
         <p:nvSpPr>
-          <p:cNvPr id="2" name="Text 0"/>
-          <p:cNvSpPr/>
-          <p:nvPr/>
-        </p:nvSpPr>
-        <p:spPr>
-          <a:xfrm>
-            <a:off x="457200" y="320040"/>
-            <a:ext cx="11247120" cy="320040"/>
-          </a:xfrm>
-          <a:prstGeom prst="rect">
-            <a:avLst/>
-          </a:prstGeom>
-          <a:noFill/>
-          <a:ln/>
-        </p:spPr>
-        <p:txBody>
-          <a:bodyPr wrap="square" rtlCol="0" anchor="ctr"/>
+          <p:cNvPr id="2" name="Shape 0"/>
+          <p:cNvSpPr/>
+          <p:nvPr/>
+        </p:nvSpPr>
+        <p:spPr>
+          <a:xfrm>
+            <a:off x="0" y="0"/>
+            <a:ext cx="12191695" cy="960120"/>
+          </a:xfrm>
+          <a:prstGeom prst="rect">
+            <a:avLst/>
+          </a:prstGeom>
+          <a:solidFill>
+            <a:srgbClr val="0D1321"/>
+          </a:solidFill>
+          <a:ln/>
+        </p:spPr>
+      </p:sp>
+      <p:sp>
+        <p:nvSpPr>
+          <p:cNvPr id="3" name="Shape 1"/>
+          <p:cNvSpPr/>
+          <p:nvPr/>
+        </p:nvSpPr>
+        <p:spPr>
+          <a:xfrm>
+            <a:off x="0" y="960120"/>
+            <a:ext cx="12191695" cy="41148"/>
+          </a:xfrm>
+          <a:prstGeom prst="rect">
+            <a:avLst/>
+          </a:prstGeom>
+          <a:solidFill>
+            <a:srgbClr val="6849F6"/>
+          </a:solidFill>
+          <a:ln/>
+        </p:spPr>
+      </p:sp>
+      <p:sp>
+        <p:nvSpPr>
+          <p:cNvPr id="4" name="Text 2"/>
+          <p:cNvSpPr/>
+          <p:nvPr/>
+        </p:nvSpPr>
+        <p:spPr>
+          <a:xfrm>
+            <a:off x="548640" y="256032"/>
+            <a:ext cx="3657600" cy="457200"/>
+          </a:xfrm>
+          <a:prstGeom prst="rect">
+            <a:avLst/>
+          </a:prstGeom>
+          <a:noFill/>
+          <a:ln/>
+        </p:spPr>
+        <p:txBody>
+          <a:bodyPr wrap="square" lIns="0" tIns="0" rIns="0" bIns="0" rtlCol="0" anchor="ctr"/>
           <a:lstStyle/>
           <a:p>
             <a:pPr indent="0" marL="0">
               <a:buNone/>
             </a:pPr>
             <a:r>
-              <a:rPr lang="en-US" sz="1200" b="1" spc="100" kern="0" dirty="0">
-                <a:solidFill>
-                  <a:srgbClr val="A8452F"/>
-                </a:solidFill>
-                <a:latin typeface="Calibri" pitchFamily="34" charset="0"/>
-                <a:ea typeface="Calibri" pitchFamily="34" charset="-122"/>
-                <a:cs typeface="Calibri" pitchFamily="34" charset="-120"/>
-              </a:rPr>
-              <a:t>MODUL 01 — POSITIONING &amp; ANALISIS KOMPETITOR</a:t>
-            </a:r>
-            <a:endParaRPr lang="en-US" sz="1200" dirty="0"/>
-          </a:p>
-        </p:txBody>
-      </p:sp>
-      <p:sp>
-        <p:nvSpPr>
-          <p:cNvPr id="3" name="Text 1"/>
-          <p:cNvSpPr/>
-          <p:nvPr/>
-        </p:nvSpPr>
-        <p:spPr>
-          <a:xfrm>
-            <a:off x="457200" y="685800"/>
-            <a:ext cx="10058400" cy="640080"/>
+              <a:rPr lang="en-US" sz="2000" b="1" dirty="0">
+                <a:solidFill>
+                  <a:srgbClr val="FFFFFF"/>
+                </a:solidFill>
+                <a:latin typeface="Arial" pitchFamily="34" charset="0"/>
+                <a:ea typeface="Arial" pitchFamily="34" charset="-122"/>
+                <a:cs typeface="Arial" pitchFamily="34" charset="-120"/>
+              </a:rPr>
+              <a:t>belajar</a:t>
+            </a:r>
+            <a:pPr indent="0" marL="0">
+              <a:buNone/>
+            </a:pPr>
+            <a:r>
+              <a:rPr lang="en-US" sz="2000" b="1" dirty="0">
+                <a:solidFill>
+                  <a:srgbClr val="8B7CF6"/>
+                </a:solidFill>
+                <a:latin typeface="Arial" pitchFamily="34" charset="0"/>
+                <a:ea typeface="Arial" pitchFamily="34" charset="-122"/>
+                <a:cs typeface="Arial" pitchFamily="34" charset="-120"/>
+              </a:rPr>
+              <a:t>claude</a:t>
+            </a:r>
+            <a:endParaRPr lang="en-US" sz="2000" dirty="0"/>
+          </a:p>
+        </p:txBody>
+      </p:sp>
+      <p:sp>
+        <p:nvSpPr>
+          <p:cNvPr id="5" name="Text 3"/>
+          <p:cNvSpPr/>
+          <p:nvPr/>
+        </p:nvSpPr>
+        <p:spPr>
+          <a:xfrm>
+            <a:off x="5943600" y="274320"/>
+            <a:ext cx="5696712" cy="411480"/>
           </a:xfrm>
           <a:prstGeom prst="rect">
             <a:avLst/>
@@ -2211,46 +2605,124 @@
           <a:bodyPr wrap="square" lIns="0" tIns="0" rIns="0" bIns="0" rtlCol="0" anchor="ctr"/>
           <a:lstStyle/>
           <a:p>
+            <a:pPr algn="r" indent="0" marL="0">
+              <a:buNone/>
+            </a:pPr>
+            <a:r>
+              <a:rPr lang="en-US" sz="1250" dirty="0">
+                <a:solidFill>
+                  <a:srgbClr val="9AA2B4"/>
+                </a:solidFill>
+                <a:latin typeface="Arial" pitchFamily="34" charset="0"/>
+                <a:ea typeface="Arial" pitchFamily="34" charset="-122"/>
+                <a:cs typeface="Arial" pitchFamily="34" charset="-120"/>
+              </a:rPr>
+              <a:t>Modul 01 — Positioning &amp; Analisis Kompetitor</a:t>
+            </a:r>
+            <a:endParaRPr lang="en-US" sz="1250" dirty="0"/>
+          </a:p>
+        </p:txBody>
+      </p:sp>
+      <p:sp>
+        <p:nvSpPr>
+          <p:cNvPr id="6" name="Text 4"/>
+          <p:cNvSpPr/>
+          <p:nvPr/>
+        </p:nvSpPr>
+        <p:spPr>
+          <a:xfrm>
+            <a:off x="548640" y="1170432"/>
+            <a:ext cx="11091672" cy="274320"/>
+          </a:xfrm>
+          <a:prstGeom prst="rect">
+            <a:avLst/>
+          </a:prstGeom>
+          <a:noFill/>
+          <a:ln/>
+        </p:spPr>
+        <p:txBody>
+          <a:bodyPr wrap="square" lIns="0" tIns="0" rIns="0" bIns="0" rtlCol="0" anchor="ctr"/>
+          <a:lstStyle/>
+          <a:p>
             <a:pPr indent="0" marL="0">
               <a:buNone/>
             </a:pPr>
             <a:r>
-              <a:rPr lang="en-US" sz="3000" b="1" dirty="0">
-                <a:solidFill>
-                  <a:srgbClr val="231A14"/>
-                </a:solidFill>
-                <a:latin typeface="Cambria" pitchFamily="34" charset="0"/>
-                <a:ea typeface="Cambria" pitchFamily="34" charset="-122"/>
-                <a:cs typeface="Cambria" pitchFamily="34" charset="-120"/>
+              <a:rPr lang="en-US" sz="1250" b="1" spc="100" kern="0" dirty="0">
+                <a:solidFill>
+                  <a:srgbClr val="4B36C7"/>
+                </a:solidFill>
+                <a:latin typeface="Arial" pitchFamily="34" charset="0"/>
+                <a:ea typeface="Arial" pitchFamily="34" charset="-122"/>
+                <a:cs typeface="Arial" pitchFamily="34" charset="-120"/>
+              </a:rPr>
+              <a:t>PROMPT YANG BERHASIL BUTUH DATA LENGKAP</a:t>
+            </a:r>
+            <a:endParaRPr lang="en-US" sz="1250" dirty="0"/>
+          </a:p>
+        </p:txBody>
+      </p:sp>
+      <p:sp>
+        <p:nvSpPr>
+          <p:cNvPr id="7" name="Text 5"/>
+          <p:cNvSpPr/>
+          <p:nvPr/>
+        </p:nvSpPr>
+        <p:spPr>
+          <a:xfrm>
+            <a:off x="548640" y="1444752"/>
+            <a:ext cx="11091672" cy="548640"/>
+          </a:xfrm>
+          <a:prstGeom prst="rect">
+            <a:avLst/>
+          </a:prstGeom>
+          <a:noFill/>
+          <a:ln/>
+        </p:spPr>
+        <p:txBody>
+          <a:bodyPr wrap="square" lIns="0" tIns="0" rIns="0" bIns="0" rtlCol="0" anchor="ctr"/>
+          <a:lstStyle/>
+          <a:p>
+            <a:pPr indent="0" marL="0">
+              <a:buNone/>
+            </a:pPr>
+            <a:r>
+              <a:rPr lang="en-US" sz="2600" b="1" dirty="0">
+                <a:solidFill>
+                  <a:srgbClr val="0D1321"/>
+                </a:solidFill>
+                <a:latin typeface="Arial" pitchFamily="34" charset="0"/>
+                <a:ea typeface="Arial" pitchFamily="34" charset="-122"/>
+                <a:cs typeface="Arial" pitchFamily="34" charset="-120"/>
               </a:rPr>
               <a:t>Contoh Prompt: Buruk vs Baik</a:t>
             </a:r>
-            <a:endParaRPr lang="en-US" sz="3000" dirty="0"/>
-          </a:p>
-        </p:txBody>
-      </p:sp>
-      <p:sp>
-        <p:nvSpPr>
-          <p:cNvPr id="4" name="Shape 2"/>
-          <p:cNvSpPr/>
-          <p:nvPr/>
-        </p:nvSpPr>
-        <p:spPr>
-          <a:xfrm>
-            <a:off x="457200" y="1600200"/>
-            <a:ext cx="5394960" cy="4206240"/>
+            <a:endParaRPr lang="en-US" sz="2600" dirty="0"/>
+          </a:p>
+        </p:txBody>
+      </p:sp>
+      <p:sp>
+        <p:nvSpPr>
+          <p:cNvPr id="8" name="Shape 6"/>
+          <p:cNvSpPr/>
+          <p:nvPr/>
+        </p:nvSpPr>
+        <p:spPr>
+          <a:xfrm>
+            <a:off x="548640" y="2148840"/>
+            <a:ext cx="5413248" cy="3291840"/>
           </a:xfrm>
           <a:prstGeom prst="roundRect">
             <a:avLst>
-              <a:gd name="adj" fmla="val 2609"/>
+              <a:gd name="adj" fmla="val 2222"/>
             </a:avLst>
           </a:prstGeom>
           <a:solidFill>
-            <a:srgbClr val="F5F5F5"/>
+            <a:srgbClr val="F4F6FB"/>
           </a:solidFill>
           <a:ln w="12700">
             <a:solidFill>
-              <a:srgbClr val="DDDDDD"/>
+              <a:srgbClr val="D9DEEC"/>
             </a:solidFill>
             <a:prstDash val="solid"/>
           </a:ln>
@@ -2258,14 +2730,14 @@
       </p:sp>
       <p:sp>
         <p:nvSpPr>
-          <p:cNvPr id="5" name="Text 3"/>
-          <p:cNvSpPr/>
-          <p:nvPr/>
-        </p:nvSpPr>
-        <p:spPr>
-          <a:xfrm>
-            <a:off x="777240" y="1828800"/>
-            <a:ext cx="4754880" cy="365760"/>
+          <p:cNvPr id="9" name="Text 7"/>
+          <p:cNvSpPr/>
+          <p:nvPr/>
+        </p:nvSpPr>
+        <p:spPr>
+          <a:xfrm>
+            <a:off x="749808" y="2331720"/>
+            <a:ext cx="5010912" cy="256032"/>
           </a:xfrm>
           <a:prstGeom prst="rect">
             <a:avLst/>
@@ -2281,134 +2753,126 @@
               <a:buNone/>
             </a:pPr>
             <a:r>
-              <a:rPr lang="en-US" sz="1300" b="1" dirty="0">
-                <a:solidFill>
-                  <a:srgbClr val="8A8A8A"/>
-                </a:solidFill>
-                <a:latin typeface="Calibri" pitchFamily="34" charset="0"/>
-                <a:ea typeface="Calibri" pitchFamily="34" charset="-122"/>
-                <a:cs typeface="Calibri" pitchFamily="34" charset="-120"/>
+              <a:rPr lang="en-US" sz="1200" b="1" spc="50" kern="0" dirty="0">
+                <a:solidFill>
+                  <a:srgbClr val="6B7280"/>
+                </a:solidFill>
+                <a:latin typeface="Arial" pitchFamily="34" charset="0"/>
+                <a:ea typeface="Arial" pitchFamily="34" charset="-122"/>
+                <a:cs typeface="Arial" pitchFamily="34" charset="-120"/>
               </a:rPr>
               <a:t>PROMPT BURUK</a:t>
             </a:r>
-            <a:endParaRPr lang="en-US" sz="1300" dirty="0"/>
-          </a:p>
-        </p:txBody>
-      </p:sp>
-      <p:sp>
-        <p:nvSpPr>
-          <p:cNvPr id="6" name="Text 4"/>
-          <p:cNvSpPr/>
-          <p:nvPr/>
-        </p:nvSpPr>
-        <p:spPr>
-          <a:xfrm>
-            <a:off x="777240" y="2286000"/>
-            <a:ext cx="4754880" cy="1005840"/>
-          </a:xfrm>
-          <a:prstGeom prst="rect">
-            <a:avLst/>
-          </a:prstGeom>
-          <a:noFill/>
-          <a:ln/>
-        </p:spPr>
-        <p:txBody>
-          <a:bodyPr wrap="square" lIns="0" tIns="0" rIns="0" bIns="0" rtlCol="0" anchor="ctr"/>
+            <a:endParaRPr lang="en-US" sz="1200" dirty="0"/>
+          </a:p>
+        </p:txBody>
+      </p:sp>
+      <p:sp>
+        <p:nvSpPr>
+          <p:cNvPr id="10" name="Text 8"/>
+          <p:cNvSpPr/>
+          <p:nvPr/>
+        </p:nvSpPr>
+        <p:spPr>
+          <a:xfrm>
+            <a:off x="749808" y="2651760"/>
+            <a:ext cx="5010912" cy="2240280"/>
+          </a:xfrm>
+          <a:prstGeom prst="rect">
+            <a:avLst/>
+          </a:prstGeom>
+          <a:noFill/>
+          <a:ln/>
+        </p:spPr>
+        <p:txBody>
+          <a:bodyPr wrap="square" lIns="0" tIns="0" rIns="0" bIns="0" rtlCol="0" anchor="t"/>
           <a:lstStyle/>
           <a:p>
             <a:pPr indent="0" marL="0">
-              <a:buNone/>
-            </a:pPr>
-            <a:r>
-              <a:rPr lang="en-US" sz="1500" i="1" dirty="0">
-                <a:solidFill>
-                  <a:srgbClr val="231A14"/>
-                </a:solidFill>
-                <a:latin typeface="Cambria" pitchFamily="34" charset="0"/>
-                <a:ea typeface="Cambria" pitchFamily="34" charset="-122"/>
-                <a:cs typeface="Cambria" pitchFamily="34" charset="-120"/>
-              </a:rPr>
-              <a:t>“Analisis kompetitor saya di frozen food”</a:t>
-            </a:r>
-            <a:endParaRPr lang="en-US" sz="1500" dirty="0"/>
-          </a:p>
-        </p:txBody>
-      </p:sp>
-      <p:sp>
-        <p:nvSpPr>
-          <p:cNvPr id="7" name="Text 5"/>
-          <p:cNvSpPr/>
-          <p:nvPr/>
-        </p:nvSpPr>
-        <p:spPr>
-          <a:xfrm>
-            <a:off x="777240" y="4023360"/>
-            <a:ext cx="4754880" cy="1554480"/>
-          </a:xfrm>
-          <a:prstGeom prst="rect">
-            <a:avLst/>
-          </a:prstGeom>
-          <a:noFill/>
-          <a:ln/>
-        </p:spPr>
-        <p:txBody>
-          <a:bodyPr wrap="square" lIns="0" tIns="0" rIns="0" bIns="0" rtlCol="0" anchor="ctr"/>
+              <a:lnSpc>
+                <a:spcPct val="115000"/>
+              </a:lnSpc>
+              <a:buNone/>
+            </a:pPr>
+            <a:r>
+              <a:rPr lang="en-US" sz="1150" i="1" dirty="0">
+                <a:solidFill>
+                  <a:srgbClr val="23283A"/>
+                </a:solidFill>
+                <a:latin typeface="Arial" pitchFamily="34" charset="0"/>
+                <a:ea typeface="Arial" pitchFamily="34" charset="-122"/>
+                <a:cs typeface="Arial" pitchFamily="34" charset="-120"/>
+              </a:rPr>
+              <a:t>"Analisis kompetitor saya di frozen food"</a:t>
+            </a:r>
+            <a:endParaRPr lang="en-US" sz="1150" dirty="0"/>
+          </a:p>
+        </p:txBody>
+      </p:sp>
+      <p:sp>
+        <p:nvSpPr>
+          <p:cNvPr id="11" name="Text 9"/>
+          <p:cNvSpPr/>
+          <p:nvPr/>
+        </p:nvSpPr>
+        <p:spPr>
+          <a:xfrm>
+            <a:off x="749808" y="4873752"/>
+            <a:ext cx="5010912" cy="457200"/>
+          </a:xfrm>
+          <a:prstGeom prst="rect">
+            <a:avLst/>
+          </a:prstGeom>
+          <a:noFill/>
+          <a:ln/>
+        </p:spPr>
+        <p:txBody>
+          <a:bodyPr wrap="square" lIns="0" tIns="0" rIns="0" bIns="0" rtlCol="0" anchor="t"/>
           <a:lstStyle/>
           <a:p>
             <a:pPr indent="0" marL="0">
-              <a:buNone/>
-            </a:pPr>
-            <a:r>
-              <a:rPr lang="en-US" sz="1250" b="1" dirty="0">
-                <a:solidFill>
-                  <a:srgbClr val="6B6B6B"/>
-                </a:solidFill>
-                <a:latin typeface="Calibri" pitchFamily="34" charset="0"/>
-                <a:ea typeface="Calibri" pitchFamily="34" charset="-122"/>
-                <a:cs typeface="Calibri" pitchFamily="34" charset="-120"/>
-              </a:rPr>
-              <a:t>Masalah: </a:t>
-            </a:r>
-            <a:pPr indent="0" marL="0">
-              <a:buNone/>
-            </a:pPr>
-            <a:r>
-              <a:rPr lang="en-US" sz="1250" dirty="0">
-                <a:solidFill>
-                  <a:srgbClr val="6B6B6B"/>
-                </a:solidFill>
-                <a:latin typeface="Calibri" pitchFamily="34" charset="0"/>
-                <a:ea typeface="Calibri" pitchFamily="34" charset="-122"/>
-                <a:cs typeface="Calibri" pitchFamily="34" charset="-120"/>
-              </a:rPr>
-              <a:t>Claude tidak punya data apapun. Jawabannya akan generik dan tidak relevan untuk bisnismu.</a:t>
-            </a:r>
-            <a:endParaRPr lang="en-US" sz="1250" dirty="0"/>
-          </a:p>
-        </p:txBody>
-      </p:sp>
-      <p:sp>
-        <p:nvSpPr>
-          <p:cNvPr id="8" name="Shape 6"/>
-          <p:cNvSpPr/>
-          <p:nvPr/>
-        </p:nvSpPr>
-        <p:spPr>
-          <a:xfrm>
-            <a:off x="5989320" y="1600200"/>
-            <a:ext cx="5715000" cy="4206240"/>
+              <a:lnSpc>
+                <a:spcPct val="110000"/>
+              </a:lnSpc>
+              <a:buNone/>
+            </a:pPr>
+            <a:r>
+              <a:rPr lang="en-US" sz="1050" dirty="0">
+                <a:solidFill>
+                  <a:srgbClr val="6B7280"/>
+                </a:solidFill>
+                <a:latin typeface="Arial" pitchFamily="34" charset="0"/>
+                <a:ea typeface="Arial" pitchFamily="34" charset="-122"/>
+                <a:cs typeface="Arial" pitchFamily="34" charset="-120"/>
+              </a:rPr>
+              <a:t>Masalah: Claude tidak punya data apapun. Jawabannya akan generik dan tidak relevan untuk bisnismu.</a:t>
+            </a:r>
+            <a:endParaRPr lang="en-US" sz="1050" dirty="0"/>
+          </a:p>
+        </p:txBody>
+      </p:sp>
+      <p:sp>
+        <p:nvSpPr>
+          <p:cNvPr id="12" name="Shape 10"/>
+          <p:cNvSpPr/>
+          <p:nvPr/>
+        </p:nvSpPr>
+        <p:spPr>
+          <a:xfrm>
+            <a:off x="6227064" y="2148840"/>
+            <a:ext cx="5413248" cy="3291840"/>
           </a:xfrm>
           <a:prstGeom prst="roundRect">
             <a:avLst>
-              <a:gd name="adj" fmla="val 2609"/>
+              <a:gd name="adj" fmla="val 2222"/>
             </a:avLst>
           </a:prstGeom>
           <a:solidFill>
-            <a:srgbClr val="FFFFFF"/>
-          </a:solidFill>
-          <a:ln w="19050">
+            <a:srgbClr val="F3F0FF"/>
+          </a:solidFill>
+          <a:ln w="12700">
             <a:solidFill>
-              <a:srgbClr val="A8452F"/>
+              <a:srgbClr val="D9CFFB"/>
             </a:solidFill>
             <a:prstDash val="solid"/>
           </a:ln>
@@ -2416,14 +2880,14 @@
       </p:sp>
       <p:sp>
         <p:nvSpPr>
-          <p:cNvPr id="9" name="Text 7"/>
-          <p:cNvSpPr/>
-          <p:nvPr/>
-        </p:nvSpPr>
-        <p:spPr>
-          <a:xfrm>
-            <a:off x="6309360" y="1828800"/>
-            <a:ext cx="5120640" cy="365760"/>
+          <p:cNvPr id="13" name="Text 11"/>
+          <p:cNvSpPr/>
+          <p:nvPr/>
+        </p:nvSpPr>
+        <p:spPr>
+          <a:xfrm>
+            <a:off x="6428232" y="2331720"/>
+            <a:ext cx="5010912" cy="256032"/>
           </a:xfrm>
           <a:prstGeom prst="rect">
             <a:avLst/>
@@ -2439,30 +2903,30 @@
               <a:buNone/>
             </a:pPr>
             <a:r>
-              <a:rPr lang="en-US" sz="1300" b="1" dirty="0">
-                <a:solidFill>
-                  <a:srgbClr val="A8452F"/>
-                </a:solidFill>
-                <a:latin typeface="Calibri" pitchFamily="34" charset="0"/>
-                <a:ea typeface="Calibri" pitchFamily="34" charset="-122"/>
-                <a:cs typeface="Calibri" pitchFamily="34" charset="-120"/>
+              <a:rPr lang="en-US" sz="1200" b="1" spc="50" kern="0" dirty="0">
+                <a:solidFill>
+                  <a:srgbClr val="4B36C7"/>
+                </a:solidFill>
+                <a:latin typeface="Arial" pitchFamily="34" charset="0"/>
+                <a:ea typeface="Arial" pitchFamily="34" charset="-122"/>
+                <a:cs typeface="Arial" pitchFamily="34" charset="-120"/>
               </a:rPr>
               <a:t>PROMPT BAIK</a:t>
             </a:r>
-            <a:endParaRPr lang="en-US" sz="1300" dirty="0"/>
-          </a:p>
-        </p:txBody>
-      </p:sp>
-      <p:sp>
-        <p:nvSpPr>
-          <p:cNvPr id="10" name="Text 8"/>
-          <p:cNvSpPr/>
-          <p:nvPr/>
-        </p:nvSpPr>
-        <p:spPr>
-          <a:xfrm>
-            <a:off x="6309360" y="2240280"/>
-            <a:ext cx="5120640" cy="2331720"/>
+            <a:endParaRPr lang="en-US" sz="1200" dirty="0"/>
+          </a:p>
+        </p:txBody>
+      </p:sp>
+      <p:sp>
+        <p:nvSpPr>
+          <p:cNvPr id="14" name="Text 12"/>
+          <p:cNvSpPr/>
+          <p:nvPr/>
+        </p:nvSpPr>
+        <p:spPr>
+          <a:xfrm>
+            <a:off x="6428232" y="2651760"/>
+            <a:ext cx="5010912" cy="2240280"/>
           </a:xfrm>
           <a:prstGeom prst="rect">
             <a:avLst/>
@@ -2475,73 +2939,65 @@
           <a:lstStyle/>
           <a:p>
             <a:pPr indent="0" marL="0">
-              <a:buNone/>
-            </a:pPr>
-            <a:r>
-              <a:rPr lang="en-US" sz="1300" i="1" dirty="0">
-                <a:solidFill>
-                  <a:srgbClr val="231A14"/>
-                </a:solidFill>
-                <a:latin typeface="Cambria" pitchFamily="34" charset="0"/>
-                <a:ea typeface="Cambria" pitchFamily="34" charset="-122"/>
-                <a:cs typeface="Cambria" pitchFamily="34" charset="-120"/>
-              </a:rPr>
-              <a:t>“Ini data 3 kompetitor frozen food saya [paste isi cm-template-kompetitor.txt]. Buatkan: SWOT singkat, gap yang belum diisi kompetitor manapun, dan 1 kalimat positioning: Untuk [siapa], [bisnis] adalah [apa] yang [benefit] karena [bukti].”</a:t>
-            </a:r>
-            <a:endParaRPr lang="en-US" sz="1300" dirty="0"/>
-          </a:p>
-        </p:txBody>
-      </p:sp>
-      <p:sp>
-        <p:nvSpPr>
-          <p:cNvPr id="11" name="Text 9"/>
-          <p:cNvSpPr/>
-          <p:nvPr/>
-        </p:nvSpPr>
-        <p:spPr>
-          <a:xfrm>
-            <a:off x="6309360" y="4663440"/>
-            <a:ext cx="5120640" cy="914400"/>
-          </a:xfrm>
-          <a:prstGeom prst="rect">
-            <a:avLst/>
-          </a:prstGeom>
-          <a:noFill/>
-          <a:ln/>
-        </p:spPr>
-        <p:txBody>
-          <a:bodyPr wrap="square" lIns="0" tIns="0" rIns="0" bIns="0" rtlCol="0" anchor="ctr"/>
+              <a:lnSpc>
+                <a:spcPct val="115000"/>
+              </a:lnSpc>
+              <a:buNone/>
+            </a:pPr>
+            <a:r>
+              <a:rPr lang="en-US" sz="1150" i="1" dirty="0">
+                <a:solidFill>
+                  <a:srgbClr val="23283A"/>
+                </a:solidFill>
+                <a:latin typeface="Arial" pitchFamily="34" charset="0"/>
+                <a:ea typeface="Arial" pitchFamily="34" charset="-122"/>
+                <a:cs typeface="Arial" pitchFamily="34" charset="-120"/>
+              </a:rPr>
+              <a:t>"Ini data 3 kompetitor frozen food saya [paste isi cm-template-kompetitor.txt]. Buatkan: SWOT singkat, gap yang belum diisi kompetitor manapun, dan 1 kalimat positioning: Untuk [siapa], [bisnis] adalah [apa] yang [benefit] karena [bukti]."</a:t>
+            </a:r>
+            <a:endParaRPr lang="en-US" sz="1150" dirty="0"/>
+          </a:p>
+        </p:txBody>
+      </p:sp>
+      <p:sp>
+        <p:nvSpPr>
+          <p:cNvPr id="15" name="Text 13"/>
+          <p:cNvSpPr/>
+          <p:nvPr/>
+        </p:nvSpPr>
+        <p:spPr>
+          <a:xfrm>
+            <a:off x="6428232" y="4873752"/>
+            <a:ext cx="5010912" cy="457200"/>
+          </a:xfrm>
+          <a:prstGeom prst="rect">
+            <a:avLst/>
+          </a:prstGeom>
+          <a:noFill/>
+          <a:ln/>
+        </p:spPr>
+        <p:txBody>
+          <a:bodyPr wrap="square" lIns="0" tIns="0" rIns="0" bIns="0" rtlCol="0" anchor="t"/>
           <a:lstStyle/>
           <a:p>
             <a:pPr indent="0" marL="0">
-              <a:buNone/>
-            </a:pPr>
-            <a:r>
-              <a:rPr lang="en-US" sz="1250" b="1" dirty="0">
-                <a:solidFill>
-                  <a:srgbClr val="6B6B6B"/>
-                </a:solidFill>
-                <a:latin typeface="Calibri" pitchFamily="34" charset="0"/>
-                <a:ea typeface="Calibri" pitchFamily="34" charset="-122"/>
-                <a:cs typeface="Calibri" pitchFamily="34" charset="-120"/>
-              </a:rPr>
-              <a:t>Kenapa berhasil: </a:t>
-            </a:r>
-            <a:pPr indent="0" marL="0">
-              <a:buNone/>
-            </a:pPr>
-            <a:r>
-              <a:rPr lang="en-US" sz="1250" dirty="0">
-                <a:solidFill>
-                  <a:srgbClr val="6B6B6B"/>
-                </a:solidFill>
-                <a:latin typeface="Calibri" pitchFamily="34" charset="0"/>
-                <a:ea typeface="Calibri" pitchFamily="34" charset="-122"/>
-                <a:cs typeface="Calibri" pitchFamily="34" charset="-120"/>
-              </a:rPr>
-              <a:t>data lengkap + format jelas = positioning siap pakai dalam 1 respons.</a:t>
-            </a:r>
-            <a:endParaRPr lang="en-US" sz="1250" dirty="0"/>
+              <a:lnSpc>
+                <a:spcPct val="110000"/>
+              </a:lnSpc>
+              <a:buNone/>
+            </a:pPr>
+            <a:r>
+              <a:rPr lang="en-US" sz="1050" dirty="0">
+                <a:solidFill>
+                  <a:srgbClr val="6B7280"/>
+                </a:solidFill>
+                <a:latin typeface="Arial" pitchFamily="34" charset="0"/>
+                <a:ea typeface="Arial" pitchFamily="34" charset="-122"/>
+                <a:cs typeface="Arial" pitchFamily="34" charset="-120"/>
+              </a:rPr>
+              <a:t>Kenapa berhasil: data lengkap + format jelas = positioning siap pakai dalam 1 respons.</a:t>
+            </a:r>
+            <a:endParaRPr lang="en-US" sz="1050" dirty="0"/>
           </a:p>
         </p:txBody>
       </p:sp>
@@ -2579,53 +3035,107 @@
       </p:grpSpPr>
       <p:sp>
         <p:nvSpPr>
-          <p:cNvPr id="2" name="Text 0"/>
-          <p:cNvSpPr/>
-          <p:nvPr/>
-        </p:nvSpPr>
-        <p:spPr>
-          <a:xfrm>
-            <a:off x="457200" y="320040"/>
-            <a:ext cx="11247120" cy="320040"/>
-          </a:xfrm>
-          <a:prstGeom prst="rect">
-            <a:avLst/>
-          </a:prstGeom>
-          <a:noFill/>
-          <a:ln/>
-        </p:spPr>
-        <p:txBody>
-          <a:bodyPr wrap="square" rtlCol="0" anchor="ctr"/>
+          <p:cNvPr id="2" name="Shape 0"/>
+          <p:cNvSpPr/>
+          <p:nvPr/>
+        </p:nvSpPr>
+        <p:spPr>
+          <a:xfrm>
+            <a:off x="0" y="0"/>
+            <a:ext cx="12191695" cy="960120"/>
+          </a:xfrm>
+          <a:prstGeom prst="rect">
+            <a:avLst/>
+          </a:prstGeom>
+          <a:solidFill>
+            <a:srgbClr val="0D1321"/>
+          </a:solidFill>
+          <a:ln/>
+        </p:spPr>
+      </p:sp>
+      <p:sp>
+        <p:nvSpPr>
+          <p:cNvPr id="3" name="Shape 1"/>
+          <p:cNvSpPr/>
+          <p:nvPr/>
+        </p:nvSpPr>
+        <p:spPr>
+          <a:xfrm>
+            <a:off x="0" y="960120"/>
+            <a:ext cx="12191695" cy="41148"/>
+          </a:xfrm>
+          <a:prstGeom prst="rect">
+            <a:avLst/>
+          </a:prstGeom>
+          <a:solidFill>
+            <a:srgbClr val="6849F6"/>
+          </a:solidFill>
+          <a:ln/>
+        </p:spPr>
+      </p:sp>
+      <p:sp>
+        <p:nvSpPr>
+          <p:cNvPr id="4" name="Text 2"/>
+          <p:cNvSpPr/>
+          <p:nvPr/>
+        </p:nvSpPr>
+        <p:spPr>
+          <a:xfrm>
+            <a:off x="548640" y="256032"/>
+            <a:ext cx="3657600" cy="457200"/>
+          </a:xfrm>
+          <a:prstGeom prst="rect">
+            <a:avLst/>
+          </a:prstGeom>
+          <a:noFill/>
+          <a:ln/>
+        </p:spPr>
+        <p:txBody>
+          <a:bodyPr wrap="square" lIns="0" tIns="0" rIns="0" bIns="0" rtlCol="0" anchor="ctr"/>
           <a:lstStyle/>
           <a:p>
             <a:pPr indent="0" marL="0">
               <a:buNone/>
             </a:pPr>
             <a:r>
-              <a:rPr lang="en-US" sz="1200" b="1" spc="100" kern="0" dirty="0">
-                <a:solidFill>
-                  <a:srgbClr val="A8452F"/>
-                </a:solidFill>
-                <a:latin typeface="Calibri" pitchFamily="34" charset="0"/>
-                <a:ea typeface="Calibri" pitchFamily="34" charset="-122"/>
-                <a:cs typeface="Calibri" pitchFamily="34" charset="-120"/>
-              </a:rPr>
-              <a:t>MODUL 01 — LATIHAN</a:t>
-            </a:r>
-            <a:endParaRPr lang="en-US" sz="1200" dirty="0"/>
-          </a:p>
-        </p:txBody>
-      </p:sp>
-      <p:sp>
-        <p:nvSpPr>
-          <p:cNvPr id="3" name="Text 1"/>
-          <p:cNvSpPr/>
-          <p:nvPr/>
-        </p:nvSpPr>
-        <p:spPr>
-          <a:xfrm>
-            <a:off x="457200" y="685800"/>
-            <a:ext cx="10515600" cy="640080"/>
+              <a:rPr lang="en-US" sz="2000" b="1" dirty="0">
+                <a:solidFill>
+                  <a:srgbClr val="FFFFFF"/>
+                </a:solidFill>
+                <a:latin typeface="Arial" pitchFamily="34" charset="0"/>
+                <a:ea typeface="Arial" pitchFamily="34" charset="-122"/>
+                <a:cs typeface="Arial" pitchFamily="34" charset="-120"/>
+              </a:rPr>
+              <a:t>belajar</a:t>
+            </a:r>
+            <a:pPr indent="0" marL="0">
+              <a:buNone/>
+            </a:pPr>
+            <a:r>
+              <a:rPr lang="en-US" sz="2000" b="1" dirty="0">
+                <a:solidFill>
+                  <a:srgbClr val="8B7CF6"/>
+                </a:solidFill>
+                <a:latin typeface="Arial" pitchFamily="34" charset="0"/>
+                <a:ea typeface="Arial" pitchFamily="34" charset="-122"/>
+                <a:cs typeface="Arial" pitchFamily="34" charset="-120"/>
+              </a:rPr>
+              <a:t>claude</a:t>
+            </a:r>
+            <a:endParaRPr lang="en-US" sz="2000" dirty="0"/>
+          </a:p>
+        </p:txBody>
+      </p:sp>
+      <p:sp>
+        <p:nvSpPr>
+          <p:cNvPr id="5" name="Text 3"/>
+          <p:cNvSpPr/>
+          <p:nvPr/>
+        </p:nvSpPr>
+        <p:spPr>
+          <a:xfrm>
+            <a:off x="5943600" y="274320"/>
+            <a:ext cx="5696712" cy="411480"/>
           </a:xfrm>
           <a:prstGeom prst="rect">
             <a:avLst/>
@@ -2637,54 +3147,132 @@
           <a:bodyPr wrap="square" lIns="0" tIns="0" rIns="0" bIns="0" rtlCol="0" anchor="ctr"/>
           <a:lstStyle/>
           <a:p>
+            <a:pPr algn="r" indent="0" marL="0">
+              <a:buNone/>
+            </a:pPr>
+            <a:r>
+              <a:rPr lang="en-US" sz="1250" dirty="0">
+                <a:solidFill>
+                  <a:srgbClr val="9AA2B4"/>
+                </a:solidFill>
+                <a:latin typeface="Arial" pitchFamily="34" charset="0"/>
+                <a:ea typeface="Arial" pitchFamily="34" charset="-122"/>
+                <a:cs typeface="Arial" pitchFamily="34" charset="-120"/>
+              </a:rPr>
+              <a:t>Modul 01 — Positioning &amp; Analisis Kompetitor</a:t>
+            </a:r>
+            <a:endParaRPr lang="en-US" sz="1250" dirty="0"/>
+          </a:p>
+        </p:txBody>
+      </p:sp>
+      <p:sp>
+        <p:nvSpPr>
+          <p:cNvPr id="6" name="Text 4"/>
+          <p:cNvSpPr/>
+          <p:nvPr/>
+        </p:nvSpPr>
+        <p:spPr>
+          <a:xfrm>
+            <a:off x="548640" y="1170432"/>
+            <a:ext cx="11091672" cy="274320"/>
+          </a:xfrm>
+          <a:prstGeom prst="rect">
+            <a:avLst/>
+          </a:prstGeom>
+          <a:noFill/>
+          <a:ln/>
+        </p:spPr>
+        <p:txBody>
+          <a:bodyPr wrap="square" lIns="0" tIns="0" rIns="0" bIns="0" rtlCol="0" anchor="ctr"/>
+          <a:lstStyle/>
+          <a:p>
             <a:pPr indent="0" marL="0">
               <a:buNone/>
             </a:pPr>
             <a:r>
-              <a:rPr lang="en-US" sz="2700" b="1" dirty="0">
-                <a:solidFill>
-                  <a:srgbClr val="231A14"/>
-                </a:solidFill>
-                <a:latin typeface="Cambria" pitchFamily="34" charset="0"/>
-                <a:ea typeface="Cambria" pitchFamily="34" charset="-122"/>
-                <a:cs typeface="Cambria" pitchFamily="34" charset="-120"/>
-              </a:rPr>
-              <a:t>Latihan: Analisis Kompetitor &amp; Positioning</a:t>
-            </a:r>
-            <a:endParaRPr lang="en-US" sz="2700" dirty="0"/>
-          </a:p>
-        </p:txBody>
-      </p:sp>
-      <p:sp>
-        <p:nvSpPr>
-          <p:cNvPr id="4" name="Shape 2"/>
-          <p:cNvSpPr/>
-          <p:nvPr/>
-        </p:nvSpPr>
-        <p:spPr>
-          <a:xfrm>
-            <a:off x="457200" y="1508760"/>
-            <a:ext cx="384048" cy="384048"/>
+              <a:rPr lang="en-US" sz="1250" b="1" spc="100" kern="0" dirty="0">
+                <a:solidFill>
+                  <a:srgbClr val="4B36C7"/>
+                </a:solidFill>
+                <a:latin typeface="Arial" pitchFamily="34" charset="0"/>
+                <a:ea typeface="Arial" pitchFamily="34" charset="-122"/>
+                <a:cs typeface="Arial" pitchFamily="34" charset="-120"/>
+              </a:rPr>
+              <a:t>DARI DATA KOMPETITOR KE POSITIONING SIAP PAKAI</a:t>
+            </a:r>
+            <a:endParaRPr lang="en-US" sz="1250" dirty="0"/>
+          </a:p>
+        </p:txBody>
+      </p:sp>
+      <p:sp>
+        <p:nvSpPr>
+          <p:cNvPr id="7" name="Text 5"/>
+          <p:cNvSpPr/>
+          <p:nvPr/>
+        </p:nvSpPr>
+        <p:spPr>
+          <a:xfrm>
+            <a:off x="548640" y="1444752"/>
+            <a:ext cx="11091672" cy="548640"/>
+          </a:xfrm>
+          <a:prstGeom prst="rect">
+            <a:avLst/>
+          </a:prstGeom>
+          <a:noFill/>
+          <a:ln/>
+        </p:spPr>
+        <p:txBody>
+          <a:bodyPr wrap="square" lIns="0" tIns="0" rIns="0" bIns="0" rtlCol="0" anchor="ctr"/>
+          <a:lstStyle/>
+          <a:p>
+            <a:pPr indent="0" marL="0">
+              <a:buNone/>
+            </a:pPr>
+            <a:r>
+              <a:rPr lang="en-US" sz="2600" b="1" dirty="0">
+                <a:solidFill>
+                  <a:srgbClr val="0D1321"/>
+                </a:solidFill>
+                <a:latin typeface="Arial" pitchFamily="34" charset="0"/>
+                <a:ea typeface="Arial" pitchFamily="34" charset="-122"/>
+                <a:cs typeface="Arial" pitchFamily="34" charset="-120"/>
+              </a:rPr>
+              <a:t>Cara Kerja: 5 Langkah</a:t>
+            </a:r>
+            <a:endParaRPr lang="en-US" sz="2600" dirty="0"/>
+          </a:p>
+        </p:txBody>
+      </p:sp>
+      <p:sp>
+        <p:nvSpPr>
+          <p:cNvPr id="8" name="Shape 6"/>
+          <p:cNvSpPr/>
+          <p:nvPr/>
+        </p:nvSpPr>
+        <p:spPr>
+          <a:xfrm>
+            <a:off x="548640" y="2212848"/>
+            <a:ext cx="329184" cy="329184"/>
           </a:xfrm>
           <a:prstGeom prst="ellipse">
             <a:avLst/>
           </a:prstGeom>
           <a:solidFill>
-            <a:srgbClr val="A8452F"/>
-          </a:solidFill>
-          <a:ln/>
-        </p:spPr>
-      </p:sp>
-      <p:sp>
-        <p:nvSpPr>
-          <p:cNvPr id="5" name="Text 3"/>
-          <p:cNvSpPr/>
-          <p:nvPr/>
-        </p:nvSpPr>
-        <p:spPr>
-          <a:xfrm>
-            <a:off x="457200" y="1508760"/>
-            <a:ext cx="384048" cy="384048"/>
+            <a:srgbClr val="6849F6"/>
+          </a:solidFill>
+          <a:ln/>
+        </p:spPr>
+      </p:sp>
+      <p:sp>
+        <p:nvSpPr>
+          <p:cNvPr id="9" name="Text 7"/>
+          <p:cNvSpPr/>
+          <p:nvPr/>
+        </p:nvSpPr>
+        <p:spPr>
+          <a:xfrm>
+            <a:off x="548640" y="2212848"/>
+            <a:ext cx="329184" cy="329184"/>
           </a:xfrm>
           <a:prstGeom prst="rect">
             <a:avLst/>
@@ -2700,30 +3288,109 @@
               <a:buNone/>
             </a:pPr>
             <a:r>
-              <a:rPr lang="en-US" sz="1400" b="1" dirty="0">
+              <a:rPr lang="en-US" sz="1300" b="1" dirty="0">
                 <a:solidFill>
                   <a:srgbClr val="FFFFFF"/>
                 </a:solidFill>
-                <a:latin typeface="Calibri" pitchFamily="34" charset="0"/>
-                <a:ea typeface="Calibri" pitchFamily="34" charset="-122"/>
-                <a:cs typeface="Calibri" pitchFamily="34" charset="-120"/>
+                <a:latin typeface="Arial" pitchFamily="34" charset="0"/>
+                <a:ea typeface="Arial" pitchFamily="34" charset="-122"/>
+                <a:cs typeface="Arial" pitchFamily="34" charset="-120"/>
               </a:rPr>
               <a:t>1</a:t>
             </a:r>
-            <a:endParaRPr lang="en-US" sz="1400" dirty="0"/>
-          </a:p>
-        </p:txBody>
-      </p:sp>
-      <p:sp>
-        <p:nvSpPr>
-          <p:cNvPr id="6" name="Text 4"/>
-          <p:cNvSpPr/>
-          <p:nvPr/>
-        </p:nvSpPr>
-        <p:spPr>
-          <a:xfrm>
-            <a:off x="1005840" y="1453896"/>
-            <a:ext cx="9875520" cy="365760"/>
+            <a:endParaRPr lang="en-US" sz="1300" dirty="0"/>
+          </a:p>
+        </p:txBody>
+      </p:sp>
+      <p:sp>
+        <p:nvSpPr>
+          <p:cNvPr id="10" name="Text 8"/>
+          <p:cNvSpPr/>
+          <p:nvPr/>
+        </p:nvSpPr>
+        <p:spPr>
+          <a:xfrm>
+            <a:off x="1024128" y="2185416"/>
+            <a:ext cx="10616184" cy="457200"/>
+          </a:xfrm>
+          <a:prstGeom prst="rect">
+            <a:avLst/>
+          </a:prstGeom>
+          <a:noFill/>
+          <a:ln/>
+        </p:spPr>
+        <p:txBody>
+          <a:bodyPr wrap="square" lIns="0" tIns="0" rIns="0" bIns="0" rtlCol="0" anchor="t"/>
+          <a:lstStyle/>
+          <a:p>
+            <a:pPr indent="0" marL="0">
+              <a:lnSpc>
+                <a:spcPct val="112000"/>
+              </a:lnSpc>
+              <a:buNone/>
+            </a:pPr>
+            <a:r>
+              <a:rPr lang="en-US" sz="1300" b="1" dirty="0">
+                <a:solidFill>
+                  <a:srgbClr val="0D1321"/>
+                </a:solidFill>
+                <a:latin typeface="Arial" pitchFamily="34" charset="0"/>
+                <a:ea typeface="Arial" pitchFamily="34" charset="-122"/>
+                <a:cs typeface="Arial" pitchFamily="34" charset="-120"/>
+              </a:rPr>
+              <a:t>Isi Data Kompetitor —  </a:t>
+            </a:r>
+            <a:pPr indent="0" marL="0">
+              <a:lnSpc>
+                <a:spcPct val="112000"/>
+              </a:lnSpc>
+              <a:buNone/>
+            </a:pPr>
+            <a:r>
+              <a:rPr lang="en-US" sz="1250" dirty="0">
+                <a:solidFill>
+                  <a:srgbClr val="23283A"/>
+                </a:solidFill>
+                <a:latin typeface="Arial" pitchFamily="34" charset="0"/>
+                <a:ea typeface="Arial" pitchFamily="34" charset="-122"/>
+                <a:cs typeface="Arial" pitchFamily="34" charset="-120"/>
+              </a:rPr>
+              <a:t>cm-template-kompetitor.txt dengan harga, rating, dan 10 ulasan paling buruk 3 kompetitor</a:t>
+            </a:r>
+            <a:endParaRPr lang="en-US" sz="1300" dirty="0"/>
+          </a:p>
+        </p:txBody>
+      </p:sp>
+      <p:sp>
+        <p:nvSpPr>
+          <p:cNvPr id="11" name="Shape 9"/>
+          <p:cNvSpPr/>
+          <p:nvPr/>
+        </p:nvSpPr>
+        <p:spPr>
+          <a:xfrm>
+            <a:off x="548640" y="2743200"/>
+            <a:ext cx="329184" cy="329184"/>
+          </a:xfrm>
+          <a:prstGeom prst="ellipse">
+            <a:avLst/>
+          </a:prstGeom>
+          <a:solidFill>
+            <a:srgbClr val="6849F6"/>
+          </a:solidFill>
+          <a:ln/>
+        </p:spPr>
+      </p:sp>
+      <p:sp>
+        <p:nvSpPr>
+          <p:cNvPr id="12" name="Text 10"/>
+          <p:cNvSpPr/>
+          <p:nvPr/>
+        </p:nvSpPr>
+        <p:spPr>
+          <a:xfrm>
+            <a:off x="548640" y="2743200"/>
+            <a:ext cx="329184" cy="329184"/>
           </a:xfrm>
           <a:prstGeom prst="rect">
             <a:avLst/>
@@ -2735,34 +3402,152 @@
           <a:bodyPr wrap="square" lIns="0" tIns="0" rIns="0" bIns="0" rtlCol="0" anchor="ctr"/>
           <a:lstStyle/>
           <a:p>
+            <a:pPr algn="ctr" indent="0" marL="0">
+              <a:buNone/>
+            </a:pPr>
+            <a:r>
+              <a:rPr lang="en-US" sz="1300" b="1" dirty="0">
+                <a:solidFill>
+                  <a:srgbClr val="FFFFFF"/>
+                </a:solidFill>
+                <a:latin typeface="Arial" pitchFamily="34" charset="0"/>
+                <a:ea typeface="Arial" pitchFamily="34" charset="-122"/>
+                <a:cs typeface="Arial" pitchFamily="34" charset="-120"/>
+              </a:rPr>
+              <a:t>2</a:t>
+            </a:r>
+            <a:endParaRPr lang="en-US" sz="1300" dirty="0"/>
+          </a:p>
+        </p:txBody>
+      </p:sp>
+      <p:sp>
+        <p:nvSpPr>
+          <p:cNvPr id="13" name="Text 11"/>
+          <p:cNvSpPr/>
+          <p:nvPr/>
+        </p:nvSpPr>
+        <p:spPr>
+          <a:xfrm>
+            <a:off x="1024128" y="2715768"/>
+            <a:ext cx="10616184" cy="457200"/>
+          </a:xfrm>
+          <a:prstGeom prst="rect">
+            <a:avLst/>
+          </a:prstGeom>
+          <a:noFill/>
+          <a:ln/>
+        </p:spPr>
+        <p:txBody>
+          <a:bodyPr wrap="square" lIns="0" tIns="0" rIns="0" bIns="0" rtlCol="0" anchor="t"/>
+          <a:lstStyle/>
+          <a:p>
             <a:pPr indent="0" marL="0">
-              <a:buNone/>
-            </a:pPr>
-            <a:r>
-              <a:rPr lang="en-US" sz="1450" b="1" dirty="0">
-                <a:solidFill>
-                  <a:srgbClr val="231A14"/>
-                </a:solidFill>
-                <a:latin typeface="Calibri" pitchFamily="34" charset="0"/>
-                <a:ea typeface="Calibri" pitchFamily="34" charset="-122"/>
-                <a:cs typeface="Calibri" pitchFamily="34" charset="-120"/>
-              </a:rPr>
-              <a:t>Isi data kompetitor</a:t>
-            </a:r>
-            <a:endParaRPr lang="en-US" sz="1450" dirty="0"/>
-          </a:p>
-        </p:txBody>
-      </p:sp>
-      <p:sp>
-        <p:nvSpPr>
-          <p:cNvPr id="7" name="Text 5"/>
-          <p:cNvSpPr/>
-          <p:nvPr/>
-        </p:nvSpPr>
-        <p:spPr>
-          <a:xfrm>
-            <a:off x="1005840" y="1801368"/>
-            <a:ext cx="9875520" cy="594360"/>
+              <a:lnSpc>
+                <a:spcPct val="112000"/>
+              </a:lnSpc>
+              <a:buNone/>
+            </a:pPr>
+            <a:r>
+              <a:rPr lang="en-US" sz="1300" b="1" dirty="0">
+                <a:solidFill>
+                  <a:srgbClr val="0D1321"/>
+                </a:solidFill>
+                <a:latin typeface="Arial" pitchFamily="34" charset="0"/>
+                <a:ea typeface="Arial" pitchFamily="34" charset="-122"/>
+                <a:cs typeface="Arial" pitchFamily="34" charset="-120"/>
+              </a:rPr>
+              <a:t>Isi Data Bisnismu —  </a:t>
+            </a:r>
+            <a:pPr indent="0" marL="0">
+              <a:lnSpc>
+                <a:spcPct val="112000"/>
+              </a:lnSpc>
+              <a:buNone/>
+            </a:pPr>
+            <a:r>
+              <a:rPr lang="en-US" sz="1250" dirty="0">
+                <a:solidFill>
+                  <a:srgbClr val="23283A"/>
+                </a:solidFill>
+                <a:latin typeface="Arial" pitchFamily="34" charset="0"/>
+                <a:ea typeface="Arial" pitchFamily="34" charset="-122"/>
+                <a:cs typeface="Arial" pitchFamily="34" charset="-120"/>
+              </a:rPr>
+              <a:t>tanya 3 pelanggan lama kenapa mereka beli, termasuk palet warna &amp; mood visual</a:t>
+            </a:r>
+            <a:endParaRPr lang="en-US" sz="1300" dirty="0"/>
+          </a:p>
+        </p:txBody>
+      </p:sp>
+      <p:sp>
+        <p:nvSpPr>
+          <p:cNvPr id="14" name="Shape 12"/>
+          <p:cNvSpPr/>
+          <p:nvPr/>
+        </p:nvSpPr>
+        <p:spPr>
+          <a:xfrm>
+            <a:off x="548640" y="3273552"/>
+            <a:ext cx="329184" cy="329184"/>
+          </a:xfrm>
+          <a:prstGeom prst="ellipse">
+            <a:avLst/>
+          </a:prstGeom>
+          <a:solidFill>
+            <a:srgbClr val="6849F6"/>
+          </a:solidFill>
+          <a:ln/>
+        </p:spPr>
+      </p:sp>
+      <p:sp>
+        <p:nvSpPr>
+          <p:cNvPr id="15" name="Text 13"/>
+          <p:cNvSpPr/>
+          <p:nvPr/>
+        </p:nvSpPr>
+        <p:spPr>
+          <a:xfrm>
+            <a:off x="548640" y="3273552"/>
+            <a:ext cx="329184" cy="329184"/>
+          </a:xfrm>
+          <a:prstGeom prst="rect">
+            <a:avLst/>
+          </a:prstGeom>
+          <a:noFill/>
+          <a:ln/>
+        </p:spPr>
+        <p:txBody>
+          <a:bodyPr wrap="square" lIns="0" tIns="0" rIns="0" bIns="0" rtlCol="0" anchor="ctr"/>
+          <a:lstStyle/>
+          <a:p>
+            <a:pPr algn="ctr" indent="0" marL="0">
+              <a:buNone/>
+            </a:pPr>
+            <a:r>
+              <a:rPr lang="en-US" sz="1300" b="1" dirty="0">
+                <a:solidFill>
+                  <a:srgbClr val="FFFFFF"/>
+                </a:solidFill>
+                <a:latin typeface="Arial" pitchFamily="34" charset="0"/>
+                <a:ea typeface="Arial" pitchFamily="34" charset="-122"/>
+                <a:cs typeface="Arial" pitchFamily="34" charset="-120"/>
+              </a:rPr>
+              <a:t>3</a:t>
+            </a:r>
+            <a:endParaRPr lang="en-US" sz="1300" dirty="0"/>
+          </a:p>
+        </p:txBody>
+      </p:sp>
+      <p:sp>
+        <p:nvSpPr>
+          <p:cNvPr id="16" name="Text 14"/>
+          <p:cNvSpPr/>
+          <p:nvPr/>
+        </p:nvSpPr>
+        <p:spPr>
+          <a:xfrm>
+            <a:off x="1024128" y="3246120"/>
+            <a:ext cx="10616184" cy="457200"/>
           </a:xfrm>
           <a:prstGeom prst="rect">
             <a:avLst/>
@@ -2775,53 +3560,73 @@
           <a:lstStyle/>
           <a:p>
             <a:pPr indent="0" marL="0">
-              <a:buNone/>
-            </a:pPr>
-            <a:r>
-              <a:rPr lang="en-US" sz="1200" dirty="0">
-                <a:solidFill>
-                  <a:srgbClr val="6B6B6B"/>
-                </a:solidFill>
-                <a:latin typeface="Calibri" pitchFamily="34" charset="0"/>
-                <a:ea typeface="Calibri" pitchFamily="34" charset="-122"/>
-                <a:cs typeface="Calibri" pitchFamily="34" charset="-120"/>
-              </a:rPr>
-              <a:t>Isi cm-template-kompetitor.txt dengan data 3 kompetitor nyata — harga, rating, dan ulasan negatif mereka. Contoh: Dapur Rara menemukan tidak ada kompetitor yang menyasar keluarga muda dengan masakan daerah otentik — dari situ lahir positioning barunya.</a:t>
-            </a:r>
-            <a:endParaRPr lang="en-US" sz="1200" dirty="0"/>
-          </a:p>
-        </p:txBody>
-      </p:sp>
-      <p:sp>
-        <p:nvSpPr>
-          <p:cNvPr id="8" name="Shape 6"/>
-          <p:cNvSpPr/>
-          <p:nvPr/>
-        </p:nvSpPr>
-        <p:spPr>
-          <a:xfrm>
-            <a:off x="457200" y="2468880"/>
-            <a:ext cx="384048" cy="384048"/>
+              <a:lnSpc>
+                <a:spcPct val="112000"/>
+              </a:lnSpc>
+              <a:buNone/>
+            </a:pPr>
+            <a:r>
+              <a:rPr lang="en-US" sz="1300" b="1" dirty="0">
+                <a:solidFill>
+                  <a:srgbClr val="0D1321"/>
+                </a:solidFill>
+                <a:latin typeface="Arial" pitchFamily="34" charset="0"/>
+                <a:ea typeface="Arial" pitchFamily="34" charset="-122"/>
+                <a:cs typeface="Arial" pitchFamily="34" charset="-120"/>
+              </a:rPr>
+              <a:t>Generate ke Claude —  </a:t>
+            </a:r>
+            <a:pPr indent="0" marL="0">
+              <a:lnSpc>
+                <a:spcPct val="112000"/>
+              </a:lnSpc>
+              <a:buNone/>
+            </a:pPr>
+            <a:r>
+              <a:rPr lang="en-US" sz="1250" dirty="0">
+                <a:solidFill>
+                  <a:srgbClr val="23283A"/>
+                </a:solidFill>
+                <a:latin typeface="Arial" pitchFamily="34" charset="0"/>
+                <a:ea typeface="Arial" pitchFamily="34" charset="-122"/>
+                <a:cs typeface="Arial" pitchFamily="34" charset="-120"/>
+              </a:rPr>
+              <a:t>paste seluruh template ke Claude dengan prompt di atas</a:t>
+            </a:r>
+            <a:endParaRPr lang="en-US" sz="1300" dirty="0"/>
+          </a:p>
+        </p:txBody>
+      </p:sp>
+      <p:sp>
+        <p:nvSpPr>
+          <p:cNvPr id="17" name="Shape 15"/>
+          <p:cNvSpPr/>
+          <p:nvPr/>
+        </p:nvSpPr>
+        <p:spPr>
+          <a:xfrm>
+            <a:off x="548640" y="3803904"/>
+            <a:ext cx="329184" cy="329184"/>
           </a:xfrm>
           <a:prstGeom prst="ellipse">
             <a:avLst/>
           </a:prstGeom>
           <a:solidFill>
-            <a:srgbClr val="A8452F"/>
-          </a:solidFill>
-          <a:ln/>
-        </p:spPr>
-      </p:sp>
-      <p:sp>
-        <p:nvSpPr>
-          <p:cNvPr id="9" name="Text 7"/>
-          <p:cNvSpPr/>
-          <p:nvPr/>
-        </p:nvSpPr>
-        <p:spPr>
-          <a:xfrm>
-            <a:off x="457200" y="2468880"/>
-            <a:ext cx="384048" cy="384048"/>
+            <a:srgbClr val="6849F6"/>
+          </a:solidFill>
+          <a:ln/>
+        </p:spPr>
+      </p:sp>
+      <p:sp>
+        <p:nvSpPr>
+          <p:cNvPr id="18" name="Text 16"/>
+          <p:cNvSpPr/>
+          <p:nvPr/>
+        </p:nvSpPr>
+        <p:spPr>
+          <a:xfrm>
+            <a:off x="548640" y="3803904"/>
+            <a:ext cx="329184" cy="329184"/>
           </a:xfrm>
           <a:prstGeom prst="rect">
             <a:avLst/>
@@ -2837,30 +3642,109 @@
               <a:buNone/>
             </a:pPr>
             <a:r>
-              <a:rPr lang="en-US" sz="1400" b="1" dirty="0">
+              <a:rPr lang="en-US" sz="1300" b="1" dirty="0">
                 <a:solidFill>
                   <a:srgbClr val="FFFFFF"/>
                 </a:solidFill>
-                <a:latin typeface="Calibri" pitchFamily="34" charset="0"/>
-                <a:ea typeface="Calibri" pitchFamily="34" charset="-122"/>
-                <a:cs typeface="Calibri" pitchFamily="34" charset="-120"/>
-              </a:rPr>
-              <a:t>2</a:t>
-            </a:r>
-            <a:endParaRPr lang="en-US" sz="1400" dirty="0"/>
-          </a:p>
-        </p:txBody>
-      </p:sp>
-      <p:sp>
-        <p:nvSpPr>
-          <p:cNvPr id="10" name="Text 8"/>
-          <p:cNvSpPr/>
-          <p:nvPr/>
-        </p:nvSpPr>
-        <p:spPr>
-          <a:xfrm>
-            <a:off x="1005840" y="2414016"/>
-            <a:ext cx="9875520" cy="365760"/>
+                <a:latin typeface="Arial" pitchFamily="34" charset="0"/>
+                <a:ea typeface="Arial" pitchFamily="34" charset="-122"/>
+                <a:cs typeface="Arial" pitchFamily="34" charset="-120"/>
+              </a:rPr>
+              <a:t>4</a:t>
+            </a:r>
+            <a:endParaRPr lang="en-US" sz="1300" dirty="0"/>
+          </a:p>
+        </p:txBody>
+      </p:sp>
+      <p:sp>
+        <p:nvSpPr>
+          <p:cNvPr id="19" name="Text 17"/>
+          <p:cNvSpPr/>
+          <p:nvPr/>
+        </p:nvSpPr>
+        <p:spPr>
+          <a:xfrm>
+            <a:off x="1024128" y="3776472"/>
+            <a:ext cx="10616184" cy="457200"/>
+          </a:xfrm>
+          <a:prstGeom prst="rect">
+            <a:avLst/>
+          </a:prstGeom>
+          <a:noFill/>
+          <a:ln/>
+        </p:spPr>
+        <p:txBody>
+          <a:bodyPr wrap="square" lIns="0" tIns="0" rIns="0" bIns="0" rtlCol="0" anchor="t"/>
+          <a:lstStyle/>
+          <a:p>
+            <a:pPr indent="0" marL="0">
+              <a:lnSpc>
+                <a:spcPct val="112000"/>
+              </a:lnSpc>
+              <a:buNone/>
+            </a:pPr>
+            <a:r>
+              <a:rPr lang="en-US" sz="1300" b="1" dirty="0">
+                <a:solidFill>
+                  <a:srgbClr val="0D1321"/>
+                </a:solidFill>
+                <a:latin typeface="Arial" pitchFamily="34" charset="0"/>
+                <a:ea typeface="Arial" pitchFamily="34" charset="-122"/>
+                <a:cs typeface="Arial" pitchFamily="34" charset="-120"/>
+              </a:rPr>
+              <a:t>Pilih 3 Variasi Tone —  </a:t>
+            </a:r>
+            <a:pPr indent="0" marL="0">
+              <a:lnSpc>
+                <a:spcPct val="112000"/>
+              </a:lnSpc>
+              <a:buNone/>
+            </a:pPr>
+            <a:r>
+              <a:rPr lang="en-US" sz="1250" dirty="0">
+                <a:solidFill>
+                  <a:srgbClr val="23283A"/>
+                </a:solidFill>
+                <a:latin typeface="Arial" pitchFamily="34" charset="0"/>
+                <a:ea typeface="Arial" pitchFamily="34" charset="-122"/>
+                <a:cs typeface="Arial" pitchFamily="34" charset="-120"/>
+              </a:rPr>
+              <a:t>minta versi formal, santai untuk caption, dan emosional untuk iklan</a:t>
+            </a:r>
+            <a:endParaRPr lang="en-US" sz="1300" dirty="0"/>
+          </a:p>
+        </p:txBody>
+      </p:sp>
+      <p:sp>
+        <p:nvSpPr>
+          <p:cNvPr id="20" name="Shape 18"/>
+          <p:cNvSpPr/>
+          <p:nvPr/>
+        </p:nvSpPr>
+        <p:spPr>
+          <a:xfrm>
+            <a:off x="548640" y="4334256"/>
+            <a:ext cx="329184" cy="329184"/>
+          </a:xfrm>
+          <a:prstGeom prst="ellipse">
+            <a:avLst/>
+          </a:prstGeom>
+          <a:solidFill>
+            <a:srgbClr val="6849F6"/>
+          </a:solidFill>
+          <a:ln/>
+        </p:spPr>
+      </p:sp>
+      <p:sp>
+        <p:nvSpPr>
+          <p:cNvPr id="21" name="Text 19"/>
+          <p:cNvSpPr/>
+          <p:nvPr/>
+        </p:nvSpPr>
+        <p:spPr>
+          <a:xfrm>
+            <a:off x="548640" y="4334256"/>
+            <a:ext cx="329184" cy="329184"/>
           </a:xfrm>
           <a:prstGeom prst="rect">
             <a:avLst/>
@@ -2872,271 +3756,595 @@
           <a:bodyPr wrap="square" lIns="0" tIns="0" rIns="0" bIns="0" rtlCol="0" anchor="ctr"/>
           <a:lstStyle/>
           <a:p>
+            <a:pPr algn="ctr" indent="0" marL="0">
+              <a:buNone/>
+            </a:pPr>
+            <a:r>
+              <a:rPr lang="en-US" sz="1300" b="1" dirty="0">
+                <a:solidFill>
+                  <a:srgbClr val="FFFFFF"/>
+                </a:solidFill>
+                <a:latin typeface="Arial" pitchFamily="34" charset="0"/>
+                <a:ea typeface="Arial" pitchFamily="34" charset="-122"/>
+                <a:cs typeface="Arial" pitchFamily="34" charset="-120"/>
+              </a:rPr>
+              <a:t>5</a:t>
+            </a:r>
+            <a:endParaRPr lang="en-US" sz="1300" dirty="0"/>
+          </a:p>
+        </p:txBody>
+      </p:sp>
+      <p:sp>
+        <p:nvSpPr>
+          <p:cNvPr id="22" name="Text 20"/>
+          <p:cNvSpPr/>
+          <p:nvPr/>
+        </p:nvSpPr>
+        <p:spPr>
+          <a:xfrm>
+            <a:off x="1024128" y="4306824"/>
+            <a:ext cx="10616184" cy="457200"/>
+          </a:xfrm>
+          <a:prstGeom prst="rect">
+            <a:avLst/>
+          </a:prstGeom>
+          <a:noFill/>
+          <a:ln/>
+        </p:spPr>
+        <p:txBody>
+          <a:bodyPr wrap="square" lIns="0" tIns="0" rIns="0" bIns="0" rtlCol="0" anchor="t"/>
+          <a:lstStyle/>
+          <a:p>
             <a:pPr indent="0" marL="0">
-              <a:buNone/>
-            </a:pPr>
-            <a:r>
-              <a:rPr lang="en-US" sz="1450" b="1" dirty="0">
-                <a:solidFill>
-                  <a:srgbClr val="231A14"/>
-                </a:solidFill>
-                <a:latin typeface="Calibri" pitchFamily="34" charset="0"/>
-                <a:ea typeface="Calibri" pitchFamily="34" charset="-122"/>
-                <a:cs typeface="Calibri" pitchFamily="34" charset="-120"/>
-              </a:rPr>
-              <a:t>Paste ke Claude</a:t>
-            </a:r>
-            <a:endParaRPr lang="en-US" sz="1450" dirty="0"/>
-          </a:p>
-        </p:txBody>
-      </p:sp>
-      <p:sp>
-        <p:nvSpPr>
-          <p:cNvPr id="11" name="Text 9"/>
-          <p:cNvSpPr/>
-          <p:nvPr/>
-        </p:nvSpPr>
-        <p:spPr>
-          <a:xfrm>
-            <a:off x="1005840" y="2761488"/>
-            <a:ext cx="9875520" cy="594360"/>
-          </a:xfrm>
-          <a:prstGeom prst="rect">
-            <a:avLst/>
-          </a:prstGeom>
-          <a:noFill/>
-          <a:ln/>
-        </p:spPr>
-        <p:txBody>
-          <a:bodyPr wrap="square" lIns="0" tIns="0" rIns="0" bIns="0" rtlCol="0" anchor="t"/>
-          <a:lstStyle/>
-          <a:p>
+              <a:lnSpc>
+                <a:spcPct val="112000"/>
+              </a:lnSpc>
+              <a:buNone/>
+            </a:pPr>
+            <a:r>
+              <a:rPr lang="en-US" sz="1300" b="1" dirty="0">
+                <a:solidFill>
+                  <a:srgbClr val="0D1321"/>
+                </a:solidFill>
+                <a:latin typeface="Arial" pitchFamily="34" charset="0"/>
+                <a:ea typeface="Arial" pitchFamily="34" charset="-122"/>
+                <a:cs typeface="Arial" pitchFamily="34" charset="-120"/>
+              </a:rPr>
+              <a:t>Simpan di Claude Projects —  </a:t>
+            </a:r>
             <a:pPr indent="0" marL="0">
-              <a:buNone/>
-            </a:pPr>
-            <a:r>
-              <a:rPr lang="en-US" sz="1200" dirty="0">
-                <a:solidFill>
-                  <a:srgbClr val="6B6B6B"/>
-                </a:solidFill>
-                <a:latin typeface="Calibri" pitchFamily="34" charset="0"/>
-                <a:ea typeface="Calibri" pitchFamily="34" charset="-122"/>
-                <a:cs typeface="Calibri" pitchFamily="34" charset="-120"/>
-              </a:rPr>
-              <a:t>Kirim seluruh template + prompt: minta SWOT singkat, gap yang belum diisi kompetitor manapun, dan 1 kalimat positioning.</a:t>
-            </a:r>
-            <a:endParaRPr lang="en-US" sz="1200" dirty="0"/>
-          </a:p>
-        </p:txBody>
-      </p:sp>
-      <p:sp>
-        <p:nvSpPr>
-          <p:cNvPr id="12" name="Shape 10"/>
-          <p:cNvSpPr/>
-          <p:nvPr/>
-        </p:nvSpPr>
-        <p:spPr>
-          <a:xfrm>
-            <a:off x="457200" y="3429000"/>
-            <a:ext cx="384048" cy="384048"/>
-          </a:xfrm>
-          <a:prstGeom prst="ellipse">
-            <a:avLst/>
-          </a:prstGeom>
-          <a:solidFill>
-            <a:srgbClr val="A8452F"/>
-          </a:solidFill>
-          <a:ln/>
-        </p:spPr>
-      </p:sp>
-      <p:sp>
-        <p:nvSpPr>
-          <p:cNvPr id="13" name="Text 11"/>
-          <p:cNvSpPr/>
-          <p:nvPr/>
-        </p:nvSpPr>
-        <p:spPr>
-          <a:xfrm>
-            <a:off x="457200" y="3429000"/>
-            <a:ext cx="384048" cy="384048"/>
-          </a:xfrm>
-          <a:prstGeom prst="rect">
-            <a:avLst/>
-          </a:prstGeom>
-          <a:noFill/>
-          <a:ln/>
-        </p:spPr>
-        <p:txBody>
-          <a:bodyPr wrap="square" lIns="0" tIns="0" rIns="0" bIns="0" rtlCol="0" anchor="ctr"/>
-          <a:lstStyle/>
-          <a:p>
-            <a:pPr algn="ctr" indent="0" marL="0">
-              <a:buNone/>
-            </a:pPr>
-            <a:r>
-              <a:rPr lang="en-US" sz="1400" b="1" dirty="0">
-                <a:solidFill>
-                  <a:srgbClr val="FFFFFF"/>
-                </a:solidFill>
-                <a:latin typeface="Calibri" pitchFamily="34" charset="0"/>
-                <a:ea typeface="Calibri" pitchFamily="34" charset="-122"/>
-                <a:cs typeface="Calibri" pitchFamily="34" charset="-120"/>
-              </a:rPr>
-              <a:t>3</a:t>
-            </a:r>
-            <a:endParaRPr lang="en-US" sz="1400" dirty="0"/>
-          </a:p>
-        </p:txBody>
-      </p:sp>
-      <p:sp>
-        <p:nvSpPr>
-          <p:cNvPr id="14" name="Text 12"/>
-          <p:cNvSpPr/>
-          <p:nvPr/>
-        </p:nvSpPr>
-        <p:spPr>
-          <a:xfrm>
-            <a:off x="1005840" y="3374136"/>
-            <a:ext cx="9875520" cy="365760"/>
-          </a:xfrm>
-          <a:prstGeom prst="rect">
-            <a:avLst/>
-          </a:prstGeom>
-          <a:noFill/>
-          <a:ln/>
-        </p:spPr>
-        <p:txBody>
-          <a:bodyPr wrap="square" lIns="0" tIns="0" rIns="0" bIns="0" rtlCol="0" anchor="ctr"/>
-          <a:lstStyle/>
-          <a:p>
-            <a:pPr indent="0" marL="0">
-              <a:buNone/>
-            </a:pPr>
-            <a:r>
-              <a:rPr lang="en-US" sz="1450" b="1" dirty="0">
-                <a:solidFill>
-                  <a:srgbClr val="231A14"/>
-                </a:solidFill>
-                <a:latin typeface="Calibri" pitchFamily="34" charset="0"/>
-                <a:ea typeface="Calibri" pitchFamily="34" charset="-122"/>
-                <a:cs typeface="Calibri" pitchFamily="34" charset="-120"/>
-              </a:rPr>
-              <a:t>Simpan di Claude Projects</a:t>
-            </a:r>
-            <a:endParaRPr lang="en-US" sz="1450" dirty="0"/>
-          </a:p>
-        </p:txBody>
-      </p:sp>
-      <p:sp>
-        <p:nvSpPr>
-          <p:cNvPr id="15" name="Text 13"/>
-          <p:cNvSpPr/>
-          <p:nvPr/>
-        </p:nvSpPr>
-        <p:spPr>
-          <a:xfrm>
-            <a:off x="1005840" y="3721608"/>
-            <a:ext cx="9875520" cy="594360"/>
-          </a:xfrm>
-          <a:prstGeom prst="rect">
-            <a:avLst/>
-          </a:prstGeom>
-          <a:noFill/>
-          <a:ln/>
-        </p:spPr>
-        <p:txBody>
-          <a:bodyPr wrap="square" lIns="0" tIns="0" rIns="0" bIns="0" rtlCol="0" anchor="t"/>
-          <a:lstStyle/>
-          <a:p>
-            <a:pPr indent="0" marL="0">
-              <a:buNone/>
-            </a:pPr>
-            <a:r>
-              <a:rPr lang="en-US" sz="1200" dirty="0">
-                <a:solidFill>
-                  <a:srgbClr val="6B6B6B"/>
-                </a:solidFill>
-                <a:latin typeface="Calibri" pitchFamily="34" charset="0"/>
-                <a:ea typeface="Calibri" pitchFamily="34" charset="-122"/>
-                <a:cs typeface="Calibri" pitchFamily="34" charset="-120"/>
-              </a:rPr>
-              <a:t>Pilih 1 dari 3 variasi kalimat positioning (formal / santai / emosional), simpan di Claude Projects — jadi acuan modul-modul berikutnya.</a:t>
-            </a:r>
-            <a:endParaRPr lang="en-US" sz="1200" dirty="0"/>
-          </a:p>
-        </p:txBody>
-      </p:sp>
-      <p:sp>
-        <p:nvSpPr>
-          <p:cNvPr id="16" name="Shape 14"/>
-          <p:cNvSpPr/>
-          <p:nvPr/>
-        </p:nvSpPr>
-        <p:spPr>
-          <a:xfrm>
-            <a:off x="457200" y="4617720"/>
-            <a:ext cx="10424160" cy="1600200"/>
+              <a:lnSpc>
+                <a:spcPct val="112000"/>
+              </a:lnSpc>
+              <a:buNone/>
+            </a:pPr>
+            <a:r>
+              <a:rPr lang="en-US" sz="1250" dirty="0">
+                <a:solidFill>
+                  <a:srgbClr val="23283A"/>
+                </a:solidFill>
+                <a:latin typeface="Arial" pitchFamily="34" charset="0"/>
+                <a:ea typeface="Arial" pitchFamily="34" charset="-122"/>
+                <a:cs typeface="Arial" pitchFamily="34" charset="-120"/>
+              </a:rPr>
+              <a:t>profil lengkap (positioning + palet warna + mood) jadi acuan Modul 2-5</a:t>
+            </a:r>
+            <a:endParaRPr lang="en-US" sz="1300" dirty="0"/>
+          </a:p>
+        </p:txBody>
+      </p:sp>
+      <p:sp>
+        <p:nvSpPr>
+          <p:cNvPr id="23" name="Shape 21"/>
+          <p:cNvSpPr/>
+          <p:nvPr/>
+        </p:nvSpPr>
+        <p:spPr>
+          <a:xfrm>
+            <a:off x="548640" y="4974336"/>
+            <a:ext cx="11091672" cy="777240"/>
           </a:xfrm>
           <a:prstGeom prst="roundRect">
             <a:avLst>
-              <a:gd name="adj" fmla="val 6857"/>
+              <a:gd name="adj" fmla="val 9412"/>
             </a:avLst>
           </a:prstGeom>
           <a:solidFill>
-            <a:srgbClr val="EEF5EF"/>
-          </a:solidFill>
-          <a:ln/>
-        </p:spPr>
-      </p:sp>
-      <p:sp>
-        <p:nvSpPr>
-          <p:cNvPr id="17" name="Text 15"/>
-          <p:cNvSpPr/>
-          <p:nvPr/>
-        </p:nvSpPr>
-        <p:spPr>
-          <a:xfrm>
-            <a:off x="777240" y="4800600"/>
-            <a:ext cx="9692640" cy="320040"/>
-          </a:xfrm>
-          <a:prstGeom prst="rect">
-            <a:avLst/>
-          </a:prstGeom>
-          <a:noFill/>
-          <a:ln/>
-        </p:spPr>
-        <p:txBody>
-          <a:bodyPr wrap="square" rtlCol="0" anchor="ctr"/>
+            <a:srgbClr val="F3F0FF"/>
+          </a:solidFill>
+          <a:ln w="12700">
+            <a:solidFill>
+              <a:srgbClr val="D9CFFB"/>
+            </a:solidFill>
+            <a:prstDash val="solid"/>
+          </a:ln>
+        </p:spPr>
+      </p:sp>
+      <p:sp>
+        <p:nvSpPr>
+          <p:cNvPr id="24" name="Text 22"/>
+          <p:cNvSpPr/>
+          <p:nvPr/>
+        </p:nvSpPr>
+        <p:spPr>
+          <a:xfrm>
+            <a:off x="777240" y="4974336"/>
+            <a:ext cx="10634472" cy="777240"/>
+          </a:xfrm>
+          <a:prstGeom prst="rect">
+            <a:avLst/>
+          </a:prstGeom>
+          <a:noFill/>
+          <a:ln/>
+        </p:spPr>
+        <p:txBody>
+          <a:bodyPr wrap="square" lIns="0" tIns="0" rIns="0" bIns="0" rtlCol="0" anchor="ctr"/>
           <a:lstStyle/>
           <a:p>
             <a:pPr indent="0" marL="0">
-              <a:buNone/>
-            </a:pPr>
-            <a:r>
-              <a:rPr lang="en-US" sz="1200" b="1" spc="100" kern="0" dirty="0">
-                <a:solidFill>
-                  <a:srgbClr val="3F7D4A"/>
-                </a:solidFill>
-                <a:latin typeface="Calibri" pitchFamily="34" charset="0"/>
-                <a:ea typeface="Calibri" pitchFamily="34" charset="-122"/>
-                <a:cs typeface="Calibri" pitchFamily="34" charset="-120"/>
+              <a:lnSpc>
+                <a:spcPct val="120000"/>
+              </a:lnSpc>
+              <a:buNone/>
+            </a:pPr>
+            <a:r>
+              <a:rPr lang="en-US" sz="1200" b="1" dirty="0">
+                <a:solidFill>
+                  <a:srgbClr val="4B36C7"/>
+                </a:solidFill>
+                <a:latin typeface="Arial" pitchFamily="34" charset="0"/>
+                <a:ea typeface="Arial" pitchFamily="34" charset="-122"/>
+                <a:cs typeface="Arial" pitchFamily="34" charset="-120"/>
+              </a:rPr>
+              <a:t>◆  KENAPA WARNA DAN MOOD JUGA DISIMPAN?  </a:t>
+            </a:r>
+            <a:pPr indent="0" marL="0">
+              <a:lnSpc>
+                <a:spcPct val="120000"/>
+              </a:lnSpc>
+              <a:buNone/>
+            </a:pPr>
+            <a:r>
+              <a:rPr lang="en-US" sz="1200" dirty="0">
+                <a:solidFill>
+                  <a:srgbClr val="23283A"/>
+                </a:solidFill>
+                <a:latin typeface="Arial" pitchFamily="34" charset="0"/>
+                <a:ea typeface="Arial" pitchFamily="34" charset="-122"/>
+                <a:cs typeface="Arial" pitchFamily="34" charset="-120"/>
+              </a:rPr>
+              <a:t>Ini otomatis dipakai Claude waktu kamu minta bikin grafis atau foto produk di Modul 3 — tanpa perlu jelaskan ulang tiap kali.</a:t>
+            </a:r>
+            <a:endParaRPr lang="en-US" sz="1200" dirty="0"/>
+          </a:p>
+        </p:txBody>
+      </p:sp>
+    </p:spTree>
+  </p:cSld>
+  <p:clrMapOvr>
+    <a:masterClrMapping/>
+  </p:clrMapOvr>
+</p:sld>
+</file>
+
+<file path=ppt/slides/slide5.xml><?xml version="1.0" encoding="utf-8"?>
+<p:sld xmlns:a="http://schemas.openxmlformats.org/drawingml/2006/main" xmlns:r="http://schemas.openxmlformats.org/officeDocument/2006/relationships" xmlns:p="http://schemas.openxmlformats.org/presentationml/2006/main">
+  <p:cSld name="Slide 5">
+    <p:bg>
+      <p:bgPr>
+        <a:solidFill>
+          <a:srgbClr val="FFFFFF"/>
+        </a:solidFill>
+      </p:bgPr>
+    </p:bg>
+    <p:spTree>
+      <p:nvGrpSpPr>
+        <p:cNvPr id="1" name=""/>
+        <p:cNvGrpSpPr/>
+        <p:nvPr/>
+      </p:nvGrpSpPr>
+      <p:grpSpPr>
+        <a:xfrm>
+          <a:off x="0" y="0"/>
+          <a:ext cx="0" cy="0"/>
+          <a:chOff x="0" y="0"/>
+          <a:chExt cx="0" cy="0"/>
+        </a:xfrm>
+      </p:grpSpPr>
+      <p:sp>
+        <p:nvSpPr>
+          <p:cNvPr id="2" name="Shape 0"/>
+          <p:cNvSpPr/>
+          <p:nvPr/>
+        </p:nvSpPr>
+        <p:spPr>
+          <a:xfrm>
+            <a:off x="0" y="0"/>
+            <a:ext cx="12191695" cy="960120"/>
+          </a:xfrm>
+          <a:prstGeom prst="rect">
+            <a:avLst/>
+          </a:prstGeom>
+          <a:solidFill>
+            <a:srgbClr val="0D1321"/>
+          </a:solidFill>
+          <a:ln/>
+        </p:spPr>
+      </p:sp>
+      <p:sp>
+        <p:nvSpPr>
+          <p:cNvPr id="3" name="Shape 1"/>
+          <p:cNvSpPr/>
+          <p:nvPr/>
+        </p:nvSpPr>
+        <p:spPr>
+          <a:xfrm>
+            <a:off x="0" y="960120"/>
+            <a:ext cx="12191695" cy="41148"/>
+          </a:xfrm>
+          <a:prstGeom prst="rect">
+            <a:avLst/>
+          </a:prstGeom>
+          <a:solidFill>
+            <a:srgbClr val="6849F6"/>
+          </a:solidFill>
+          <a:ln/>
+        </p:spPr>
+      </p:sp>
+      <p:sp>
+        <p:nvSpPr>
+          <p:cNvPr id="4" name="Text 2"/>
+          <p:cNvSpPr/>
+          <p:nvPr/>
+        </p:nvSpPr>
+        <p:spPr>
+          <a:xfrm>
+            <a:off x="548640" y="256032"/>
+            <a:ext cx="3657600" cy="457200"/>
+          </a:xfrm>
+          <a:prstGeom prst="rect">
+            <a:avLst/>
+          </a:prstGeom>
+          <a:noFill/>
+          <a:ln/>
+        </p:spPr>
+        <p:txBody>
+          <a:bodyPr wrap="square" lIns="0" tIns="0" rIns="0" bIns="0" rtlCol="0" anchor="ctr"/>
+          <a:lstStyle/>
+          <a:p>
+            <a:pPr indent="0" marL="0">
+              <a:buNone/>
+            </a:pPr>
+            <a:r>
+              <a:rPr lang="en-US" sz="2000" b="1" dirty="0">
+                <a:solidFill>
+                  <a:srgbClr val="FFFFFF"/>
+                </a:solidFill>
+                <a:latin typeface="Arial" pitchFamily="34" charset="0"/>
+                <a:ea typeface="Arial" pitchFamily="34" charset="-122"/>
+                <a:cs typeface="Arial" pitchFamily="34" charset="-120"/>
+              </a:rPr>
+              <a:t>belajar</a:t>
+            </a:r>
+            <a:pPr indent="0" marL="0">
+              <a:buNone/>
+            </a:pPr>
+            <a:r>
+              <a:rPr lang="en-US" sz="2000" b="1" dirty="0">
+                <a:solidFill>
+                  <a:srgbClr val="8B7CF6"/>
+                </a:solidFill>
+                <a:latin typeface="Arial" pitchFamily="34" charset="0"/>
+                <a:ea typeface="Arial" pitchFamily="34" charset="-122"/>
+                <a:cs typeface="Arial" pitchFamily="34" charset="-120"/>
+              </a:rPr>
+              <a:t>claude</a:t>
+            </a:r>
+            <a:endParaRPr lang="en-US" sz="2000" dirty="0"/>
+          </a:p>
+        </p:txBody>
+      </p:sp>
+      <p:sp>
+        <p:nvSpPr>
+          <p:cNvPr id="5" name="Text 3"/>
+          <p:cNvSpPr/>
+          <p:nvPr/>
+        </p:nvSpPr>
+        <p:spPr>
+          <a:xfrm>
+            <a:off x="5943600" y="274320"/>
+            <a:ext cx="5696712" cy="411480"/>
+          </a:xfrm>
+          <a:prstGeom prst="rect">
+            <a:avLst/>
+          </a:prstGeom>
+          <a:noFill/>
+          <a:ln/>
+        </p:spPr>
+        <p:txBody>
+          <a:bodyPr wrap="square" lIns="0" tIns="0" rIns="0" bIns="0" rtlCol="0" anchor="ctr"/>
+          <a:lstStyle/>
+          <a:p>
+            <a:pPr algn="r" indent="0" marL="0">
+              <a:buNone/>
+            </a:pPr>
+            <a:r>
+              <a:rPr lang="en-US" sz="1250" dirty="0">
+                <a:solidFill>
+                  <a:srgbClr val="9AA2B4"/>
+                </a:solidFill>
+                <a:latin typeface="Arial" pitchFamily="34" charset="0"/>
+                <a:ea typeface="Arial" pitchFamily="34" charset="-122"/>
+                <a:cs typeface="Arial" pitchFamily="34" charset="-120"/>
+              </a:rPr>
+              <a:t>Modul 01 — Positioning &amp; Analisis Kompetitor</a:t>
+            </a:r>
+            <a:endParaRPr lang="en-US" sz="1250" dirty="0"/>
+          </a:p>
+        </p:txBody>
+      </p:sp>
+      <p:sp>
+        <p:nvSpPr>
+          <p:cNvPr id="6" name="Text 4"/>
+          <p:cNvSpPr/>
+          <p:nvPr/>
+        </p:nvSpPr>
+        <p:spPr>
+          <a:xfrm>
+            <a:off x="548640" y="1170432"/>
+            <a:ext cx="11091672" cy="274320"/>
+          </a:xfrm>
+          <a:prstGeom prst="rect">
+            <a:avLst/>
+          </a:prstGeom>
+          <a:noFill/>
+          <a:ln/>
+        </p:spPr>
+        <p:txBody>
+          <a:bodyPr wrap="square" lIns="0" tIns="0" rIns="0" bIns="0" rtlCol="0" anchor="ctr"/>
+          <a:lstStyle/>
+          <a:p>
+            <a:pPr indent="0" marL="0">
+              <a:buNone/>
+            </a:pPr>
+            <a:r>
+              <a:rPr lang="en-US" sz="1250" b="1" spc="100" kern="0" dirty="0">
+                <a:solidFill>
+                  <a:srgbClr val="4B36C7"/>
+                </a:solidFill>
+                <a:latin typeface="Arial" pitchFamily="34" charset="0"/>
+                <a:ea typeface="Arial" pitchFamily="34" charset="-122"/>
+                <a:cs typeface="Arial" pitchFamily="34" charset="-120"/>
+              </a:rPr>
+              <a:t>DARI LATIHAN KE OUTPUT SIAP PAKAI</a:t>
+            </a:r>
+            <a:endParaRPr lang="en-US" sz="1250" dirty="0"/>
+          </a:p>
+        </p:txBody>
+      </p:sp>
+      <p:sp>
+        <p:nvSpPr>
+          <p:cNvPr id="7" name="Text 5"/>
+          <p:cNvSpPr/>
+          <p:nvPr/>
+        </p:nvSpPr>
+        <p:spPr>
+          <a:xfrm>
+            <a:off x="548640" y="1444752"/>
+            <a:ext cx="11091672" cy="548640"/>
+          </a:xfrm>
+          <a:prstGeom prst="rect">
+            <a:avLst/>
+          </a:prstGeom>
+          <a:noFill/>
+          <a:ln/>
+        </p:spPr>
+        <p:txBody>
+          <a:bodyPr wrap="square" lIns="0" tIns="0" rIns="0" bIns="0" rtlCol="0" anchor="ctr"/>
+          <a:lstStyle/>
+          <a:p>
+            <a:pPr indent="0" marL="0">
+              <a:buNone/>
+            </a:pPr>
+            <a:r>
+              <a:rPr lang="en-US" sz="2600" b="1" dirty="0">
+                <a:solidFill>
+                  <a:srgbClr val="0D1321"/>
+                </a:solidFill>
+                <a:latin typeface="Arial" pitchFamily="34" charset="0"/>
+                <a:ea typeface="Arial" pitchFamily="34" charset="-122"/>
+                <a:cs typeface="Arial" pitchFamily="34" charset="-120"/>
+              </a:rPr>
+              <a:t>Latihan &amp; Output yang Diharapkan</a:t>
+            </a:r>
+            <a:endParaRPr lang="en-US" sz="2600" dirty="0"/>
+          </a:p>
+        </p:txBody>
+      </p:sp>
+      <p:sp>
+        <p:nvSpPr>
+          <p:cNvPr id="8" name="Shape 6"/>
+          <p:cNvSpPr/>
+          <p:nvPr/>
+        </p:nvSpPr>
+        <p:spPr>
+          <a:xfrm>
+            <a:off x="548640" y="2148840"/>
+            <a:ext cx="11091672" cy="1600200"/>
+          </a:xfrm>
+          <a:prstGeom prst="roundRect">
+            <a:avLst>
+              <a:gd name="adj" fmla="val 4571"/>
+            </a:avLst>
+          </a:prstGeom>
+          <a:solidFill>
+            <a:srgbClr val="EAFAF0"/>
+          </a:solidFill>
+          <a:ln w="12700">
+            <a:solidFill>
+              <a:srgbClr val="BCE8CE"/>
+            </a:solidFill>
+            <a:prstDash val="solid"/>
+          </a:ln>
+        </p:spPr>
+      </p:sp>
+      <p:sp>
+        <p:nvSpPr>
+          <p:cNvPr id="9" name="Text 7"/>
+          <p:cNvSpPr/>
+          <p:nvPr/>
+        </p:nvSpPr>
+        <p:spPr>
+          <a:xfrm>
+            <a:off x="804672" y="2350008"/>
+            <a:ext cx="10579608" cy="256032"/>
+          </a:xfrm>
+          <a:prstGeom prst="rect">
+            <a:avLst/>
+          </a:prstGeom>
+          <a:noFill/>
+          <a:ln/>
+        </p:spPr>
+        <p:txBody>
+          <a:bodyPr wrap="square" lIns="0" tIns="0" rIns="0" bIns="0" rtlCol="0" anchor="ctr"/>
+          <a:lstStyle/>
+          <a:p>
+            <a:pPr indent="0" marL="0">
+              <a:buNone/>
+            </a:pPr>
+            <a:r>
+              <a:rPr lang="en-US" sz="1250" b="1" spc="50" kern="0" dirty="0">
+                <a:solidFill>
+                  <a:srgbClr val="1A7A44"/>
+                </a:solidFill>
+                <a:latin typeface="Arial" pitchFamily="34" charset="0"/>
+                <a:ea typeface="Arial" pitchFamily="34" charset="-122"/>
+                <a:cs typeface="Arial" pitchFamily="34" charset="-120"/>
+              </a:rPr>
+              <a:t>■  LATIHAN</a:t>
+            </a:r>
+            <a:endParaRPr lang="en-US" sz="1250" dirty="0"/>
+          </a:p>
+        </p:txBody>
+      </p:sp>
+      <p:sp>
+        <p:nvSpPr>
+          <p:cNvPr id="10" name="Text 8"/>
+          <p:cNvSpPr/>
+          <p:nvPr/>
+        </p:nvSpPr>
+        <p:spPr>
+          <a:xfrm>
+            <a:off x="804672" y="2679192"/>
+            <a:ext cx="10579608" cy="868680"/>
+          </a:xfrm>
+          <a:prstGeom prst="rect">
+            <a:avLst/>
+          </a:prstGeom>
+          <a:noFill/>
+          <a:ln/>
+        </p:spPr>
+        <p:txBody>
+          <a:bodyPr wrap="square" lIns="0" tIns="0" rIns="0" bIns="0" rtlCol="0" anchor="t"/>
+          <a:lstStyle/>
+          <a:p>
+            <a:pPr indent="0" marL="0">
+              <a:lnSpc>
+                <a:spcPct val="125000"/>
+              </a:lnSpc>
+              <a:buNone/>
+            </a:pPr>
+            <a:r>
+              <a:rPr lang="en-US" sz="1250" dirty="0">
+                <a:solidFill>
+                  <a:srgbClr val="23283A"/>
+                </a:solidFill>
+                <a:latin typeface="Arial" pitchFamily="34" charset="0"/>
+                <a:ea typeface="Arial" pitchFamily="34" charset="-122"/>
+                <a:cs typeface="Arial" pitchFamily="34" charset="-120"/>
+              </a:rPr>
+              <a:t>Download dan isi cm-template-kompetitor.txt dengan data 3 kompetitor nyata bisnismu, termasuk palet warna dan mood/gaya visual. Paste ke Claude dan minta analisis SWOT + gap + 3 variasi kalimat positioning. Pilih satu, simpan profil lengkap di Claude Projects — ini akan dipakai di Modul 2 sampai 5.</a:t>
+            </a:r>
+            <a:endParaRPr lang="en-US" sz="1250" dirty="0"/>
+          </a:p>
+        </p:txBody>
+      </p:sp>
+      <p:sp>
+        <p:nvSpPr>
+          <p:cNvPr id="11" name="Shape 9"/>
+          <p:cNvSpPr/>
+          <p:nvPr/>
+        </p:nvSpPr>
+        <p:spPr>
+          <a:xfrm>
+            <a:off x="548640" y="3931920"/>
+            <a:ext cx="11091672" cy="1965960"/>
+          </a:xfrm>
+          <a:prstGeom prst="roundRect">
+            <a:avLst>
+              <a:gd name="adj" fmla="val 3721"/>
+            </a:avLst>
+          </a:prstGeom>
+          <a:solidFill>
+            <a:srgbClr val="141D33"/>
+          </a:solidFill>
+          <a:ln w="12700">
+            <a:solidFill>
+              <a:srgbClr val="6849F6"/>
+            </a:solidFill>
+            <a:prstDash val="solid"/>
+          </a:ln>
+        </p:spPr>
+      </p:sp>
+      <p:sp>
+        <p:nvSpPr>
+          <p:cNvPr id="12" name="Text 10"/>
+          <p:cNvSpPr/>
+          <p:nvPr/>
+        </p:nvSpPr>
+        <p:spPr>
+          <a:xfrm>
+            <a:off x="804672" y="4133088"/>
+            <a:ext cx="10579608" cy="256032"/>
+          </a:xfrm>
+          <a:prstGeom prst="rect">
+            <a:avLst/>
+          </a:prstGeom>
+          <a:noFill/>
+          <a:ln/>
+        </p:spPr>
+        <p:txBody>
+          <a:bodyPr wrap="square" lIns="0" tIns="0" rIns="0" bIns="0" rtlCol="0" anchor="ctr"/>
+          <a:lstStyle/>
+          <a:p>
+            <a:pPr indent="0" marL="0">
+              <a:buNone/>
+            </a:pPr>
+            <a:r>
+              <a:rPr lang="en-US" sz="1250" b="1" spc="50" kern="0" dirty="0">
+                <a:solidFill>
+                  <a:srgbClr val="8B7CF6"/>
+                </a:solidFill>
+                <a:latin typeface="Arial" pitchFamily="34" charset="0"/>
+                <a:ea typeface="Arial" pitchFamily="34" charset="-122"/>
+                <a:cs typeface="Arial" pitchFamily="34" charset="-120"/>
               </a:rPr>
               <a:t>OUTPUT YANG DIHARAPKAN</a:t>
             </a:r>
-            <a:endParaRPr lang="en-US" sz="1200" dirty="0"/>
-          </a:p>
-        </p:txBody>
-      </p:sp>
-      <p:sp>
-        <p:nvSpPr>
-          <p:cNvPr id="18" name="Text 16"/>
-          <p:cNvSpPr/>
-          <p:nvPr/>
-        </p:nvSpPr>
-        <p:spPr>
-          <a:xfrm>
-            <a:off x="777240" y="5138928"/>
-            <a:ext cx="9692640" cy="960120"/>
+            <a:endParaRPr lang="en-US" sz="1250" dirty="0"/>
+          </a:p>
+        </p:txBody>
+      </p:sp>
+      <p:sp>
+        <p:nvSpPr>
+          <p:cNvPr id="13" name="Text 11"/>
+          <p:cNvSpPr/>
+          <p:nvPr/>
+        </p:nvSpPr>
+        <p:spPr>
+          <a:xfrm>
+            <a:off x="804672" y="4462272"/>
+            <a:ext cx="10579608" cy="1234440"/>
           </a:xfrm>
           <a:prstGeom prst="rect">
             <a:avLst/>
@@ -3149,18 +4357,50 @@
           <a:lstStyle/>
           <a:p>
             <a:pPr indent="0" marL="0">
+              <a:lnSpc>
+                <a:spcPct val="125000"/>
+              </a:lnSpc>
               <a:buNone/>
             </a:pPr>
             <a:r>
               <a:rPr lang="en-US" sz="1250" dirty="0">
                 <a:solidFill>
-                  <a:srgbClr val="231A14"/>
-                </a:solidFill>
-                <a:latin typeface="Calibri" pitchFamily="34" charset="0"/>
-                <a:ea typeface="Calibri" pitchFamily="34" charset="-122"/>
-                <a:cs typeface="Calibri" pitchFamily="34" charset="-120"/>
-              </a:rPr>
-              <a:t>SWOT singkat (4 poin per kuadran), 1 gap peluang yang konkret, dan 1 kalimat positioning final yang bisa langsung dipakai di bio Instagram, deskripsi toko Tokopedia, dan iklan. File pendukung: cm-template-kompetitor.txt</a:t>
+                  <a:srgbClr val="B7C0D8"/>
+                </a:solidFill>
+                <a:latin typeface="Arial" pitchFamily="34" charset="0"/>
+                <a:ea typeface="Arial" pitchFamily="34" charset="-122"/>
+                <a:cs typeface="Arial" pitchFamily="34" charset="-120"/>
+              </a:rPr>
+              <a:t>SWOT singkat (4 poin per kuadran), 1 gap peluang yang konkret, dan 1 kalimat positioning final yang bisa langsung dipakai di bio Instagram, deskripsi toko Tokopedia, dan iklan — plus 1 Claude Project aktif berisi profil bisnis lengkap (positioning + identitas visual).</a:t>
+            </a:r>
+            <a:endParaRPr lang="en-US" sz="1250" dirty="0"/>
+          </a:p>
+          <a:p>
+            <a:pPr indent="0" marL="0">
+              <a:lnSpc>
+                <a:spcPct val="125000"/>
+              </a:lnSpc>
+              <a:buNone/>
+            </a:pPr>
+            <a:endParaRPr lang="en-US" sz="1250" dirty="0"/>
+          </a:p>
+          <a:p>
+            <a:pPr indent="0" marL="0">
+              <a:lnSpc>
+                <a:spcPct val="125000"/>
+              </a:lnSpc>
+              <a:buNone/>
+            </a:pPr>
+            <a:r>
+              <a:rPr lang="en-US" sz="1250" dirty="0">
+                <a:solidFill>
+                  <a:srgbClr val="B7C0D8"/>
+                </a:solidFill>
+                <a:latin typeface="Arial" pitchFamily="34" charset="0"/>
+                <a:ea typeface="Arial" pitchFamily="34" charset="-122"/>
+                <a:cs typeface="Arial" pitchFamily="34" charset="-120"/>
+              </a:rPr>
+              <a:t>File pendukung: cm-template-kompetitor.txt (atau cm-profil-dapur-rara.txt sebagai contoh)</a:t>
             </a:r>
             <a:endParaRPr lang="en-US" sz="1250" dirty="0"/>
           </a:p>

--- a/Content-Marketing/M01-Positioning-Kompetitor/K3-M01-Positioning-Kompetitor.pptx
+++ b/Content-Marketing/M01-Positioning-Kompetitor/K3-M01-Positioning-Kompetitor.pptx
@@ -3338,7 +3338,7 @@
                 <a:ea typeface="Arial" pitchFamily="34" charset="-122"/>
                 <a:cs typeface="Arial" pitchFamily="34" charset="-120"/>
               </a:rPr>
-              <a:t>Isi Data Kompetitor —  </a:t>
+              <a:t>Punya Bisnis Sendiri? —  </a:t>
             </a:r>
             <a:pPr indent="0" marL="0">
               <a:lnSpc>
@@ -3355,7 +3355,7 @@
                 <a:ea typeface="Arial" pitchFamily="34" charset="-122"/>
                 <a:cs typeface="Arial" pitchFamily="34" charset="-120"/>
               </a:rPr>
-              <a:t>cm-template-kompetitor.txt dengan harga, rating, dan 10 ulasan paling buruk 3 kompetitor</a:t>
+              <a:t>ganti data kompetitor di cm-template-kompetitor.txt — harga, rating, ulasan terburuk 3 kompetitor nyata. Pakai contoh Dapur Rara? Lewati ke langkah 3</a:t>
             </a:r>
             <a:endParaRPr lang="en-US" sz="1300" dirty="0"/>
           </a:p>
@@ -3456,7 +3456,7 @@
                 <a:ea typeface="Arial" pitchFamily="34" charset="-122"/>
                 <a:cs typeface="Arial" pitchFamily="34" charset="-120"/>
               </a:rPr>
-              <a:t>Isi Data Bisnismu —  </a:t>
+              <a:t>Ganti Data Bisnismu —  </a:t>
             </a:r>
             <a:pPr indent="0" marL="0">
               <a:lnSpc>
@@ -3473,7 +3473,7 @@
                 <a:ea typeface="Arial" pitchFamily="34" charset="-122"/>
                 <a:cs typeface="Arial" pitchFamily="34" charset="-120"/>
               </a:rPr>
-              <a:t>tanya 3 pelanggan lama kenapa mereka beli, termasuk palet warna &amp; mood visual</a:t>
+              <a:t>isi juga palet warna &amp; mood visual — tanya 3 pelanggan lama kenapa mereka beli dari kamu</a:t>
             </a:r>
             <a:endParaRPr lang="en-US" sz="1300" dirty="0"/>
           </a:p>
@@ -3591,7 +3591,7 @@
                 <a:ea typeface="Arial" pitchFamily="34" charset="-122"/>
                 <a:cs typeface="Arial" pitchFamily="34" charset="-120"/>
               </a:rPr>
-              <a:t>paste seluruh template ke Claude dengan prompt di atas</a:t>
+              <a:t>paste seluruh file ke Claude dengan prompt yang sudah ada di dalamnya</a:t>
             </a:r>
             <a:endParaRPr lang="en-US" sz="1300" dirty="0"/>
           </a:p>
@@ -4263,7 +4263,7 @@
                 <a:ea typeface="Arial" pitchFamily="34" charset="-122"/>
                 <a:cs typeface="Arial" pitchFamily="34" charset="-120"/>
               </a:rPr>
-              <a:t>Download dan isi cm-template-kompetitor.txt dengan data 3 kompetitor nyata bisnismu, termasuk palet warna dan mood/gaya visual. Paste ke Claude dan minta analisis SWOT + gap + 3 variasi kalimat positioning. Pilih satu, simpan profil lengkap di Claude Projects — ini akan dipakai di Modul 2 sampai 5.</a:t>
+              <a:t>Download cm-template-kompetitor.txt — sudah terisi contoh Dapur Rara, langsung paste ke Claude untuk latihan. Punya bisnis sendiri? Ganti dulu semua datanya (termasuk palet warna dan mood/gaya visual) sebelum paste. Minta Claude analisis SWOT + gap + 3 variasi kalimat positioning. Pilih satu, simpan profil lengkap di Claude Projects — ini akan dipakai di Modul 2 sampai 5.</a:t>
             </a:r>
             <a:endParaRPr lang="en-US" sz="1250" dirty="0"/>
           </a:p>
@@ -4400,7 +4400,7 @@
                 <a:ea typeface="Arial" pitchFamily="34" charset="-122"/>
                 <a:cs typeface="Arial" pitchFamily="34" charset="-120"/>
               </a:rPr>
-              <a:t>File pendukung: cm-template-kompetitor.txt (atau cm-profil-dapur-rara.txt sebagai contoh)</a:t>
+              <a:t>File pendukung: cm-template-kompetitor.txt (sudah terisi contoh Dapur Rara, edit untuk bisnismu sendiri)</a:t>
             </a:r>
             <a:endParaRPr lang="en-US" sz="1250" dirty="0"/>
           </a:p>

--- a/Content-Marketing/M01-Positioning-Kompetitor/K3-M01-Positioning-Kompetitor.pptx
+++ b/Content-Marketing/M01-Positioning-Kompetitor/K3-M01-Positioning-Kompetitor.pptx
@@ -2953,7 +2953,7 @@
                 <a:ea typeface="Arial" pitchFamily="34" charset="-122"/>
                 <a:cs typeface="Arial" pitchFamily="34" charset="-120"/>
               </a:rPr>
-              <a:t>"Ini data 3 kompetitor frozen food saya [paste isi cm-template-kompetitor.txt]. Buatkan: SWOT singkat, gap yang belum diisi kompetitor manapun, dan 1 kalimat positioning: Untuk [siapa], [bisnis] adalah [apa] yang [benefit] karena [bukti]."</a:t>
+              <a:t>"Ini data 3 kompetitor frozen food saya [paste bagian PASTE KE CLAUDE dari cm-template-kompetitor.txt]. Buatkan: SWOT singkat, gap yang belum diisi kompetitor manapun, dan 1 kalimat positioning: Untuk [siapa], [bisnis] adalah [apa] yang [benefit] karena [bukti]."</a:t>
             </a:r>
             <a:endParaRPr lang="en-US" sz="1150" dirty="0"/>
           </a:p>
@@ -3591,7 +3591,7 @@
                 <a:ea typeface="Arial" pitchFamily="34" charset="-122"/>
                 <a:cs typeface="Arial" pitchFamily="34" charset="-120"/>
               </a:rPr>
-              <a:t>paste seluruh file ke Claude dengan prompt yang sudah ada di dalamnya</a:t>
+              <a:t>copy bagian yang ditandai PASTE KE CLAUDE saja (bukan seluruh file) — prompt sudah ada di dalamnya</a:t>
             </a:r>
             <a:endParaRPr lang="en-US" sz="1300" dirty="0"/>
           </a:p>
@@ -4263,7 +4263,7 @@
                 <a:ea typeface="Arial" pitchFamily="34" charset="-122"/>
                 <a:cs typeface="Arial" pitchFamily="34" charset="-120"/>
               </a:rPr>
-              <a:t>Download cm-template-kompetitor.txt — sudah terisi contoh Dapur Rara, langsung paste ke Claude untuk latihan. Punya bisnis sendiri? Ganti dulu semua datanya (termasuk palet warna dan mood/gaya visual) sebelum paste. Minta Claude analisis SWOT + gap + 3 variasi kalimat positioning. Pilih satu, simpan profil lengkap di Claude Projects — ini akan dipakai di Modul 2 sampai 5.</a:t>
+              <a:t>Buka cm-template-kompetitor.txt — sudah terisi contoh Dapur Rara. Punya bisnis sendiri? Ganti dulu Data Bisnis dan Data Kompetitor di dalamnya (termasuk palet warna dan mood/gaya visual). Copy bagian yang ditandai PASTE KE CLAUDE saja ke Claude — bagian di bawahnya hanya referensi, jangan ikut di-paste. Minta analisis SWOT + gap + 3 variasi kalimat positioning. Pilih satu, simpan profil lengkap di Claude Projects — ini akan dipakai di Modul 2 sampai 5.</a:t>
             </a:r>
             <a:endParaRPr lang="en-US" sz="1250" dirty="0"/>
           </a:p>

--- a/Content-Marketing/M01-Positioning-Kompetitor/K3-M01-Positioning-Kompetitor.pptx
+++ b/Content-Marketing/M01-Positioning-Kompetitor/K3-M01-Positioning-Kompetitor.pptx
@@ -2710,11 +2710,11 @@
         <p:spPr>
           <a:xfrm>
             <a:off x="548640" y="2148840"/>
-            <a:ext cx="5413248" cy="3291840"/>
+            <a:ext cx="5413248" cy="2468880"/>
           </a:xfrm>
           <a:prstGeom prst="roundRect">
             <a:avLst>
-              <a:gd name="adj" fmla="val 2222"/>
+              <a:gd name="adj" fmla="val 2963"/>
             </a:avLst>
           </a:prstGeom>
           <a:solidFill>
@@ -2776,7 +2776,7 @@
         <p:spPr>
           <a:xfrm>
             <a:off x="749808" y="2651760"/>
-            <a:ext cx="5010912" cy="2240280"/>
+            <a:ext cx="5010912" cy="1417320"/>
           </a:xfrm>
           <a:prstGeom prst="rect">
             <a:avLst/>
@@ -2817,7 +2817,7 @@
         </p:nvSpPr>
         <p:spPr>
           <a:xfrm>
-            <a:off x="749808" y="4873752"/>
+            <a:off x="749808" y="4050792"/>
             <a:ext cx="5010912" cy="457200"/>
           </a:xfrm>
           <a:prstGeom prst="rect">
@@ -2860,11 +2860,11 @@
         <p:spPr>
           <a:xfrm>
             <a:off x="6227064" y="2148840"/>
-            <a:ext cx="5413248" cy="3291840"/>
+            <a:ext cx="5413248" cy="2468880"/>
           </a:xfrm>
           <a:prstGeom prst="roundRect">
             <a:avLst>
-              <a:gd name="adj" fmla="val 2222"/>
+              <a:gd name="adj" fmla="val 2963"/>
             </a:avLst>
           </a:prstGeom>
           <a:solidFill>
@@ -2926,7 +2926,7 @@
         <p:spPr>
           <a:xfrm>
             <a:off x="6428232" y="2651760"/>
-            <a:ext cx="5010912" cy="2240280"/>
+            <a:ext cx="5010912" cy="1417320"/>
           </a:xfrm>
           <a:prstGeom prst="rect">
             <a:avLst/>
@@ -2967,7 +2967,7 @@
         </p:nvSpPr>
         <p:spPr>
           <a:xfrm>
-            <a:off x="6428232" y="4873752"/>
+            <a:off x="6428232" y="4050792"/>
             <a:ext cx="5010912" cy="457200"/>
           </a:xfrm>
           <a:prstGeom prst="rect">

--- a/Content-Marketing/M01-Positioning-Kompetitor/K3-M01-Positioning-Kompetitor.pptx
+++ b/Content-Marketing/M01-Positioning-Kompetitor/K3-M01-Positioning-Kompetitor.pptx
@@ -4,6 +4,9 @@
   <p:sldMasterIdLst>
     <p:sldMasterId id="2147483648" r:id="rId1"/>
   </p:sldMasterIdLst>
+  <p:notesMasterIdLst>
+    <p:notesMasterId r:id="rId7"/>
+  </p:notesMasterIdLst>
   <p:sldIdLst>
     <p:sldId id="256" r:id="rId2"/>
     <p:sldId id="257" r:id="rId3"/>
@@ -11,11 +14,8 @@
     <p:sldId id="259" r:id="rId5"/>
     <p:sldId id="260" r:id="rId6"/>
   </p:sldIdLst>
-  <p:notesMasterIdLst>
-    <p:notesMasterId r:id="rId7"/>
-  </p:notesMasterIdLst>
-  <p:sldSz cx="12191695" cy="6858000"/>
-  <p:notesSz cx="6858000" cy="12191695"/>
+  <p:sldSz cx="12192000" cy="6858000"/>
+  <p:notesSz cx="6858000" cy="12192000"/>
   <p:defaultTextStyle>
     <a:lvl1pPr marL="0" algn="l" defTabSz="914400" rtl="0" eaLnBrk="1" latinLnBrk="0" hangingPunct="1">
       <a:defRPr sz="1800" kern="1200">
@@ -108,6 +108,11 @@
       </a:defRPr>
     </a:lvl9pPr>
   </p:defaultTextStyle>
+  <p:extLst>
+    <p:ext uri="{EFAFB233-063F-42B5-8137-9DF3F51BA10A}">
+      <p15:sldGuideLst xmlns:p15="http://schemas.microsoft.com/office/powerpoint/2012/main"/>
+    </p:ext>
+  </p:extLst>
 </p:presentation>
 </file>
 
@@ -133,234 +138,10 @@
           <a:chExt cx="0" cy="0"/>
         </a:xfrm>
       </p:grpSpPr>
-      <p:sp>
-        <p:nvSpPr>
-          <p:cNvPr id="2" name="Header Placeholder 1"/>
-          <p:cNvSpPr>
-            <a:spLocks noGrp="1"/>
-          </p:cNvSpPr>
-          <p:nvPr>
-            <p:ph type="hdr" sz="quarter"/>
-          </p:nvPr>
-        </p:nvSpPr>
-        <p:spPr>
-          <a:xfrm>
-            <a:off x="0" y="0"/>
-            <a:ext cx="2971800" cy="458788"/>
-          </a:xfrm>
-          <a:prstGeom prst="rect">
-            <a:avLst/>
-          </a:prstGeom>
-        </p:spPr>
-        <p:txBody>
-          <a:bodyPr vert="horz" lIns="91440" tIns="45720" rIns="91440" bIns="45720" rtlCol="0"/>
-          <a:lstStyle>
-            <a:lvl1pPr algn="l">
-              <a:defRPr sz="1200"/>
-            </a:lvl1pPr>
-          </a:lstStyle>
-          <a:p>
-            <a:endParaRPr lang="en-US"/>
-          </a:p>
-        </p:txBody>
-      </p:sp>
-      <p:sp>
-        <p:nvSpPr>
-          <p:cNvPr id="3" name="Date Placeholder 2"/>
-          <p:cNvSpPr>
-            <a:spLocks noGrp="1"/>
-          </p:cNvSpPr>
-          <p:nvPr>
-            <p:ph type="dt" idx="1"/>
-          </p:nvPr>
-        </p:nvSpPr>
-        <p:spPr>
-          <a:xfrm>
-            <a:off x="3884613" y="0"/>
-            <a:ext cx="2971800" cy="458788"/>
-          </a:xfrm>
-          <a:prstGeom prst="rect">
-            <a:avLst/>
-          </a:prstGeom>
-        </p:spPr>
-        <p:txBody>
-          <a:bodyPr vert="horz" lIns="91440" tIns="45720" rIns="91440" bIns="45720" rtlCol="0"/>
-          <a:lstStyle>
-            <a:lvl1pPr algn="r">
-              <a:defRPr sz="1200"/>
-            </a:lvl1pPr>
-          </a:lstStyle>
-          <a:p>
-            <a:fld id="{5282F153-3F37-0F45-9E97-73ACFA13230C}" type="datetimeFigureOut">
-              <a:rPr lang="en-US"/>
-              <a:t>7/23/19</a:t>
-            </a:fld>
-            <a:endParaRPr lang="en-US"/>
-          </a:p>
-        </p:txBody>
-      </p:sp>
-      <p:sp>
-        <p:nvSpPr>
-          <p:cNvPr id="4" name="Slide Image Placeholder 3"/>
-          <p:cNvSpPr>
-            <a:spLocks noGrp="1" noRot="1" noChangeAspect="1"/>
-          </p:cNvSpPr>
-          <p:nvPr>
-            <p:ph type="sldImg" idx="2"/>
-          </p:nvPr>
-        </p:nvSpPr>
-        <p:spPr>
-          <a:xfrm>
-            <a:off x="685800" y="1143000"/>
-            <a:ext cx="5486400" cy="3086100"/>
-          </a:xfrm>
-          <a:prstGeom prst="rect">
-            <a:avLst/>
-          </a:prstGeom>
-          <a:noFill/>
-          <a:ln w="12700">
-            <a:solidFill>
-              <a:prstClr val="black"/>
-            </a:solidFill>
-          </a:ln>
-        </p:spPr>
-        <p:txBody>
-          <a:bodyPr vert="horz" lIns="91440" tIns="45720" rIns="91440" bIns="45720" rtlCol="0" anchor="ctr"/>
-          <a:lstStyle/>
-          <a:p>
-            <a:endParaRPr lang="en-US"/>
-          </a:p>
-        </p:txBody>
-      </p:sp>
-      <p:sp>
-        <p:nvSpPr>
-          <p:cNvPr id="5" name="Notes Placeholder 4"/>
-          <p:cNvSpPr>
-            <a:spLocks noGrp="1"/>
-          </p:cNvSpPr>
-          <p:nvPr>
-            <p:ph type="body" sz="quarter" idx="3"/>
-          </p:nvPr>
-        </p:nvSpPr>
-        <p:spPr>
-          <a:xfrm>
-            <a:off x="685800" y="4400550"/>
-            <a:ext cx="5486400" cy="3600450"/>
-          </a:xfrm>
-          <a:prstGeom prst="rect">
-            <a:avLst/>
-          </a:prstGeom>
-        </p:spPr>
-        <p:txBody>
-          <a:bodyPr vert="horz" lIns="91440" tIns="45720" rIns="91440" bIns="45720" rtlCol="0"/>
-          <a:lstStyle/>
-          <a:p>
-            <a:pPr lvl="0"/>
-            <a:r>
-              <a:rPr lang="en-US"/>
-              <a:t>Click to edit Master text styles</a:t>
-            </a:r>
-          </a:p>
-          <a:p>
-            <a:pPr lvl="1"/>
-            <a:r>
-              <a:rPr lang="en-US"/>
-              <a:t>Second level</a:t>
-            </a:r>
-          </a:p>
-          <a:p>
-            <a:pPr lvl="2"/>
-            <a:r>
-              <a:rPr lang="en-US"/>
-              <a:t>Third level</a:t>
-            </a:r>
-          </a:p>
-          <a:p>
-            <a:pPr lvl="3"/>
-            <a:r>
-              <a:rPr lang="en-US"/>
-              <a:t>Fourth level</a:t>
-            </a:r>
-          </a:p>
-          <a:p>
-            <a:pPr lvl="4"/>
-            <a:r>
-              <a:rPr lang="en-US"/>
-              <a:t>Fifth level</a:t>
-            </a:r>
-          </a:p>
-        </p:txBody>
-      </p:sp>
-      <p:sp>
-        <p:nvSpPr>
-          <p:cNvPr id="6" name="Footer Placeholder 5"/>
-          <p:cNvSpPr>
-            <a:spLocks noGrp="1"/>
-          </p:cNvSpPr>
-          <p:nvPr>
-            <p:ph type="ftr" sz="quarter" idx="4"/>
-          </p:nvPr>
-        </p:nvSpPr>
-        <p:spPr>
-          <a:xfrm>
-            <a:off x="0" y="8685213"/>
-            <a:ext cx="2971800" cy="458787"/>
-          </a:xfrm>
-          <a:prstGeom prst="rect">
-            <a:avLst/>
-          </a:prstGeom>
-        </p:spPr>
-        <p:txBody>
-          <a:bodyPr vert="horz" lIns="91440" tIns="45720" rIns="91440" bIns="45720" rtlCol="0" anchor="b"/>
-          <a:lstStyle>
-            <a:lvl1pPr algn="l">
-              <a:defRPr sz="1200"/>
-            </a:lvl1pPr>
-          </a:lstStyle>
-          <a:p>
-            <a:endParaRPr lang="en-US"/>
-          </a:p>
-        </p:txBody>
-      </p:sp>
-      <p:sp>
-        <p:nvSpPr>
-          <p:cNvPr id="7" name="Slide Number Placeholder 6"/>
-          <p:cNvSpPr>
-            <a:spLocks noGrp="1"/>
-          </p:cNvSpPr>
-          <p:nvPr>
-            <p:ph type="sldNum" sz="quarter" idx="5"/>
-          </p:nvPr>
-        </p:nvSpPr>
-        <p:spPr>
-          <a:xfrm>
-            <a:off x="3884613" y="8685213"/>
-            <a:ext cx="2971800" cy="458787"/>
-          </a:xfrm>
-          <a:prstGeom prst="rect">
-            <a:avLst/>
-          </a:prstGeom>
-        </p:spPr>
-        <p:txBody>
-          <a:bodyPr vert="horz" lIns="91440" tIns="45720" rIns="91440" bIns="45720" rtlCol="0" anchor="b"/>
-          <a:lstStyle>
-            <a:lvl1pPr algn="r">
-              <a:defRPr sz="1200"/>
-            </a:lvl1pPr>
-          </a:lstStyle>
-          <a:p>
-            <a:fld id="{CE5E9CC1-C706-0F49-92D6-E571CC5EEA8F}" type="slidenum">
-              <a:rPr lang="en-US"/>
-              <a:t>‹#›</a:t>
-            </a:fld>
-            <a:endParaRPr lang="en-US"/>
-          </a:p>
-        </p:txBody>
-      </p:sp>
     </p:spTree>
     <p:extLst>
       <p:ext uri="{BB962C8B-B14F-4D97-AF65-F5344CB8AC3E}">
-        <p14:creationId xmlns:p14="http://schemas.microsoft.com/office/powerpoint/2010/main" val="1024086991"/>
+        <p14:creationId xmlns:p14="http://schemas.microsoft.com/office/powerpoint/2010/main" val="3142775447"/>
       </p:ext>
     </p:extLst>
   </p:cSld>
@@ -504,10 +285,6 @@
           <a:bodyPr/>
           <a:lstStyle/>
           <a:p>
-            <a:r>
-              <a:rPr lang="en-US" dirty="0"/>
-              <a:t/>
-            </a:r>
             <a:endParaRPr lang="en-US" dirty="0"/>
           </a:p>
         </p:txBody>
@@ -592,10 +369,6 @@
           <a:bodyPr/>
           <a:lstStyle/>
           <a:p>
-            <a:r>
-              <a:rPr lang="en-US" dirty="0"/>
-              <a:t/>
-            </a:r>
             <a:endParaRPr lang="en-US" dirty="0"/>
           </a:p>
         </p:txBody>
@@ -680,10 +453,6 @@
           <a:bodyPr/>
           <a:lstStyle/>
           <a:p>
-            <a:r>
-              <a:rPr lang="en-US" dirty="0"/>
-              <a:t/>
-            </a:r>
             <a:endParaRPr lang="en-US" dirty="0"/>
           </a:p>
         </p:txBody>
@@ -768,10 +537,6 @@
           <a:bodyPr/>
           <a:lstStyle/>
           <a:p>
-            <a:r>
-              <a:rPr lang="en-US" dirty="0"/>
-              <a:t/>
-            </a:r>
             <a:endParaRPr lang="en-US" dirty="0"/>
           </a:p>
         </p:txBody>
@@ -856,10 +621,6 @@
           <a:bodyPr/>
           <a:lstStyle/>
           <a:p>
-            <a:r>
-              <a:rPr lang="en-US" dirty="0"/>
-              <a:t/>
-            </a:r>
             <a:endParaRPr lang="en-US" dirty="0"/>
           </a:p>
         </p:txBody>
@@ -933,6 +694,11 @@
 <file path=ppt/slideMasters/slideMaster1.xml><?xml version="1.0" encoding="utf-8"?>
 <p:sldMaster xmlns:a="http://schemas.openxmlformats.org/drawingml/2006/main" xmlns:r="http://schemas.openxmlformats.org/officeDocument/2006/relationships" xmlns:p="http://schemas.openxmlformats.org/presentationml/2006/main">
   <p:cSld>
+    <p:bg>
+      <p:bgRef idx="1001">
+        <a:schemeClr val="bg1"/>
+      </p:bgRef>
+    </p:bg>
     <p:spTree>
       <p:nvGrpSpPr>
         <p:cNvPr id="1" name=""/>
@@ -1215,6 +981,7 @@
         <a:solidFill>
           <a:srgbClr val="FFFFFF"/>
         </a:solidFill>
+        <a:effectLst/>
       </p:bgPr>
     </p:bg>
     <p:spTree>
@@ -1250,6 +1017,13 @@
           </a:solidFill>
           <a:ln/>
         </p:spPr>
+        <p:txBody>
+          <a:bodyPr/>
+          <a:lstStyle/>
+          <a:p>
+            <a:endParaRPr lang="en-ID"/>
+          </a:p>
+        </p:txBody>
       </p:sp>
       <p:sp>
         <p:nvSpPr>
@@ -1270,6 +1044,13 @@
           </a:solidFill>
           <a:ln/>
         </p:spPr>
+        <p:txBody>
+          <a:bodyPr/>
+          <a:lstStyle/>
+          <a:p>
+            <a:endParaRPr lang="en-ID"/>
+          </a:p>
+        </p:txBody>
       </p:sp>
       <p:sp>
         <p:nvSpPr>
@@ -1292,7 +1073,7 @@
           <a:bodyPr wrap="square" lIns="0" tIns="0" rIns="0" bIns="0" rtlCol="0" anchor="ctr"/>
           <a:lstStyle/>
           <a:p>
-            <a:pPr indent="0" marL="0">
+            <a:pPr marL="0" indent="0">
               <a:buNone/>
             </a:pPr>
             <a:r>
@@ -1306,9 +1087,6 @@
               </a:rPr>
               <a:t>belajar</a:t>
             </a:r>
-            <a:pPr indent="0" marL="0">
-              <a:buNone/>
-            </a:pPr>
             <a:r>
               <a:rPr lang="en-US" sz="2000" b="1" dirty="0">
                 <a:solidFill>
@@ -1345,6 +1123,13 @@
           </a:solidFill>
           <a:ln/>
         </p:spPr>
+        <p:txBody>
+          <a:bodyPr/>
+          <a:lstStyle/>
+          <a:p>
+            <a:endParaRPr lang="en-ID"/>
+          </a:p>
+        </p:txBody>
       </p:sp>
       <p:sp>
         <p:nvSpPr>
@@ -1367,7 +1152,7 @@
           <a:bodyPr wrap="square" lIns="0" tIns="0" rIns="0" bIns="0" rtlCol="0" anchor="ctr"/>
           <a:lstStyle/>
           <a:p>
-            <a:pPr algn="ctr" indent="0" marL="0">
+            <a:pPr marL="0" indent="0" algn="ctr">
               <a:buNone/>
             </a:pPr>
             <a:r>
@@ -1406,11 +1191,11 @@
           <a:bodyPr wrap="square" lIns="0" tIns="0" rIns="0" bIns="0" rtlCol="0" anchor="ctr"/>
           <a:lstStyle/>
           <a:p>
-            <a:pPr indent="0" marL="0">
-              <a:buNone/>
-            </a:pPr>
-            <a:r>
-              <a:rPr lang="en-US" sz="1300" b="1" spc="100" kern="0" dirty="0">
+            <a:pPr marL="0" indent="0">
+              <a:buNone/>
+            </a:pPr>
+            <a:r>
+              <a:rPr lang="en-US" sz="1300" b="1" kern="0" spc="100" dirty="0">
                 <a:solidFill>
                   <a:srgbClr val="8B7CF6"/>
                 </a:solidFill>
@@ -1445,7 +1230,7 @@
           <a:bodyPr wrap="square" lIns="0" tIns="0" rIns="0" bIns="0" rtlCol="0" anchor="ctr"/>
           <a:lstStyle/>
           <a:p>
-            <a:pPr indent="0" marL="0">
+            <a:pPr marL="0" indent="0">
               <a:buNone/>
             </a:pPr>
             <a:r>
@@ -1484,7 +1269,7 @@
           <a:bodyPr wrap="square" lIns="0" tIns="0" rIns="0" bIns="0" rtlCol="0" anchor="ctr"/>
           <a:lstStyle/>
           <a:p>
-            <a:pPr indent="0" marL="0">
+            <a:pPr marL="0" indent="0">
               <a:buNone/>
             </a:pPr>
             <a:r>
@@ -1496,7 +1281,40 @@
                 <a:ea typeface="Arial" pitchFamily="34" charset="-122"/>
                 <a:cs typeface="Arial" pitchFamily="34" charset="-120"/>
               </a:rPr>
-              <a:t>Untuk siapa produk ini, dan kenapa harus pilih kamu — 10 menit</a:t>
+              <a:t>Untuk siapa produk ini, dan kenapa harus </a:t>
+            </a:r>
+            <a:r>
+              <a:rPr lang="en-US" sz="1550" dirty="0" err="1">
+                <a:solidFill>
+                  <a:srgbClr val="B7C0D8"/>
+                </a:solidFill>
+                <a:latin typeface="Arial" pitchFamily="34" charset="0"/>
+                <a:ea typeface="Arial" pitchFamily="34" charset="-122"/>
+                <a:cs typeface="Arial" pitchFamily="34" charset="-120"/>
+              </a:rPr>
+              <a:t>pilih</a:t>
+            </a:r>
+            <a:r>
+              <a:rPr lang="en-US" sz="1550" dirty="0">
+                <a:solidFill>
+                  <a:srgbClr val="B7C0D8"/>
+                </a:solidFill>
+                <a:latin typeface="Arial" pitchFamily="34" charset="0"/>
+                <a:ea typeface="Arial" pitchFamily="34" charset="-122"/>
+                <a:cs typeface="Arial" pitchFamily="34" charset="-120"/>
+              </a:rPr>
+              <a:t> </a:t>
+            </a:r>
+            <a:r>
+              <a:rPr lang="en-US" sz="1550" dirty="0" err="1">
+                <a:solidFill>
+                  <a:srgbClr val="B7C0D8"/>
+                </a:solidFill>
+                <a:latin typeface="Arial" pitchFamily="34" charset="0"/>
+                <a:ea typeface="Arial" pitchFamily="34" charset="-122"/>
+                <a:cs typeface="Arial" pitchFamily="34" charset="-120"/>
+              </a:rPr>
+              <a:t>kamu — 10 menit</a:t>
             </a:r>
             <a:endParaRPr lang="en-US" sz="1550" dirty="0"/>
           </a:p>
@@ -1518,6 +1336,7 @@
         <a:solidFill>
           <a:srgbClr val="FFFFFF"/>
         </a:solidFill>
+        <a:effectLst/>
       </p:bgPr>
     </p:bg>
     <p:spTree>
@@ -1553,6 +1372,13 @@
           </a:solidFill>
           <a:ln/>
         </p:spPr>
+        <p:txBody>
+          <a:bodyPr/>
+          <a:lstStyle/>
+          <a:p>
+            <a:endParaRPr lang="en-ID"/>
+          </a:p>
+        </p:txBody>
       </p:sp>
       <p:sp>
         <p:nvSpPr>
@@ -1573,6 +1399,13 @@
           </a:solidFill>
           <a:ln/>
         </p:spPr>
+        <p:txBody>
+          <a:bodyPr/>
+          <a:lstStyle/>
+          <a:p>
+            <a:endParaRPr lang="en-ID"/>
+          </a:p>
+        </p:txBody>
       </p:sp>
       <p:sp>
         <p:nvSpPr>
@@ -1595,7 +1428,7 @@
           <a:bodyPr wrap="square" lIns="0" tIns="0" rIns="0" bIns="0" rtlCol="0" anchor="ctr"/>
           <a:lstStyle/>
           <a:p>
-            <a:pPr indent="0" marL="0">
+            <a:pPr marL="0" indent="0">
               <a:buNone/>
             </a:pPr>
             <a:r>
@@ -1609,9 +1442,6 @@
               </a:rPr>
               <a:t>belajar</a:t>
             </a:r>
-            <a:pPr indent="0" marL="0">
-              <a:buNone/>
-            </a:pPr>
             <a:r>
               <a:rPr lang="en-US" sz="2000" b="1" dirty="0">
                 <a:solidFill>
@@ -1648,7 +1478,7 @@
           <a:bodyPr wrap="square" lIns="0" tIns="0" rIns="0" bIns="0" rtlCol="0" anchor="ctr"/>
           <a:lstStyle/>
           <a:p>
-            <a:pPr algn="r" indent="0" marL="0">
+            <a:pPr marL="0" indent="0" algn="r">
               <a:buNone/>
             </a:pPr>
             <a:r>
@@ -1687,11 +1517,11 @@
           <a:bodyPr wrap="square" lIns="0" tIns="0" rIns="0" bIns="0" rtlCol="0" anchor="ctr"/>
           <a:lstStyle/>
           <a:p>
-            <a:pPr indent="0" marL="0">
-              <a:buNone/>
-            </a:pPr>
-            <a:r>
-              <a:rPr lang="en-US" sz="1250" b="1" spc="100" kern="0" dirty="0">
+            <a:pPr marL="0" indent="0">
+              <a:buNone/>
+            </a:pPr>
+            <a:r>
+              <a:rPr lang="en-US" sz="1250" b="1" kern="0" spc="100" dirty="0">
                 <a:solidFill>
                   <a:srgbClr val="4B36C7"/>
                 </a:solidFill>
@@ -1726,7 +1556,7 @@
           <a:bodyPr wrap="square" lIns="0" tIns="0" rIns="0" bIns="0" rtlCol="0" anchor="ctr"/>
           <a:lstStyle/>
           <a:p>
-            <a:pPr indent="0" marL="0">
+            <a:pPr marL="0" indent="0">
               <a:buNone/>
             </a:pPr>
             <a:r>
@@ -1770,6 +1600,13 @@
             <a:prstDash val="solid"/>
           </a:ln>
         </p:spPr>
+        <p:txBody>
+          <a:bodyPr/>
+          <a:lstStyle/>
+          <a:p>
+            <a:endParaRPr lang="en-ID"/>
+          </a:p>
+        </p:txBody>
       </p:sp>
       <p:sp>
         <p:nvSpPr>
@@ -1792,11 +1629,11 @@
           <a:bodyPr wrap="square" lIns="0" tIns="0" rIns="0" bIns="0" rtlCol="0" anchor="ctr"/>
           <a:lstStyle/>
           <a:p>
-            <a:pPr indent="0" marL="0">
-              <a:buNone/>
-            </a:pPr>
-            <a:r>
-              <a:rPr lang="en-US" sz="1200" b="1" spc="50" kern="0" dirty="0">
+            <a:pPr marL="0" indent="0">
+              <a:buNone/>
+            </a:pPr>
+            <a:r>
+              <a:rPr lang="en-US" sz="1200" b="1" kern="0" spc="50" dirty="0">
                 <a:solidFill>
                   <a:srgbClr val="6B7280"/>
                 </a:solidFill>
@@ -1930,6 +1767,13 @@
             <a:prstDash val="solid"/>
           </a:ln>
         </p:spPr>
+        <p:txBody>
+          <a:bodyPr/>
+          <a:lstStyle/>
+          <a:p>
+            <a:endParaRPr lang="en-ID"/>
+          </a:p>
+        </p:txBody>
       </p:sp>
       <p:sp>
         <p:nvSpPr>
@@ -1952,11 +1796,11 @@
           <a:bodyPr wrap="square" lIns="0" tIns="0" rIns="0" bIns="0" rtlCol="0" anchor="ctr"/>
           <a:lstStyle/>
           <a:p>
-            <a:pPr indent="0" marL="0">
-              <a:buNone/>
-            </a:pPr>
-            <a:r>
-              <a:rPr lang="en-US" sz="1200" b="1" spc="50" kern="0" dirty="0">
+            <a:pPr marL="0" indent="0">
+              <a:buNone/>
+            </a:pPr>
+            <a:r>
+              <a:rPr lang="en-US" sz="1200" b="1" kern="0" spc="50" dirty="0">
                 <a:solidFill>
                   <a:srgbClr val="4B36C7"/>
                 </a:solidFill>
@@ -2085,11 +1929,11 @@
           <a:bodyPr wrap="square" lIns="0" tIns="0" rIns="0" bIns="0" rtlCol="0" anchor="ctr"/>
           <a:lstStyle/>
           <a:p>
-            <a:pPr indent="0" marL="0">
-              <a:buNone/>
-            </a:pPr>
-            <a:r>
-              <a:rPr lang="en-US" sz="1250" b="1" spc="50" kern="0" dirty="0">
+            <a:pPr marL="0" indent="0">
+              <a:buNone/>
+            </a:pPr>
+            <a:r>
+              <a:rPr lang="en-US" sz="1250" b="1" kern="0" spc="50" dirty="0">
                 <a:solidFill>
                   <a:srgbClr val="4B36C7"/>
                 </a:solidFill>
@@ -2129,6 +1973,13 @@
             <a:prstDash val="solid"/>
           </a:ln>
         </p:spPr>
+        <p:txBody>
+          <a:bodyPr/>
+          <a:lstStyle/>
+          <a:p>
+            <a:endParaRPr lang="en-ID"/>
+          </a:p>
+        </p:txBody>
       </p:sp>
       <p:sp>
         <p:nvSpPr>
@@ -2151,7 +2002,7 @@
           <a:bodyPr wrap="square" lIns="0" tIns="0" rIns="0" bIns="0" rtlCol="0" anchor="ctr"/>
           <a:lstStyle/>
           <a:p>
-            <a:pPr algn="ctr" indent="0" marL="0">
+            <a:pPr marL="0" indent="0" algn="ctr">
               <a:lnSpc>
                 <a:spcPct val="105000"/>
               </a:lnSpc>
@@ -2171,7 +2022,7 @@
             <a:endParaRPr lang="en-US" sz="1050" dirty="0"/>
           </a:p>
           <a:p>
-            <a:pPr algn="ctr" indent="0" marL="0">
+            <a:pPr marL="0" indent="0" algn="ctr">
               <a:lnSpc>
                 <a:spcPct val="105000"/>
               </a:lnSpc>
@@ -2218,6 +2069,13 @@
             <a:prstDash val="solid"/>
           </a:ln>
         </p:spPr>
+        <p:txBody>
+          <a:bodyPr/>
+          <a:lstStyle/>
+          <a:p>
+            <a:endParaRPr lang="en-ID"/>
+          </a:p>
+        </p:txBody>
       </p:sp>
       <p:sp>
         <p:nvSpPr>
@@ -2240,7 +2098,7 @@
           <a:bodyPr wrap="square" lIns="0" tIns="0" rIns="0" bIns="0" rtlCol="0" anchor="ctr"/>
           <a:lstStyle/>
           <a:p>
-            <a:pPr algn="ctr" indent="0" marL="0">
+            <a:pPr marL="0" indent="0" algn="ctr">
               <a:lnSpc>
                 <a:spcPct val="105000"/>
               </a:lnSpc>
@@ -2260,7 +2118,7 @@
             <a:endParaRPr lang="en-US" sz="1050" dirty="0"/>
           </a:p>
           <a:p>
-            <a:pPr algn="ctr" indent="0" marL="0">
+            <a:pPr marL="0" indent="0" algn="ctr">
               <a:lnSpc>
                 <a:spcPct val="105000"/>
               </a:lnSpc>
@@ -2307,6 +2165,13 @@
             <a:prstDash val="solid"/>
           </a:ln>
         </p:spPr>
+        <p:txBody>
+          <a:bodyPr/>
+          <a:lstStyle/>
+          <a:p>
+            <a:endParaRPr lang="en-ID"/>
+          </a:p>
+        </p:txBody>
       </p:sp>
       <p:sp>
         <p:nvSpPr>
@@ -2329,7 +2194,7 @@
           <a:bodyPr wrap="square" lIns="0" tIns="0" rIns="0" bIns="0" rtlCol="0" anchor="ctr"/>
           <a:lstStyle/>
           <a:p>
-            <a:pPr algn="ctr" indent="0" marL="0">
+            <a:pPr marL="0" indent="0" algn="ctr">
               <a:lnSpc>
                 <a:spcPct val="105000"/>
               </a:lnSpc>
@@ -2349,7 +2214,7 @@
             <a:endParaRPr lang="en-US" sz="1050" dirty="0"/>
           </a:p>
           <a:p>
-            <a:pPr algn="ctr" indent="0" marL="0">
+            <a:pPr marL="0" indent="0" algn="ctr">
               <a:lnSpc>
                 <a:spcPct val="105000"/>
               </a:lnSpc>
@@ -2396,6 +2261,13 @@
             <a:prstDash val="solid"/>
           </a:ln>
         </p:spPr>
+        <p:txBody>
+          <a:bodyPr/>
+          <a:lstStyle/>
+          <a:p>
+            <a:endParaRPr lang="en-ID"/>
+          </a:p>
+        </p:txBody>
       </p:sp>
       <p:sp>
         <p:nvSpPr>
@@ -2418,7 +2290,7 @@
           <a:bodyPr wrap="square" lIns="0" tIns="0" rIns="0" bIns="0" rtlCol="0" anchor="ctr"/>
           <a:lstStyle/>
           <a:p>
-            <a:pPr algn="ctr" indent="0" marL="0">
+            <a:pPr marL="0" indent="0" algn="ctr">
               <a:lnSpc>
                 <a:spcPct val="105000"/>
               </a:lnSpc>
@@ -2438,7 +2310,7 @@
             <a:endParaRPr lang="en-US" sz="1050" dirty="0"/>
           </a:p>
           <a:p>
-            <a:pPr algn="ctr" indent="0" marL="0">
+            <a:pPr marL="0" indent="0" algn="ctr">
               <a:lnSpc>
                 <a:spcPct val="105000"/>
               </a:lnSpc>
@@ -2475,6 +2347,7 @@
         <a:solidFill>
           <a:srgbClr val="FFFFFF"/>
         </a:solidFill>
+        <a:effectLst/>
       </p:bgPr>
     </p:bg>
     <p:spTree>
@@ -2510,6 +2383,13 @@
           </a:solidFill>
           <a:ln/>
         </p:spPr>
+        <p:txBody>
+          <a:bodyPr/>
+          <a:lstStyle/>
+          <a:p>
+            <a:endParaRPr lang="en-ID"/>
+          </a:p>
+        </p:txBody>
       </p:sp>
       <p:sp>
         <p:nvSpPr>
@@ -2530,6 +2410,13 @@
           </a:solidFill>
           <a:ln/>
         </p:spPr>
+        <p:txBody>
+          <a:bodyPr/>
+          <a:lstStyle/>
+          <a:p>
+            <a:endParaRPr lang="en-ID"/>
+          </a:p>
+        </p:txBody>
       </p:sp>
       <p:sp>
         <p:nvSpPr>
@@ -2552,7 +2439,7 @@
           <a:bodyPr wrap="square" lIns="0" tIns="0" rIns="0" bIns="0" rtlCol="0" anchor="ctr"/>
           <a:lstStyle/>
           <a:p>
-            <a:pPr indent="0" marL="0">
+            <a:pPr marL="0" indent="0">
               <a:buNone/>
             </a:pPr>
             <a:r>
@@ -2566,9 +2453,6 @@
               </a:rPr>
               <a:t>belajar</a:t>
             </a:r>
-            <a:pPr indent="0" marL="0">
-              <a:buNone/>
-            </a:pPr>
             <a:r>
               <a:rPr lang="en-US" sz="2000" b="1" dirty="0">
                 <a:solidFill>
@@ -2605,7 +2489,7 @@
           <a:bodyPr wrap="square" lIns="0" tIns="0" rIns="0" bIns="0" rtlCol="0" anchor="ctr"/>
           <a:lstStyle/>
           <a:p>
-            <a:pPr algn="r" indent="0" marL="0">
+            <a:pPr marL="0" indent="0" algn="r">
               <a:buNone/>
             </a:pPr>
             <a:r>
@@ -2644,11 +2528,11 @@
           <a:bodyPr wrap="square" lIns="0" tIns="0" rIns="0" bIns="0" rtlCol="0" anchor="ctr"/>
           <a:lstStyle/>
           <a:p>
-            <a:pPr indent="0" marL="0">
-              <a:buNone/>
-            </a:pPr>
-            <a:r>
-              <a:rPr lang="en-US" sz="1250" b="1" spc="100" kern="0" dirty="0">
+            <a:pPr marL="0" indent="0">
+              <a:buNone/>
+            </a:pPr>
+            <a:r>
+              <a:rPr lang="en-US" sz="1250" b="1" kern="0" spc="100" dirty="0">
                 <a:solidFill>
                   <a:srgbClr val="4B36C7"/>
                 </a:solidFill>
@@ -2683,7 +2567,7 @@
           <a:bodyPr wrap="square" lIns="0" tIns="0" rIns="0" bIns="0" rtlCol="0" anchor="ctr"/>
           <a:lstStyle/>
           <a:p>
-            <a:pPr indent="0" marL="0">
+            <a:pPr marL="0" indent="0">
               <a:buNone/>
             </a:pPr>
             <a:r>
@@ -2727,6 +2611,13 @@
             <a:prstDash val="solid"/>
           </a:ln>
         </p:spPr>
+        <p:txBody>
+          <a:bodyPr/>
+          <a:lstStyle/>
+          <a:p>
+            <a:endParaRPr lang="en-ID"/>
+          </a:p>
+        </p:txBody>
       </p:sp>
       <p:sp>
         <p:nvSpPr>
@@ -2749,11 +2640,11 @@
           <a:bodyPr wrap="square" lIns="0" tIns="0" rIns="0" bIns="0" rtlCol="0" anchor="ctr"/>
           <a:lstStyle/>
           <a:p>
-            <a:pPr indent="0" marL="0">
-              <a:buNone/>
-            </a:pPr>
-            <a:r>
-              <a:rPr lang="en-US" sz="1200" b="1" spc="50" kern="0" dirty="0">
+            <a:pPr marL="0" indent="0">
+              <a:buNone/>
+            </a:pPr>
+            <a:r>
+              <a:rPr lang="en-US" sz="1200" b="1" kern="0" spc="50" dirty="0">
                 <a:solidFill>
                   <a:srgbClr val="6B7280"/>
                 </a:solidFill>
@@ -2788,7 +2679,7 @@
           <a:bodyPr wrap="square" lIns="0" tIns="0" rIns="0" bIns="0" rtlCol="0" anchor="t"/>
           <a:lstStyle/>
           <a:p>
-            <a:pPr indent="0" marL="0">
+            <a:pPr marL="0" indent="0">
               <a:lnSpc>
                 <a:spcPct val="115000"/>
               </a:lnSpc>
@@ -2830,7 +2721,7 @@
           <a:bodyPr wrap="square" lIns="0" tIns="0" rIns="0" bIns="0" rtlCol="0" anchor="t"/>
           <a:lstStyle/>
           <a:p>
-            <a:pPr indent="0" marL="0">
+            <a:pPr marL="0" indent="0">
               <a:lnSpc>
                 <a:spcPct val="110000"/>
               </a:lnSpc>
@@ -2877,6 +2768,13 @@
             <a:prstDash val="solid"/>
           </a:ln>
         </p:spPr>
+        <p:txBody>
+          <a:bodyPr/>
+          <a:lstStyle/>
+          <a:p>
+            <a:endParaRPr lang="en-ID"/>
+          </a:p>
+        </p:txBody>
       </p:sp>
       <p:sp>
         <p:nvSpPr>
@@ -2899,11 +2797,11 @@
           <a:bodyPr wrap="square" lIns="0" tIns="0" rIns="0" bIns="0" rtlCol="0" anchor="ctr"/>
           <a:lstStyle/>
           <a:p>
-            <a:pPr indent="0" marL="0">
-              <a:buNone/>
-            </a:pPr>
-            <a:r>
-              <a:rPr lang="en-US" sz="1200" b="1" spc="50" kern="0" dirty="0">
+            <a:pPr marL="0" indent="0">
+              <a:buNone/>
+            </a:pPr>
+            <a:r>
+              <a:rPr lang="en-US" sz="1200" b="1" kern="0" spc="50" dirty="0">
                 <a:solidFill>
                   <a:srgbClr val="4B36C7"/>
                 </a:solidFill>
@@ -2938,7 +2836,7 @@
           <a:bodyPr wrap="square" lIns="0" tIns="0" rIns="0" bIns="0" rtlCol="0" anchor="t"/>
           <a:lstStyle/>
           <a:p>
-            <a:pPr indent="0" marL="0">
+            <a:pPr marL="0" indent="0">
               <a:lnSpc>
                 <a:spcPct val="115000"/>
               </a:lnSpc>
@@ -2980,7 +2878,7 @@
           <a:bodyPr wrap="square" lIns="0" tIns="0" rIns="0" bIns="0" rtlCol="0" anchor="t"/>
           <a:lstStyle/>
           <a:p>
-            <a:pPr indent="0" marL="0">
+            <a:pPr marL="0" indent="0">
               <a:lnSpc>
                 <a:spcPct val="110000"/>
               </a:lnSpc>
@@ -3017,6 +2915,7 @@
         <a:solidFill>
           <a:srgbClr val="FFFFFF"/>
         </a:solidFill>
+        <a:effectLst/>
       </p:bgPr>
     </p:bg>
     <p:spTree>
@@ -3052,6 +2951,13 @@
           </a:solidFill>
           <a:ln/>
         </p:spPr>
+        <p:txBody>
+          <a:bodyPr/>
+          <a:lstStyle/>
+          <a:p>
+            <a:endParaRPr lang="en-ID"/>
+          </a:p>
+        </p:txBody>
       </p:sp>
       <p:sp>
         <p:nvSpPr>
@@ -3072,6 +2978,13 @@
           </a:solidFill>
           <a:ln/>
         </p:spPr>
+        <p:txBody>
+          <a:bodyPr/>
+          <a:lstStyle/>
+          <a:p>
+            <a:endParaRPr lang="en-ID"/>
+          </a:p>
+        </p:txBody>
       </p:sp>
       <p:sp>
         <p:nvSpPr>
@@ -3094,7 +3007,7 @@
           <a:bodyPr wrap="square" lIns="0" tIns="0" rIns="0" bIns="0" rtlCol="0" anchor="ctr"/>
           <a:lstStyle/>
           <a:p>
-            <a:pPr indent="0" marL="0">
+            <a:pPr marL="0" indent="0">
               <a:buNone/>
             </a:pPr>
             <a:r>
@@ -3108,9 +3021,6 @@
               </a:rPr>
               <a:t>belajar</a:t>
             </a:r>
-            <a:pPr indent="0" marL="0">
-              <a:buNone/>
-            </a:pPr>
             <a:r>
               <a:rPr lang="en-US" sz="2000" b="1" dirty="0">
                 <a:solidFill>
@@ -3147,7 +3057,7 @@
           <a:bodyPr wrap="square" lIns="0" tIns="0" rIns="0" bIns="0" rtlCol="0" anchor="ctr"/>
           <a:lstStyle/>
           <a:p>
-            <a:pPr algn="r" indent="0" marL="0">
+            <a:pPr marL="0" indent="0" algn="r">
               <a:buNone/>
             </a:pPr>
             <a:r>
@@ -3186,11 +3096,11 @@
           <a:bodyPr wrap="square" lIns="0" tIns="0" rIns="0" bIns="0" rtlCol="0" anchor="ctr"/>
           <a:lstStyle/>
           <a:p>
-            <a:pPr indent="0" marL="0">
-              <a:buNone/>
-            </a:pPr>
-            <a:r>
-              <a:rPr lang="en-US" sz="1250" b="1" spc="100" kern="0" dirty="0">
+            <a:pPr marL="0" indent="0">
+              <a:buNone/>
+            </a:pPr>
+            <a:r>
+              <a:rPr lang="en-US" sz="1250" b="1" kern="0" spc="100" dirty="0">
                 <a:solidFill>
                   <a:srgbClr val="4B36C7"/>
                 </a:solidFill>
@@ -3225,7 +3135,7 @@
           <a:bodyPr wrap="square" lIns="0" tIns="0" rIns="0" bIns="0" rtlCol="0" anchor="ctr"/>
           <a:lstStyle/>
           <a:p>
-            <a:pPr indent="0" marL="0">
+            <a:pPr marL="0" indent="0">
               <a:buNone/>
             </a:pPr>
             <a:r>
@@ -3262,6 +3172,13 @@
           </a:solidFill>
           <a:ln/>
         </p:spPr>
+        <p:txBody>
+          <a:bodyPr/>
+          <a:lstStyle/>
+          <a:p>
+            <a:endParaRPr lang="en-ID"/>
+          </a:p>
+        </p:txBody>
       </p:sp>
       <p:sp>
         <p:nvSpPr>
@@ -3284,7 +3201,7 @@
           <a:bodyPr wrap="square" lIns="0" tIns="0" rIns="0" bIns="0" rtlCol="0" anchor="ctr"/>
           <a:lstStyle/>
           <a:p>
-            <a:pPr algn="ctr" indent="0" marL="0">
+            <a:pPr marL="0" indent="0" algn="ctr">
               <a:buNone/>
             </a:pPr>
             <a:r>
@@ -3323,7 +3240,7 @@
           <a:bodyPr wrap="square" lIns="0" tIns="0" rIns="0" bIns="0" rtlCol="0" anchor="t"/>
           <a:lstStyle/>
           <a:p>
-            <a:pPr indent="0" marL="0">
+            <a:pPr marL="0" indent="0">
               <a:lnSpc>
                 <a:spcPct val="112000"/>
               </a:lnSpc>
@@ -3340,13 +3257,126 @@
               </a:rPr>
               <a:t>Punya Bisnis Sendiri? —  </a:t>
             </a:r>
-            <a:pPr indent="0" marL="0">
+            <a:r>
+              <a:rPr lang="en-US" sz="1250" dirty="0">
+                <a:solidFill>
+                  <a:srgbClr val="23283A"/>
+                </a:solidFill>
+                <a:latin typeface="Arial" pitchFamily="34" charset="0"/>
+                <a:ea typeface="Arial" pitchFamily="34" charset="-122"/>
+                <a:cs typeface="Arial" pitchFamily="34" charset="-120"/>
+              </a:rPr>
+              <a:t>ganti data kompetitor di cm-template-kompetitor.txt — harga, rating, ulasan terburuk 3 kompetitor nyata. Pakai contoh Dapur Rara? Lewati ke langkah 3</a:t>
+            </a:r>
+            <a:endParaRPr lang="en-US" sz="1300" dirty="0"/>
+          </a:p>
+        </p:txBody>
+      </p:sp>
+      <p:sp>
+        <p:nvSpPr>
+          <p:cNvPr id="11" name="Shape 9"/>
+          <p:cNvSpPr/>
+          <p:nvPr/>
+        </p:nvSpPr>
+        <p:spPr>
+          <a:xfrm>
+            <a:off x="548640" y="2743200"/>
+            <a:ext cx="329184" cy="329184"/>
+          </a:xfrm>
+          <a:prstGeom prst="ellipse">
+            <a:avLst/>
+          </a:prstGeom>
+          <a:solidFill>
+            <a:srgbClr val="6849F6"/>
+          </a:solidFill>
+          <a:ln/>
+        </p:spPr>
+        <p:txBody>
+          <a:bodyPr/>
+          <a:lstStyle/>
+          <a:p>
+            <a:endParaRPr lang="en-ID"/>
+          </a:p>
+        </p:txBody>
+      </p:sp>
+      <p:sp>
+        <p:nvSpPr>
+          <p:cNvPr id="12" name="Text 10"/>
+          <p:cNvSpPr/>
+          <p:nvPr/>
+        </p:nvSpPr>
+        <p:spPr>
+          <a:xfrm>
+            <a:off x="548640" y="2743200"/>
+            <a:ext cx="329184" cy="329184"/>
+          </a:xfrm>
+          <a:prstGeom prst="rect">
+            <a:avLst/>
+          </a:prstGeom>
+          <a:noFill/>
+          <a:ln/>
+        </p:spPr>
+        <p:txBody>
+          <a:bodyPr wrap="square" lIns="0" tIns="0" rIns="0" bIns="0" rtlCol="0" anchor="ctr"/>
+          <a:lstStyle/>
+          <a:p>
+            <a:pPr marL="0" indent="0" algn="ctr">
+              <a:buNone/>
+            </a:pPr>
+            <a:r>
+              <a:rPr lang="en-US" sz="1300" b="1" dirty="0">
+                <a:solidFill>
+                  <a:srgbClr val="FFFFFF"/>
+                </a:solidFill>
+                <a:latin typeface="Arial" pitchFamily="34" charset="0"/>
+                <a:ea typeface="Arial" pitchFamily="34" charset="-122"/>
+                <a:cs typeface="Arial" pitchFamily="34" charset="-120"/>
+              </a:rPr>
+              <a:t>2</a:t>
+            </a:r>
+            <a:endParaRPr lang="en-US" sz="1300" dirty="0"/>
+          </a:p>
+        </p:txBody>
+      </p:sp>
+      <p:sp>
+        <p:nvSpPr>
+          <p:cNvPr id="13" name="Text 11"/>
+          <p:cNvSpPr/>
+          <p:nvPr/>
+        </p:nvSpPr>
+        <p:spPr>
+          <a:xfrm>
+            <a:off x="1024128" y="2715768"/>
+            <a:ext cx="10616184" cy="457200"/>
+          </a:xfrm>
+          <a:prstGeom prst="rect">
+            <a:avLst/>
+          </a:prstGeom>
+          <a:noFill/>
+          <a:ln/>
+        </p:spPr>
+        <p:txBody>
+          <a:bodyPr wrap="square" lIns="0" tIns="0" rIns="0" bIns="0" rtlCol="0" anchor="t"/>
+          <a:lstStyle/>
+          <a:p>
+            <a:pPr marL="0" indent="0">
               <a:lnSpc>
                 <a:spcPct val="112000"/>
               </a:lnSpc>
               <a:buNone/>
             </a:pPr>
             <a:r>
+              <a:rPr lang="en-US" sz="1300" b="1" dirty="0">
+                <a:solidFill>
+                  <a:srgbClr val="0D1321"/>
+                </a:solidFill>
+                <a:latin typeface="Arial" pitchFamily="34" charset="0"/>
+                <a:ea typeface="Arial" pitchFamily="34" charset="-122"/>
+                <a:cs typeface="Arial" pitchFamily="34" charset="-120"/>
+              </a:rPr>
+              <a:t>Ganti Data Bisnismu —  </a:t>
+            </a:r>
+            <a:r>
               <a:rPr lang="en-US" sz="1250" dirty="0">
                 <a:solidFill>
                   <a:srgbClr val="23283A"/>
@@ -3355,7 +3385,7 @@
                 <a:ea typeface="Arial" pitchFamily="34" charset="-122"/>
                 <a:cs typeface="Arial" pitchFamily="34" charset="-120"/>
               </a:rPr>
-              <a:t>ganti data kompetitor di cm-template-kompetitor.txt — harga, rating, ulasan terburuk 3 kompetitor nyata. Pakai contoh Dapur Rara? Lewati ke langkah 3</a:t>
+              <a:t>isi juga palet warna &amp; mood visual — tanya 3 pelanggan lama kenapa mereka beli dari kamu</a:t>
             </a:r>
             <a:endParaRPr lang="en-US" sz="1300" dirty="0"/>
           </a:p>
@@ -3363,13 +3393,13 @@
       </p:sp>
       <p:sp>
         <p:nvSpPr>
-          <p:cNvPr id="11" name="Shape 9"/>
-          <p:cNvSpPr/>
-          <p:nvPr/>
-        </p:nvSpPr>
-        <p:spPr>
-          <a:xfrm>
-            <a:off x="548640" y="2743200"/>
+          <p:cNvPr id="14" name="Shape 12"/>
+          <p:cNvSpPr/>
+          <p:nvPr/>
+        </p:nvSpPr>
+        <p:spPr>
+          <a:xfrm>
+            <a:off x="548640" y="3273552"/>
             <a:ext cx="329184" cy="329184"/>
           </a:xfrm>
           <a:prstGeom prst="ellipse">
@@ -3380,16 +3410,23 @@
           </a:solidFill>
           <a:ln/>
         </p:spPr>
-      </p:sp>
-      <p:sp>
-        <p:nvSpPr>
-          <p:cNvPr id="12" name="Text 10"/>
-          <p:cNvSpPr/>
-          <p:nvPr/>
-        </p:nvSpPr>
-        <p:spPr>
-          <a:xfrm>
-            <a:off x="548640" y="2743200"/>
+        <p:txBody>
+          <a:bodyPr/>
+          <a:lstStyle/>
+          <a:p>
+            <a:endParaRPr lang="en-ID"/>
+          </a:p>
+        </p:txBody>
+      </p:sp>
+      <p:sp>
+        <p:nvSpPr>
+          <p:cNvPr id="15" name="Text 13"/>
+          <p:cNvSpPr/>
+          <p:nvPr/>
+        </p:nvSpPr>
+        <p:spPr>
+          <a:xfrm>
+            <a:off x="548640" y="3273552"/>
             <a:ext cx="329184" cy="329184"/>
           </a:xfrm>
           <a:prstGeom prst="rect">
@@ -3402,7 +3439,7 @@
           <a:bodyPr wrap="square" lIns="0" tIns="0" rIns="0" bIns="0" rtlCol="0" anchor="ctr"/>
           <a:lstStyle/>
           <a:p>
-            <a:pPr algn="ctr" indent="0" marL="0">
+            <a:pPr marL="0" indent="0" algn="ctr">
               <a:buNone/>
             </a:pPr>
             <a:r>
@@ -3414,7 +3451,7 @@
                 <a:ea typeface="Arial" pitchFamily="34" charset="-122"/>
                 <a:cs typeface="Arial" pitchFamily="34" charset="-120"/>
               </a:rPr>
-              <a:t>2</a:t>
+              <a:t>3</a:t>
             </a:r>
             <a:endParaRPr lang="en-US" sz="1300" dirty="0"/>
           </a:p>
@@ -3422,13 +3459,13 @@
       </p:sp>
       <p:sp>
         <p:nvSpPr>
-          <p:cNvPr id="13" name="Text 11"/>
-          <p:cNvSpPr/>
-          <p:nvPr/>
-        </p:nvSpPr>
-        <p:spPr>
-          <a:xfrm>
-            <a:off x="1024128" y="2715768"/>
+          <p:cNvPr id="16" name="Text 14"/>
+          <p:cNvSpPr/>
+          <p:nvPr/>
+        </p:nvSpPr>
+        <p:spPr>
+          <a:xfrm>
+            <a:off x="1024128" y="3246120"/>
             <a:ext cx="10616184" cy="457200"/>
           </a:xfrm>
           <a:prstGeom prst="rect">
@@ -3441,7 +3478,7 @@
           <a:bodyPr wrap="square" lIns="0" tIns="0" rIns="0" bIns="0" rtlCol="0" anchor="t"/>
           <a:lstStyle/>
           <a:p>
-            <a:pPr indent="0" marL="0">
+            <a:pPr marL="0" indent="0">
               <a:lnSpc>
                 <a:spcPct val="112000"/>
               </a:lnSpc>
@@ -3456,15 +3493,128 @@
                 <a:ea typeface="Arial" pitchFamily="34" charset="-122"/>
                 <a:cs typeface="Arial" pitchFamily="34" charset="-120"/>
               </a:rPr>
-              <a:t>Ganti Data Bisnismu —  </a:t>
-            </a:r>
-            <a:pPr indent="0" marL="0">
+              <a:t>Generate ke Claude —  </a:t>
+            </a:r>
+            <a:r>
+              <a:rPr lang="en-US" sz="1250" dirty="0">
+                <a:solidFill>
+                  <a:srgbClr val="23283A"/>
+                </a:solidFill>
+                <a:latin typeface="Arial" pitchFamily="34" charset="0"/>
+                <a:ea typeface="Arial" pitchFamily="34" charset="-122"/>
+                <a:cs typeface="Arial" pitchFamily="34" charset="-120"/>
+              </a:rPr>
+              <a:t>copy bagian yang ditandai PASTE KE CLAUDE saja (bukan seluruh file) — prompt sudah ada di dalamnya</a:t>
+            </a:r>
+            <a:endParaRPr lang="en-US" sz="1300" dirty="0"/>
+          </a:p>
+        </p:txBody>
+      </p:sp>
+      <p:sp>
+        <p:nvSpPr>
+          <p:cNvPr id="17" name="Shape 15"/>
+          <p:cNvSpPr/>
+          <p:nvPr/>
+        </p:nvSpPr>
+        <p:spPr>
+          <a:xfrm>
+            <a:off x="548640" y="3803904"/>
+            <a:ext cx="329184" cy="329184"/>
+          </a:xfrm>
+          <a:prstGeom prst="ellipse">
+            <a:avLst/>
+          </a:prstGeom>
+          <a:solidFill>
+            <a:srgbClr val="6849F6"/>
+          </a:solidFill>
+          <a:ln/>
+        </p:spPr>
+        <p:txBody>
+          <a:bodyPr/>
+          <a:lstStyle/>
+          <a:p>
+            <a:endParaRPr lang="en-ID"/>
+          </a:p>
+        </p:txBody>
+      </p:sp>
+      <p:sp>
+        <p:nvSpPr>
+          <p:cNvPr id="18" name="Text 16"/>
+          <p:cNvSpPr/>
+          <p:nvPr/>
+        </p:nvSpPr>
+        <p:spPr>
+          <a:xfrm>
+            <a:off x="548640" y="3803904"/>
+            <a:ext cx="329184" cy="329184"/>
+          </a:xfrm>
+          <a:prstGeom prst="rect">
+            <a:avLst/>
+          </a:prstGeom>
+          <a:noFill/>
+          <a:ln/>
+        </p:spPr>
+        <p:txBody>
+          <a:bodyPr wrap="square" lIns="0" tIns="0" rIns="0" bIns="0" rtlCol="0" anchor="ctr"/>
+          <a:lstStyle/>
+          <a:p>
+            <a:pPr marL="0" indent="0" algn="ctr">
+              <a:buNone/>
+            </a:pPr>
+            <a:r>
+              <a:rPr lang="en-US" sz="1300" b="1" dirty="0">
+                <a:solidFill>
+                  <a:srgbClr val="FFFFFF"/>
+                </a:solidFill>
+                <a:latin typeface="Arial" pitchFamily="34" charset="0"/>
+                <a:ea typeface="Arial" pitchFamily="34" charset="-122"/>
+                <a:cs typeface="Arial" pitchFamily="34" charset="-120"/>
+              </a:rPr>
+              <a:t>4</a:t>
+            </a:r>
+            <a:endParaRPr lang="en-US" sz="1300" dirty="0"/>
+          </a:p>
+        </p:txBody>
+      </p:sp>
+      <p:sp>
+        <p:nvSpPr>
+          <p:cNvPr id="19" name="Text 17"/>
+          <p:cNvSpPr/>
+          <p:nvPr/>
+        </p:nvSpPr>
+        <p:spPr>
+          <a:xfrm>
+            <a:off x="1024128" y="3776472"/>
+            <a:ext cx="10616184" cy="457200"/>
+          </a:xfrm>
+          <a:prstGeom prst="rect">
+            <a:avLst/>
+          </a:prstGeom>
+          <a:noFill/>
+          <a:ln/>
+        </p:spPr>
+        <p:txBody>
+          <a:bodyPr wrap="square" lIns="0" tIns="0" rIns="0" bIns="0" rtlCol="0" anchor="t"/>
+          <a:lstStyle/>
+          <a:p>
+            <a:pPr marL="0" indent="0">
               <a:lnSpc>
                 <a:spcPct val="112000"/>
               </a:lnSpc>
               <a:buNone/>
             </a:pPr>
             <a:r>
+              <a:rPr lang="en-US" sz="1300" b="1" dirty="0">
+                <a:solidFill>
+                  <a:srgbClr val="0D1321"/>
+                </a:solidFill>
+                <a:latin typeface="Arial" pitchFamily="34" charset="0"/>
+                <a:ea typeface="Arial" pitchFamily="34" charset="-122"/>
+                <a:cs typeface="Arial" pitchFamily="34" charset="-120"/>
+              </a:rPr>
+              <a:t>Pilih 3 Variasi Tone —  </a:t>
+            </a:r>
+            <a:r>
               <a:rPr lang="en-US" sz="1250" dirty="0">
                 <a:solidFill>
                   <a:srgbClr val="23283A"/>
@@ -3473,7 +3623,7 @@
                 <a:ea typeface="Arial" pitchFamily="34" charset="-122"/>
                 <a:cs typeface="Arial" pitchFamily="34" charset="-120"/>
               </a:rPr>
-              <a:t>isi juga palet warna &amp; mood visual — tanya 3 pelanggan lama kenapa mereka beli dari kamu</a:t>
+              <a:t>minta versi formal, santai untuk caption, dan emosional untuk iklan</a:t>
             </a:r>
             <a:endParaRPr lang="en-US" sz="1300" dirty="0"/>
           </a:p>
@@ -3481,13 +3631,13 @@
       </p:sp>
       <p:sp>
         <p:nvSpPr>
-          <p:cNvPr id="14" name="Shape 12"/>
-          <p:cNvSpPr/>
-          <p:nvPr/>
-        </p:nvSpPr>
-        <p:spPr>
-          <a:xfrm>
-            <a:off x="548640" y="3273552"/>
+          <p:cNvPr id="20" name="Shape 18"/>
+          <p:cNvSpPr/>
+          <p:nvPr/>
+        </p:nvSpPr>
+        <p:spPr>
+          <a:xfrm>
+            <a:off x="548640" y="4334256"/>
             <a:ext cx="329184" cy="329184"/>
           </a:xfrm>
           <a:prstGeom prst="ellipse">
@@ -3498,16 +3648,23 @@
           </a:solidFill>
           <a:ln/>
         </p:spPr>
-      </p:sp>
-      <p:sp>
-        <p:nvSpPr>
-          <p:cNvPr id="15" name="Text 13"/>
-          <p:cNvSpPr/>
-          <p:nvPr/>
-        </p:nvSpPr>
-        <p:spPr>
-          <a:xfrm>
-            <a:off x="548640" y="3273552"/>
+        <p:txBody>
+          <a:bodyPr/>
+          <a:lstStyle/>
+          <a:p>
+            <a:endParaRPr lang="en-ID"/>
+          </a:p>
+        </p:txBody>
+      </p:sp>
+      <p:sp>
+        <p:nvSpPr>
+          <p:cNvPr id="21" name="Text 19"/>
+          <p:cNvSpPr/>
+          <p:nvPr/>
+        </p:nvSpPr>
+        <p:spPr>
+          <a:xfrm>
+            <a:off x="548640" y="4334256"/>
             <a:ext cx="329184" cy="329184"/>
           </a:xfrm>
           <a:prstGeom prst="rect">
@@ -3520,7 +3677,7 @@
           <a:bodyPr wrap="square" lIns="0" tIns="0" rIns="0" bIns="0" rtlCol="0" anchor="ctr"/>
           <a:lstStyle/>
           <a:p>
-            <a:pPr algn="ctr" indent="0" marL="0">
+            <a:pPr marL="0" indent="0" algn="ctr">
               <a:buNone/>
             </a:pPr>
             <a:r>
@@ -3532,7 +3689,7 @@
                 <a:ea typeface="Arial" pitchFamily="34" charset="-122"/>
                 <a:cs typeface="Arial" pitchFamily="34" charset="-120"/>
               </a:rPr>
-              <a:t>3</a:t>
+              <a:t>5</a:t>
             </a:r>
             <a:endParaRPr lang="en-US" sz="1300" dirty="0"/>
           </a:p>
@@ -3540,13 +3697,13 @@
       </p:sp>
       <p:sp>
         <p:nvSpPr>
-          <p:cNvPr id="16" name="Text 14"/>
-          <p:cNvSpPr/>
-          <p:nvPr/>
-        </p:nvSpPr>
-        <p:spPr>
-          <a:xfrm>
-            <a:off x="1024128" y="3246120"/>
+          <p:cNvPr id="22" name="Text 20"/>
+          <p:cNvSpPr/>
+          <p:nvPr/>
+        </p:nvSpPr>
+        <p:spPr>
+          <a:xfrm>
+            <a:off x="1024128" y="4306824"/>
             <a:ext cx="10616184" cy="457200"/>
           </a:xfrm>
           <a:prstGeom prst="rect">
@@ -3559,7 +3716,7 @@
           <a:bodyPr wrap="square" lIns="0" tIns="0" rIns="0" bIns="0" rtlCol="0" anchor="t"/>
           <a:lstStyle/>
           <a:p>
-            <a:pPr indent="0" marL="0">
+            <a:pPr marL="0" indent="0">
               <a:lnSpc>
                 <a:spcPct val="112000"/>
               </a:lnSpc>
@@ -3574,250 +3731,8 @@
                 <a:ea typeface="Arial" pitchFamily="34" charset="-122"/>
                 <a:cs typeface="Arial" pitchFamily="34" charset="-120"/>
               </a:rPr>
-              <a:t>Generate ke Claude —  </a:t>
-            </a:r>
-            <a:pPr indent="0" marL="0">
-              <a:lnSpc>
-                <a:spcPct val="112000"/>
-              </a:lnSpc>
-              <a:buNone/>
-            </a:pPr>
-            <a:r>
-              <a:rPr lang="en-US" sz="1250" dirty="0">
-                <a:solidFill>
-                  <a:srgbClr val="23283A"/>
-                </a:solidFill>
-                <a:latin typeface="Arial" pitchFamily="34" charset="0"/>
-                <a:ea typeface="Arial" pitchFamily="34" charset="-122"/>
-                <a:cs typeface="Arial" pitchFamily="34" charset="-120"/>
-              </a:rPr>
-              <a:t>copy bagian yang ditandai PASTE KE CLAUDE saja (bukan seluruh file) — prompt sudah ada di dalamnya</a:t>
-            </a:r>
-            <a:endParaRPr lang="en-US" sz="1300" dirty="0"/>
-          </a:p>
-        </p:txBody>
-      </p:sp>
-      <p:sp>
-        <p:nvSpPr>
-          <p:cNvPr id="17" name="Shape 15"/>
-          <p:cNvSpPr/>
-          <p:nvPr/>
-        </p:nvSpPr>
-        <p:spPr>
-          <a:xfrm>
-            <a:off x="548640" y="3803904"/>
-            <a:ext cx="329184" cy="329184"/>
-          </a:xfrm>
-          <a:prstGeom prst="ellipse">
-            <a:avLst/>
-          </a:prstGeom>
-          <a:solidFill>
-            <a:srgbClr val="6849F6"/>
-          </a:solidFill>
-          <a:ln/>
-        </p:spPr>
-      </p:sp>
-      <p:sp>
-        <p:nvSpPr>
-          <p:cNvPr id="18" name="Text 16"/>
-          <p:cNvSpPr/>
-          <p:nvPr/>
-        </p:nvSpPr>
-        <p:spPr>
-          <a:xfrm>
-            <a:off x="548640" y="3803904"/>
-            <a:ext cx="329184" cy="329184"/>
-          </a:xfrm>
-          <a:prstGeom prst="rect">
-            <a:avLst/>
-          </a:prstGeom>
-          <a:noFill/>
-          <a:ln/>
-        </p:spPr>
-        <p:txBody>
-          <a:bodyPr wrap="square" lIns="0" tIns="0" rIns="0" bIns="0" rtlCol="0" anchor="ctr"/>
-          <a:lstStyle/>
-          <a:p>
-            <a:pPr algn="ctr" indent="0" marL="0">
-              <a:buNone/>
-            </a:pPr>
-            <a:r>
-              <a:rPr lang="en-US" sz="1300" b="1" dirty="0">
-                <a:solidFill>
-                  <a:srgbClr val="FFFFFF"/>
-                </a:solidFill>
-                <a:latin typeface="Arial" pitchFamily="34" charset="0"/>
-                <a:ea typeface="Arial" pitchFamily="34" charset="-122"/>
-                <a:cs typeface="Arial" pitchFamily="34" charset="-120"/>
-              </a:rPr>
-              <a:t>4</a:t>
-            </a:r>
-            <a:endParaRPr lang="en-US" sz="1300" dirty="0"/>
-          </a:p>
-        </p:txBody>
-      </p:sp>
-      <p:sp>
-        <p:nvSpPr>
-          <p:cNvPr id="19" name="Text 17"/>
-          <p:cNvSpPr/>
-          <p:nvPr/>
-        </p:nvSpPr>
-        <p:spPr>
-          <a:xfrm>
-            <a:off x="1024128" y="3776472"/>
-            <a:ext cx="10616184" cy="457200"/>
-          </a:xfrm>
-          <a:prstGeom prst="rect">
-            <a:avLst/>
-          </a:prstGeom>
-          <a:noFill/>
-          <a:ln/>
-        </p:spPr>
-        <p:txBody>
-          <a:bodyPr wrap="square" lIns="0" tIns="0" rIns="0" bIns="0" rtlCol="0" anchor="t"/>
-          <a:lstStyle/>
-          <a:p>
-            <a:pPr indent="0" marL="0">
-              <a:lnSpc>
-                <a:spcPct val="112000"/>
-              </a:lnSpc>
-              <a:buNone/>
-            </a:pPr>
-            <a:r>
-              <a:rPr lang="en-US" sz="1300" b="1" dirty="0">
-                <a:solidFill>
-                  <a:srgbClr val="0D1321"/>
-                </a:solidFill>
-                <a:latin typeface="Arial" pitchFamily="34" charset="0"/>
-                <a:ea typeface="Arial" pitchFamily="34" charset="-122"/>
-                <a:cs typeface="Arial" pitchFamily="34" charset="-120"/>
-              </a:rPr>
-              <a:t>Pilih 3 Variasi Tone —  </a:t>
-            </a:r>
-            <a:pPr indent="0" marL="0">
-              <a:lnSpc>
-                <a:spcPct val="112000"/>
-              </a:lnSpc>
-              <a:buNone/>
-            </a:pPr>
-            <a:r>
-              <a:rPr lang="en-US" sz="1250" dirty="0">
-                <a:solidFill>
-                  <a:srgbClr val="23283A"/>
-                </a:solidFill>
-                <a:latin typeface="Arial" pitchFamily="34" charset="0"/>
-                <a:ea typeface="Arial" pitchFamily="34" charset="-122"/>
-                <a:cs typeface="Arial" pitchFamily="34" charset="-120"/>
-              </a:rPr>
-              <a:t>minta versi formal, santai untuk caption, dan emosional untuk iklan</a:t>
-            </a:r>
-            <a:endParaRPr lang="en-US" sz="1300" dirty="0"/>
-          </a:p>
-        </p:txBody>
-      </p:sp>
-      <p:sp>
-        <p:nvSpPr>
-          <p:cNvPr id="20" name="Shape 18"/>
-          <p:cNvSpPr/>
-          <p:nvPr/>
-        </p:nvSpPr>
-        <p:spPr>
-          <a:xfrm>
-            <a:off x="548640" y="4334256"/>
-            <a:ext cx="329184" cy="329184"/>
-          </a:xfrm>
-          <a:prstGeom prst="ellipse">
-            <a:avLst/>
-          </a:prstGeom>
-          <a:solidFill>
-            <a:srgbClr val="6849F6"/>
-          </a:solidFill>
-          <a:ln/>
-        </p:spPr>
-      </p:sp>
-      <p:sp>
-        <p:nvSpPr>
-          <p:cNvPr id="21" name="Text 19"/>
-          <p:cNvSpPr/>
-          <p:nvPr/>
-        </p:nvSpPr>
-        <p:spPr>
-          <a:xfrm>
-            <a:off x="548640" y="4334256"/>
-            <a:ext cx="329184" cy="329184"/>
-          </a:xfrm>
-          <a:prstGeom prst="rect">
-            <a:avLst/>
-          </a:prstGeom>
-          <a:noFill/>
-          <a:ln/>
-        </p:spPr>
-        <p:txBody>
-          <a:bodyPr wrap="square" lIns="0" tIns="0" rIns="0" bIns="0" rtlCol="0" anchor="ctr"/>
-          <a:lstStyle/>
-          <a:p>
-            <a:pPr algn="ctr" indent="0" marL="0">
-              <a:buNone/>
-            </a:pPr>
-            <a:r>
-              <a:rPr lang="en-US" sz="1300" b="1" dirty="0">
-                <a:solidFill>
-                  <a:srgbClr val="FFFFFF"/>
-                </a:solidFill>
-                <a:latin typeface="Arial" pitchFamily="34" charset="0"/>
-                <a:ea typeface="Arial" pitchFamily="34" charset="-122"/>
-                <a:cs typeface="Arial" pitchFamily="34" charset="-120"/>
-              </a:rPr>
-              <a:t>5</a:t>
-            </a:r>
-            <a:endParaRPr lang="en-US" sz="1300" dirty="0"/>
-          </a:p>
-        </p:txBody>
-      </p:sp>
-      <p:sp>
-        <p:nvSpPr>
-          <p:cNvPr id="22" name="Text 20"/>
-          <p:cNvSpPr/>
-          <p:nvPr/>
-        </p:nvSpPr>
-        <p:spPr>
-          <a:xfrm>
-            <a:off x="1024128" y="4306824"/>
-            <a:ext cx="10616184" cy="457200"/>
-          </a:xfrm>
-          <a:prstGeom prst="rect">
-            <a:avLst/>
-          </a:prstGeom>
-          <a:noFill/>
-          <a:ln/>
-        </p:spPr>
-        <p:txBody>
-          <a:bodyPr wrap="square" lIns="0" tIns="0" rIns="0" bIns="0" rtlCol="0" anchor="t"/>
-          <a:lstStyle/>
-          <a:p>
-            <a:pPr indent="0" marL="0">
-              <a:lnSpc>
-                <a:spcPct val="112000"/>
-              </a:lnSpc>
-              <a:buNone/>
-            </a:pPr>
-            <a:r>
-              <a:rPr lang="en-US" sz="1300" b="1" dirty="0">
-                <a:solidFill>
-                  <a:srgbClr val="0D1321"/>
-                </a:solidFill>
-                <a:latin typeface="Arial" pitchFamily="34" charset="0"/>
-                <a:ea typeface="Arial" pitchFamily="34" charset="-122"/>
-                <a:cs typeface="Arial" pitchFamily="34" charset="-120"/>
-              </a:rPr>
               <a:t>Simpan di Claude Projects —  </a:t>
             </a:r>
-            <a:pPr indent="0" marL="0">
-              <a:lnSpc>
-                <a:spcPct val="112000"/>
-              </a:lnSpc>
-              <a:buNone/>
-            </a:pPr>
             <a:r>
               <a:rPr lang="en-US" sz="1250" dirty="0">
                 <a:solidFill>
@@ -3859,6 +3774,13 @@
             <a:prstDash val="solid"/>
           </a:ln>
         </p:spPr>
+        <p:txBody>
+          <a:bodyPr/>
+          <a:lstStyle/>
+          <a:p>
+            <a:endParaRPr lang="en-ID"/>
+          </a:p>
+        </p:txBody>
       </p:sp>
       <p:sp>
         <p:nvSpPr>
@@ -3881,7 +3803,7 @@
           <a:bodyPr wrap="square" lIns="0" tIns="0" rIns="0" bIns="0" rtlCol="0" anchor="ctr"/>
           <a:lstStyle/>
           <a:p>
-            <a:pPr indent="0" marL="0">
+            <a:pPr marL="0" indent="0">
               <a:lnSpc>
                 <a:spcPct val="120000"/>
               </a:lnSpc>
@@ -3898,12 +3820,6 @@
               </a:rPr>
               <a:t>◆  KENAPA WARNA DAN MOOD JUGA DISIMPAN?  </a:t>
             </a:r>
-            <a:pPr indent="0" marL="0">
-              <a:lnSpc>
-                <a:spcPct val="120000"/>
-              </a:lnSpc>
-              <a:buNone/>
-            </a:pPr>
             <a:r>
               <a:rPr lang="en-US" sz="1200" dirty="0">
                 <a:solidFill>
@@ -3935,6 +3851,7 @@
         <a:solidFill>
           <a:srgbClr val="FFFFFF"/>
         </a:solidFill>
+        <a:effectLst/>
       </p:bgPr>
     </p:bg>
     <p:spTree>
@@ -3970,6 +3887,13 @@
           </a:solidFill>
           <a:ln/>
         </p:spPr>
+        <p:txBody>
+          <a:bodyPr/>
+          <a:lstStyle/>
+          <a:p>
+            <a:endParaRPr lang="en-ID"/>
+          </a:p>
+        </p:txBody>
       </p:sp>
       <p:sp>
         <p:nvSpPr>
@@ -3990,6 +3914,13 @@
           </a:solidFill>
           <a:ln/>
         </p:spPr>
+        <p:txBody>
+          <a:bodyPr/>
+          <a:lstStyle/>
+          <a:p>
+            <a:endParaRPr lang="en-ID"/>
+          </a:p>
+        </p:txBody>
       </p:sp>
       <p:sp>
         <p:nvSpPr>
@@ -4012,7 +3943,7 @@
           <a:bodyPr wrap="square" lIns="0" tIns="0" rIns="0" bIns="0" rtlCol="0" anchor="ctr"/>
           <a:lstStyle/>
           <a:p>
-            <a:pPr indent="0" marL="0">
+            <a:pPr marL="0" indent="0">
               <a:buNone/>
             </a:pPr>
             <a:r>
@@ -4026,9 +3957,6 @@
               </a:rPr>
               <a:t>belajar</a:t>
             </a:r>
-            <a:pPr indent="0" marL="0">
-              <a:buNone/>
-            </a:pPr>
             <a:r>
               <a:rPr lang="en-US" sz="2000" b="1" dirty="0">
                 <a:solidFill>
@@ -4065,7 +3993,7 @@
           <a:bodyPr wrap="square" lIns="0" tIns="0" rIns="0" bIns="0" rtlCol="0" anchor="ctr"/>
           <a:lstStyle/>
           <a:p>
-            <a:pPr algn="r" indent="0" marL="0">
+            <a:pPr marL="0" indent="0" algn="r">
               <a:buNone/>
             </a:pPr>
             <a:r>
@@ -4104,11 +4032,11 @@
           <a:bodyPr wrap="square" lIns="0" tIns="0" rIns="0" bIns="0" rtlCol="0" anchor="ctr"/>
           <a:lstStyle/>
           <a:p>
-            <a:pPr indent="0" marL="0">
-              <a:buNone/>
-            </a:pPr>
-            <a:r>
-              <a:rPr lang="en-US" sz="1250" b="1" spc="100" kern="0" dirty="0">
+            <a:pPr marL="0" indent="0">
+              <a:buNone/>
+            </a:pPr>
+            <a:r>
+              <a:rPr lang="en-US" sz="1250" b="1" kern="0" spc="100" dirty="0">
                 <a:solidFill>
                   <a:srgbClr val="4B36C7"/>
                 </a:solidFill>
@@ -4143,7 +4071,7 @@
           <a:bodyPr wrap="square" lIns="0" tIns="0" rIns="0" bIns="0" rtlCol="0" anchor="ctr"/>
           <a:lstStyle/>
           <a:p>
-            <a:pPr indent="0" marL="0">
+            <a:pPr marL="0" indent="0">
               <a:buNone/>
             </a:pPr>
             <a:r>
@@ -4187,6 +4115,13 @@
             <a:prstDash val="solid"/>
           </a:ln>
         </p:spPr>
+        <p:txBody>
+          <a:bodyPr/>
+          <a:lstStyle/>
+          <a:p>
+            <a:endParaRPr lang="en-ID"/>
+          </a:p>
+        </p:txBody>
       </p:sp>
       <p:sp>
         <p:nvSpPr>
@@ -4209,11 +4144,11 @@
           <a:bodyPr wrap="square" lIns="0" tIns="0" rIns="0" bIns="0" rtlCol="0" anchor="ctr"/>
           <a:lstStyle/>
           <a:p>
-            <a:pPr indent="0" marL="0">
-              <a:buNone/>
-            </a:pPr>
-            <a:r>
-              <a:rPr lang="en-US" sz="1250" b="1" spc="50" kern="0" dirty="0">
+            <a:pPr marL="0" indent="0">
+              <a:buNone/>
+            </a:pPr>
+            <a:r>
+              <a:rPr lang="en-US" sz="1250" b="1" kern="0" spc="50" dirty="0">
                 <a:solidFill>
                   <a:srgbClr val="1A7A44"/>
                 </a:solidFill>
@@ -4248,7 +4183,7 @@
           <a:bodyPr wrap="square" lIns="0" tIns="0" rIns="0" bIns="0" rtlCol="0" anchor="t"/>
           <a:lstStyle/>
           <a:p>
-            <a:pPr indent="0" marL="0">
+            <a:pPr marL="0" indent="0">
               <a:lnSpc>
                 <a:spcPct val="125000"/>
               </a:lnSpc>
@@ -4295,6 +4230,13 @@
             <a:prstDash val="solid"/>
           </a:ln>
         </p:spPr>
+        <p:txBody>
+          <a:bodyPr/>
+          <a:lstStyle/>
+          <a:p>
+            <a:endParaRPr lang="en-ID"/>
+          </a:p>
+        </p:txBody>
       </p:sp>
       <p:sp>
         <p:nvSpPr>
@@ -4317,11 +4259,11 @@
           <a:bodyPr wrap="square" lIns="0" tIns="0" rIns="0" bIns="0" rtlCol="0" anchor="ctr"/>
           <a:lstStyle/>
           <a:p>
-            <a:pPr indent="0" marL="0">
-              <a:buNone/>
-            </a:pPr>
-            <a:r>
-              <a:rPr lang="en-US" sz="1250" b="1" spc="50" kern="0" dirty="0">
+            <a:pPr marL="0" indent="0">
+              <a:buNone/>
+            </a:pPr>
+            <a:r>
+              <a:rPr lang="en-US" sz="1250" b="1" kern="0" spc="50" dirty="0">
                 <a:solidFill>
                   <a:srgbClr val="8B7CF6"/>
                 </a:solidFill>
@@ -4356,7 +4298,7 @@
           <a:bodyPr wrap="square" lIns="0" tIns="0" rIns="0" bIns="0" rtlCol="0" anchor="t"/>
           <a:lstStyle/>
           <a:p>
-            <a:pPr indent="0" marL="0">
+            <a:pPr marL="0" indent="0">
               <a:lnSpc>
                 <a:spcPct val="125000"/>
               </a:lnSpc>
@@ -4376,7 +4318,7 @@
             <a:endParaRPr lang="en-US" sz="1250" dirty="0"/>
           </a:p>
           <a:p>
-            <a:pPr indent="0" marL="0">
+            <a:pPr marL="0" indent="0">
               <a:lnSpc>
                 <a:spcPct val="125000"/>
               </a:lnSpc>
@@ -4385,7 +4327,7 @@
             <a:endParaRPr lang="en-US" sz="1250" dirty="0"/>
           </a:p>
           <a:p>
-            <a:pPr indent="0" marL="0">
+            <a:pPr marL="0" indent="0">
               <a:lnSpc>
                 <a:spcPct val="125000"/>
               </a:lnSpc>
@@ -4707,4 +4649,319 @@
     </a:ext>
   </a:extLst>
 </a:theme>
+</file>
+
+<file path=ppt/theme/theme2.xml><?xml version="1.0" encoding="utf-8"?>
+<a:theme xmlns:a="http://schemas.openxmlformats.org/drawingml/2006/main" name="Office Theme">
+  <a:themeElements>
+    <a:clrScheme name="Office">
+      <a:dk1>
+        <a:sysClr val="windowText" lastClr="000000"/>
+      </a:dk1>
+      <a:lt1>
+        <a:sysClr val="window" lastClr="FFFFFF"/>
+      </a:lt1>
+      <a:dk2>
+        <a:srgbClr val="0E2841"/>
+      </a:dk2>
+      <a:lt2>
+        <a:srgbClr val="E8E8E8"/>
+      </a:lt2>
+      <a:accent1>
+        <a:srgbClr val="156082"/>
+      </a:accent1>
+      <a:accent2>
+        <a:srgbClr val="E97132"/>
+      </a:accent2>
+      <a:accent3>
+        <a:srgbClr val="196B24"/>
+      </a:accent3>
+      <a:accent4>
+        <a:srgbClr val="0F9ED5"/>
+      </a:accent4>
+      <a:accent5>
+        <a:srgbClr val="A02B93"/>
+      </a:accent5>
+      <a:accent6>
+        <a:srgbClr val="4EA72E"/>
+      </a:accent6>
+      <a:hlink>
+        <a:srgbClr val="467886"/>
+      </a:hlink>
+      <a:folHlink>
+        <a:srgbClr val="96607D"/>
+      </a:folHlink>
+    </a:clrScheme>
+    <a:fontScheme name="Office">
+      <a:majorFont>
+        <a:latin typeface="Aptos Display" panose="02110004020202020204"/>
+        <a:ea typeface=""/>
+        <a:cs typeface=""/>
+        <a:font script="Jpan" typeface="游ゴシック Light"/>
+        <a:font script="Hang" typeface="맑은 고딕"/>
+        <a:font script="Hans" typeface="等线 Light"/>
+        <a:font script="Hant" typeface="新細明體"/>
+        <a:font script="Arab" typeface="Times New Roman"/>
+        <a:font script="Hebr" typeface="Times New Roman"/>
+        <a:font script="Thai" typeface="Angsana New"/>
+        <a:font script="Ethi" typeface="Nyala"/>
+        <a:font script="Beng" typeface="Vrinda"/>
+        <a:font script="Gujr" typeface="Shruti"/>
+        <a:font script="Khmr" typeface="MoolBoran"/>
+        <a:font script="Knda" typeface="Tunga"/>
+        <a:font script="Guru" typeface="Raavi"/>
+        <a:font script="Cans" typeface="Euphemia"/>
+        <a:font script="Cher" typeface="Plantagenet Cherokee"/>
+        <a:font script="Yiii" typeface="Microsoft Yi Baiti"/>
+        <a:font script="Tibt" typeface="Microsoft Himalaya"/>
+        <a:font script="Thaa" typeface="MV Boli"/>
+        <a:font script="Deva" typeface="Mangal"/>
+        <a:font script="Telu" typeface="Gautami"/>
+        <a:font script="Taml" typeface="Latha"/>
+        <a:font script="Syrc" typeface="Estrangelo Edessa"/>
+        <a:font script="Orya" typeface="Kalinga"/>
+        <a:font script="Mlym" typeface="Kartika"/>
+        <a:font script="Laoo" typeface="DokChampa"/>
+        <a:font script="Sinh" typeface="Iskoola Pota"/>
+        <a:font script="Mong" typeface="Mongolian Baiti"/>
+        <a:font script="Viet" typeface="Times New Roman"/>
+        <a:font script="Uigh" typeface="Microsoft Uighur"/>
+        <a:font script="Geor" typeface="Sylfaen"/>
+        <a:font script="Armn" typeface="Arial"/>
+        <a:font script="Bugi" typeface="Leelawadee UI"/>
+        <a:font script="Bopo" typeface="Microsoft JhengHei"/>
+        <a:font script="Java" typeface="Javanese Text"/>
+        <a:font script="Lisu" typeface="Segoe UI"/>
+        <a:font script="Mymr" typeface="Myanmar Text"/>
+        <a:font script="Nkoo" typeface="Ebrima"/>
+        <a:font script="Olck" typeface="Nirmala UI"/>
+        <a:font script="Osma" typeface="Ebrima"/>
+        <a:font script="Phag" typeface="Phagspa"/>
+        <a:font script="Syrn" typeface="Estrangelo Edessa"/>
+        <a:font script="Syrj" typeface="Estrangelo Edessa"/>
+        <a:font script="Syre" typeface="Estrangelo Edessa"/>
+        <a:font script="Sora" typeface="Nirmala UI"/>
+        <a:font script="Tale" typeface="Microsoft Tai Le"/>
+        <a:font script="Talu" typeface="Microsoft New Tai Lue"/>
+        <a:font script="Tfng" typeface="Ebrima"/>
+      </a:majorFont>
+      <a:minorFont>
+        <a:latin typeface="Aptos" panose="02110004020202020204"/>
+        <a:ea typeface=""/>
+        <a:cs typeface=""/>
+        <a:font script="Jpan" typeface="游ゴシック"/>
+        <a:font script="Hang" typeface="맑은 고딕"/>
+        <a:font script="Hans" typeface="等线"/>
+        <a:font script="Hant" typeface="新細明體"/>
+        <a:font script="Arab" typeface="Arial"/>
+        <a:font script="Hebr" typeface="Arial"/>
+        <a:font script="Thai" typeface="Cordia New"/>
+        <a:font script="Ethi" typeface="Nyala"/>
+        <a:font script="Beng" typeface="Vrinda"/>
+        <a:font script="Gujr" typeface="Shruti"/>
+        <a:font script="Khmr" typeface="DaunPenh"/>
+        <a:font script="Knda" typeface="Tunga"/>
+        <a:font script="Guru" typeface="Raavi"/>
+        <a:font script="Cans" typeface="Euphemia"/>
+        <a:font script="Cher" typeface="Plantagenet Cherokee"/>
+        <a:font script="Yiii" typeface="Microsoft Yi Baiti"/>
+        <a:font script="Tibt" typeface="Microsoft Himalaya"/>
+        <a:font script="Thaa" typeface="MV Boli"/>
+        <a:font script="Deva" typeface="Mangal"/>
+        <a:font script="Telu" typeface="Gautami"/>
+        <a:font script="Taml" typeface="Latha"/>
+        <a:font script="Syrc" typeface="Estrangelo Edessa"/>
+        <a:font script="Orya" typeface="Kalinga"/>
+        <a:font script="Mlym" typeface="Kartika"/>
+        <a:font script="Laoo" typeface="DokChampa"/>
+        <a:font script="Sinh" typeface="Iskoola Pota"/>
+        <a:font script="Mong" typeface="Mongolian Baiti"/>
+        <a:font script="Viet" typeface="Arial"/>
+        <a:font script="Uigh" typeface="Microsoft Uighur"/>
+        <a:font script="Geor" typeface="Sylfaen"/>
+        <a:font script="Armn" typeface="Arial"/>
+        <a:font script="Bugi" typeface="Leelawadee UI"/>
+        <a:font script="Bopo" typeface="Microsoft JhengHei"/>
+        <a:font script="Java" typeface="Javanese Text"/>
+        <a:font script="Lisu" typeface="Segoe UI"/>
+        <a:font script="Mymr" typeface="Myanmar Text"/>
+        <a:font script="Nkoo" typeface="Ebrima"/>
+        <a:font script="Olck" typeface="Nirmala UI"/>
+        <a:font script="Osma" typeface="Ebrima"/>
+        <a:font script="Phag" typeface="Phagspa"/>
+        <a:font script="Syrn" typeface="Estrangelo Edessa"/>
+        <a:font script="Syrj" typeface="Estrangelo Edessa"/>
+        <a:font script="Syre" typeface="Estrangelo Edessa"/>
+        <a:font script="Sora" typeface="Nirmala UI"/>
+        <a:font script="Tale" typeface="Microsoft Tai Le"/>
+        <a:font script="Talu" typeface="Microsoft New Tai Lue"/>
+        <a:font script="Tfng" typeface="Ebrima"/>
+      </a:minorFont>
+    </a:fontScheme>
+    <a:fmtScheme name="Office">
+      <a:fillStyleLst>
+        <a:solidFill>
+          <a:schemeClr val="phClr"/>
+        </a:solidFill>
+        <a:gradFill rotWithShape="1">
+          <a:gsLst>
+            <a:gs pos="0">
+              <a:schemeClr val="phClr">
+                <a:lumMod val="110000"/>
+                <a:satMod val="105000"/>
+                <a:tint val="67000"/>
+              </a:schemeClr>
+            </a:gs>
+            <a:gs pos="50000">
+              <a:schemeClr val="phClr">
+                <a:lumMod val="105000"/>
+                <a:satMod val="103000"/>
+                <a:tint val="73000"/>
+              </a:schemeClr>
+            </a:gs>
+            <a:gs pos="100000">
+              <a:schemeClr val="phClr">
+                <a:lumMod val="105000"/>
+                <a:satMod val="109000"/>
+                <a:tint val="81000"/>
+              </a:schemeClr>
+            </a:gs>
+          </a:gsLst>
+          <a:lin ang="5400000" scaled="0"/>
+        </a:gradFill>
+        <a:gradFill rotWithShape="1">
+          <a:gsLst>
+            <a:gs pos="0">
+              <a:schemeClr val="phClr">
+                <a:satMod val="103000"/>
+                <a:lumMod val="102000"/>
+                <a:tint val="94000"/>
+              </a:schemeClr>
+            </a:gs>
+            <a:gs pos="50000">
+              <a:schemeClr val="phClr">
+                <a:satMod val="110000"/>
+                <a:lumMod val="100000"/>
+                <a:shade val="100000"/>
+              </a:schemeClr>
+            </a:gs>
+            <a:gs pos="100000">
+              <a:schemeClr val="phClr">
+                <a:lumMod val="99000"/>
+                <a:satMod val="120000"/>
+                <a:shade val="78000"/>
+              </a:schemeClr>
+            </a:gs>
+          </a:gsLst>
+          <a:lin ang="5400000" scaled="0"/>
+        </a:gradFill>
+      </a:fillStyleLst>
+      <a:lnStyleLst>
+        <a:ln w="12700" cap="flat" cmpd="sng" algn="ctr">
+          <a:solidFill>
+            <a:schemeClr val="phClr"/>
+          </a:solidFill>
+          <a:prstDash val="solid"/>
+          <a:miter lim="800000"/>
+        </a:ln>
+        <a:ln w="19050" cap="flat" cmpd="sng" algn="ctr">
+          <a:solidFill>
+            <a:schemeClr val="phClr"/>
+          </a:solidFill>
+          <a:prstDash val="solid"/>
+          <a:miter lim="800000"/>
+        </a:ln>
+        <a:ln w="25400" cap="flat" cmpd="sng" algn="ctr">
+          <a:solidFill>
+            <a:schemeClr val="phClr"/>
+          </a:solidFill>
+          <a:prstDash val="solid"/>
+          <a:miter lim="800000"/>
+        </a:ln>
+      </a:lnStyleLst>
+      <a:effectStyleLst>
+        <a:effectStyle>
+          <a:effectLst/>
+        </a:effectStyle>
+        <a:effectStyle>
+          <a:effectLst/>
+        </a:effectStyle>
+        <a:effectStyle>
+          <a:effectLst>
+            <a:outerShdw blurRad="57150" dist="19050" dir="5400000" algn="ctr" rotWithShape="0">
+              <a:srgbClr val="000000">
+                <a:alpha val="63000"/>
+              </a:srgbClr>
+            </a:outerShdw>
+          </a:effectLst>
+        </a:effectStyle>
+      </a:effectStyleLst>
+      <a:bgFillStyleLst>
+        <a:solidFill>
+          <a:schemeClr val="phClr"/>
+        </a:solidFill>
+        <a:solidFill>
+          <a:schemeClr val="phClr">
+            <a:tint val="95000"/>
+            <a:satMod val="170000"/>
+          </a:schemeClr>
+        </a:solidFill>
+        <a:gradFill rotWithShape="1">
+          <a:gsLst>
+            <a:gs pos="0">
+              <a:schemeClr val="phClr">
+                <a:tint val="93000"/>
+                <a:satMod val="150000"/>
+                <a:shade val="98000"/>
+                <a:lumMod val="102000"/>
+              </a:schemeClr>
+            </a:gs>
+            <a:gs pos="50000">
+              <a:schemeClr val="phClr">
+                <a:tint val="98000"/>
+                <a:satMod val="130000"/>
+                <a:shade val="90000"/>
+                <a:lumMod val="103000"/>
+              </a:schemeClr>
+            </a:gs>
+            <a:gs pos="100000">
+              <a:schemeClr val="phClr">
+                <a:shade val="63000"/>
+                <a:satMod val="120000"/>
+              </a:schemeClr>
+            </a:gs>
+          </a:gsLst>
+          <a:lin ang="5400000" scaled="0"/>
+        </a:gradFill>
+      </a:bgFillStyleLst>
+    </a:fmtScheme>
+  </a:themeElements>
+  <a:objectDefaults>
+    <a:lnDef>
+      <a:spPr/>
+      <a:bodyPr/>
+      <a:lstStyle/>
+      <a:style>
+        <a:lnRef idx="2">
+          <a:schemeClr val="accent1"/>
+        </a:lnRef>
+        <a:fillRef idx="0">
+          <a:schemeClr val="accent1"/>
+        </a:fillRef>
+        <a:effectRef idx="1">
+          <a:schemeClr val="accent1"/>
+        </a:effectRef>
+        <a:fontRef idx="minor">
+          <a:schemeClr val="tx1"/>
+        </a:fontRef>
+      </a:style>
+    </a:lnDef>
+  </a:objectDefaults>
+  <a:extraClrSchemeLst/>
+  <a:extLst>
+    <a:ext uri="{05A4C25C-085E-4340-85A3-A5531E510DB2}">
+      <thm15:themeFamily xmlns:thm15="http://schemas.microsoft.com/office/thememl/2012/main" name="Office Theme" id="{2E142A2C-CD16-42D6-873A-C26D2A0506FA}" vid="{1BDDFF52-6CD6-40A5-AB3C-68EB2F1E4D0A}"/>
+    </a:ext>
+  </a:extLst>
+</a:theme>
 </file>